--- a/submission/03_运行与评测包/正式案例_BYZSO冷启动/最终输出/figures/figstudio/fig02_route_matrix/deliverables/fig02_route_variable_matrix_editable.pptx
+++ b/submission/03_运行与评测包/正式案例_BYZSO冷启动/最终输出/figures/figstudio/fig02_route_matrix/deliverables/fig02_route_variable_matrix_editable.pptx
@@ -7,7 +7,7 @@
   <p:sldIdLst>
     <p:sldId id="256" r:id="rId7"/>
   </p:sldIdLst>
-  <p:sldSz cx="12191999" cy="8127999" type="screen4x3"/>
+  <p:sldSz cx="12191999" cy="10032999" type="screen4x3"/>
   <p:notesSz cx="6858000" cy="9144000"/>
   <p:defaultTextStyle>
     <a:defPPr>
@@ -502,7 +502,7 @@
           <a:lstStyle/>
           <a:p>
             <a:r>
-              <a:t>图 2 不同合成方法的条件比较与产物表征（第五轮 F01 分层横带 → super_img2ppt 重建）</a:t>
+              <a:t>图 2 不同合成方法的条件比较与产物表征（第六轮：印刷字号 + 内容定尺寸） [paper=byzso] [print_width_pt=435.2]</a:t>
             </a:r>
           </a:p>
         </p:txBody>
@@ -3524,12 +3524,12 @@
         </p:nvSpPr>
         <p:spPr>
           <a:xfrm>
-            <a:off x="206374" y="222249"/>
-            <a:ext cx="11779249" cy="3190874"/>
+            <a:off x="206374" y="206374"/>
+            <a:ext cx="11779249" cy="3500437"/>
           </a:xfrm>
           <a:prstGeom prst="roundRect">
             <a:avLst>
-              <a:gd name="adj" fmla="val 3482"/>
+              <a:gd name="adj" fmla="val 3174"/>
             </a:avLst>
           </a:prstGeom>
           <a:solidFill>
@@ -3572,8 +3572,8 @@
         </p:nvSpPr>
         <p:spPr>
           <a:xfrm>
-            <a:off x="349249" y="301624"/>
-            <a:ext cx="1063624" cy="357187"/>
+            <a:off x="349249" y="285749"/>
+            <a:ext cx="1285874" cy="444499"/>
           </a:xfrm>
           <a:prstGeom prst="rect">
             <a:avLst/>
@@ -3588,6 +3588,110 @@
           <a:lstStyle/>
           <a:p>
             <a:pPr algn="l" fontAlgn="base">
+              <a:lnSpc>
+                <a:spcPts val="3015"/>
+              </a:lnSpc>
+              <a:spcBef>
+                <a:spcPts val="0"/>
+              </a:spcBef>
+              <a:spcAft>
+                <a:spcPts val="0"/>
+              </a:spcAft>
+              <a:defRPr sz="2062" b="1" i="0" lang="zh-CN" dirty="0">
+                <a:solidFill>
+                  <a:srgbClr val="0F4F58"/>
+                </a:solidFill>
+                <a:latin typeface="Noto Sans CJK SC"/>
+                <a:ea typeface="Noto Sans CJK SC"/>
+                <a:cs typeface="Noto Sans CJK SC"/>
+              </a:defRPr>
+            </a:pPr>
+            <a:r>
+              <a:rPr sz="2062" b="1" i="0" lang="zh-CN" dirty="0">
+                <a:solidFill>
+                  <a:srgbClr val="0F4F58"/>
+                </a:solidFill>
+                <a:latin typeface="Noto Sans CJK SC"/>
+                <a:ea typeface="Noto Sans CJK SC"/>
+                <a:cs typeface="Noto Sans CJK SC"/>
+              </a:rPr>
+              <a:t>实验方法</a:t>
+            </a:r>
+          </a:p>
+        </p:txBody>
+      </p:sp>
+      <p:sp>
+        <p:nvSpPr>
+          <p:cNvPr id="4" name="leg" descr="Editable shape; source id leg"/>
+          <p:cNvSpPr/>
+          <p:nvPr/>
+        </p:nvSpPr>
+        <p:spPr>
+          <a:xfrm>
+            <a:off x="10112374" y="301624"/>
+            <a:ext cx="1730374" cy="404812"/>
+          </a:xfrm>
+          <a:prstGeom prst="roundRect">
+            <a:avLst>
+              <a:gd name="adj" fmla="val 50000"/>
+            </a:avLst>
+          </a:prstGeom>
+          <a:solidFill>
+            <a:srgbClr val="F5F6F7"/>
+          </a:solidFill>
+          <a:ln w="12699">
+            <a:solidFill>
+              <a:srgbClr val="9AA3AB"/>
+            </a:solidFill>
+          </a:ln>
+          <a:effectLst/>
+        </p:spPr>
+        <p:style>
+          <a:lnRef idx="1">
+            <a:schemeClr val="accent1"/>
+          </a:lnRef>
+          <a:fillRef idx="3">
+            <a:schemeClr val="accent1"/>
+          </a:fillRef>
+          <a:effectRef idx="0">
+            <a:schemeClr val="accent1"/>
+          </a:effectRef>
+          <a:fontRef idx="minor">
+            <a:schemeClr val="lt1"/>
+          </a:fontRef>
+        </p:style>
+        <p:txBody>
+          <a:bodyPr rtlCol="0" anchor="ctr"/>
+          <a:lstStyle/>
+          <a:p>
+            <a:pPr algn="ctr"/>
+          </a:p>
+        </p:txBody>
+      </p:sp>
+      <p:sp>
+        <p:nvSpPr>
+          <p:cNvPr id="5" name="leg_t" descr="Editable text; source id leg_t"/>
+          <p:cNvSpPr txBox="1"/>
+          <p:nvPr/>
+        </p:nvSpPr>
+        <p:spPr>
+          <a:xfrm>
+            <a:off x="10191749" y="333374"/>
+            <a:ext cx="1571624" cy="341312"/>
+          </a:xfrm>
+          <a:prstGeom prst="rect">
+            <a:avLst/>
+          </a:prstGeom>
+          <a:noFill/>
+          <a:effectLst/>
+        </p:spPr>
+        <p:txBody>
+          <a:bodyPr wrap="none" anchor="ctr" tIns="0" rIns="0" bIns="0" lIns="0" anchorCtr="0" vertOverflow="overflow">
+            <a:noAutofit/>
+          </a:bodyPr>
+          <a:lstStyle/>
+          <a:p>
+            <a:pPr algn="ctr" fontAlgn="base">
               <a:lnSpc>
                 <a:spcPts val="2359"/>
               </a:lnSpc>
@@ -3597,7 +3701,157 @@
               <a:spcAft>
                 <a:spcPts val="0"/>
               </a:spcAft>
-              <a:defRPr sz="1624" b="1" i="0" lang="zh-CN" dirty="0">
+              <a:defRPr sz="1624" b="0" i="0" lang="zh-CN" dirty="0">
+                <a:solidFill>
+                  <a:srgbClr val="5B6570"/>
+                </a:solidFill>
+                <a:latin typeface="Noto Sans CJK SC"/>
+                <a:ea typeface="Noto Sans CJK SC"/>
+                <a:cs typeface="Noto Sans CJK SC"/>
+              </a:defRPr>
+            </a:pPr>
+            <a:r>
+              <a:rPr sz="1624" b="0" i="0" lang="zh-CN" dirty="0">
+                <a:solidFill>
+                  <a:srgbClr val="5B6570"/>
+                </a:solidFill>
+                <a:latin typeface="Noto Sans CJK SC"/>
+                <a:ea typeface="Noto Sans CJK SC"/>
+                <a:cs typeface="Noto Sans CJK SC"/>
+              </a:rPr>
+              <a:t>虚线＝工艺参照</a:t>
+            </a:r>
+          </a:p>
+        </p:txBody>
+      </p:sp>
+      <p:sp>
+        <p:nvSpPr>
+          <p:cNvPr id="6" name="r1" descr="Editable shape; source id r1"/>
+          <p:cNvSpPr/>
+          <p:nvPr/>
+        </p:nvSpPr>
+        <p:spPr>
+          <a:xfrm>
+            <a:off x="333374" y="809624"/>
+            <a:ext cx="2238374" cy="2770187"/>
+          </a:xfrm>
+          <a:prstGeom prst="roundRect">
+            <a:avLst>
+              <a:gd name="adj" fmla="val 3191"/>
+            </a:avLst>
+          </a:prstGeom>
+          <a:solidFill>
+            <a:srgbClr val="FFFFFF"/>
+          </a:solidFill>
+          <a:ln w="15081">
+            <a:solidFill>
+              <a:srgbClr val="1F7F8C"/>
+            </a:solidFill>
+          </a:ln>
+          <a:effectLst/>
+        </p:spPr>
+        <p:style>
+          <a:lnRef idx="1">
+            <a:schemeClr val="accent1"/>
+          </a:lnRef>
+          <a:fillRef idx="3">
+            <a:schemeClr val="accent1"/>
+          </a:fillRef>
+          <a:effectRef idx="0">
+            <a:schemeClr val="accent1"/>
+          </a:effectRef>
+          <a:fontRef idx="minor">
+            <a:schemeClr val="lt1"/>
+          </a:fontRef>
+        </p:style>
+        <p:txBody>
+          <a:bodyPr rtlCol="0" anchor="ctr"/>
+          <a:lstStyle/>
+          <a:p>
+            <a:pPr algn="ctr"/>
+          </a:p>
+        </p:txBody>
+      </p:sp>
+      <p:sp>
+        <p:nvSpPr>
+          <p:cNvPr id="7" name="r1_b" descr="Editable shape; source id r1_b"/>
+          <p:cNvSpPr/>
+          <p:nvPr/>
+        </p:nvSpPr>
+        <p:spPr>
+          <a:xfrm>
+            <a:off x="333374" y="809624"/>
+            <a:ext cx="47624" cy="2770187"/>
+          </a:xfrm>
+          <a:prstGeom prst="roundRect">
+            <a:avLst>
+              <a:gd name="adj" fmla="val 50000"/>
+            </a:avLst>
+          </a:prstGeom>
+          <a:solidFill>
+            <a:srgbClr val="1F7F8C"/>
+          </a:solidFill>
+          <a:ln>
+            <a:noFill/>
+          </a:ln>
+          <a:effectLst/>
+        </p:spPr>
+        <p:style>
+          <a:lnRef idx="1">
+            <a:schemeClr val="accent1"/>
+          </a:lnRef>
+          <a:fillRef idx="3">
+            <a:schemeClr val="accent1"/>
+          </a:fillRef>
+          <a:effectRef idx="0">
+            <a:schemeClr val="accent1"/>
+          </a:effectRef>
+          <a:fontRef idx="minor">
+            <a:schemeClr val="lt1"/>
+          </a:fontRef>
+        </p:style>
+        <p:txBody>
+          <a:bodyPr rtlCol="0" anchor="ctr"/>
+          <a:lstStyle/>
+          <a:p>
+            <a:pPr algn="ctr"/>
+          </a:p>
+        </p:txBody>
+      </p:sp>
+      <p:sp>
+        <p:nvSpPr>
+          <p:cNvPr id="8" name="r1_t" descr="Editable text; source id r1_t"/>
+          <p:cNvSpPr txBox="1"/>
+          <p:nvPr/>
+        </p:nvSpPr>
+        <p:spPr>
+          <a:xfrm>
+            <a:off x="460374" y="904874"/>
+            <a:ext cx="2031999" cy="420687"/>
+          </a:xfrm>
+          <a:prstGeom prst="rect">
+            <a:avLst/>
+          </a:prstGeom>
+          <a:noFill/>
+          <a:effectLst/>
+        </p:spPr>
+        <p:txBody>
+          <a:bodyPr wrap="none" anchor="ctr" tIns="0" rIns="0" bIns="0" lIns="0" anchorCtr="0" vertOverflow="overflow">
+            <a:noAutofit/>
+          </a:bodyPr>
+          <a:lstStyle/>
+          <a:p>
+            <a:pPr algn="ctr" fontAlgn="base">
+              <a:lnSpc>
+                <a:spcPts val="2812"/>
+              </a:lnSpc>
+              <a:spcBef>
+                <a:spcPts val="0"/>
+              </a:spcBef>
+              <a:spcAft>
+                <a:spcPts val="0"/>
+              </a:spcAft>
+              <a:defRPr sz="1937" b="1" i="0" lang="zh-CN" dirty="0">
                 <a:solidFill>
                   <a:srgbClr val="0F4F58"/>
                 </a:solidFill>
@@ -3607,469 +3861,7 @@
               </a:defRPr>
             </a:pPr>
             <a:r>
-              <a:rPr sz="1624" b="1" i="0" lang="zh-CN" dirty="0">
-                <a:solidFill>
-                  <a:srgbClr val="0F4F58"/>
-                </a:solidFill>
-                <a:latin typeface="Noto Sans CJK SC"/>
-                <a:ea typeface="Noto Sans CJK SC"/>
-                <a:cs typeface="Noto Sans CJK SC"/>
-              </a:rPr>
-              <a:t>实验方法</a:t>
-            </a:r>
-          </a:p>
-        </p:txBody>
-      </p:sp>
-      <p:sp>
-        <p:nvSpPr>
-          <p:cNvPr id="4" name="zM" descr="Editable shape; source id zM"/>
-          <p:cNvSpPr/>
-          <p:nvPr/>
-        </p:nvSpPr>
-        <p:spPr>
-          <a:xfrm>
-            <a:off x="206374" y="3587749"/>
-            <a:ext cx="11779249" cy="1952624"/>
-          </a:xfrm>
-          <a:prstGeom prst="roundRect">
-            <a:avLst>
-              <a:gd name="adj" fmla="val 5691"/>
-            </a:avLst>
-          </a:prstGeom>
-          <a:solidFill>
-            <a:srgbClr val="EEF2F7"/>
-          </a:solidFill>
-          <a:ln w="12699">
-            <a:solidFill>
-              <a:srgbClr val="5B7592"/>
-            </a:solidFill>
-          </a:ln>
-          <a:effectLst/>
-        </p:spPr>
-        <p:style>
-          <a:lnRef idx="1">
-            <a:schemeClr val="accent1"/>
-          </a:lnRef>
-          <a:fillRef idx="3">
-            <a:schemeClr val="accent1"/>
-          </a:fillRef>
-          <a:effectRef idx="0">
-            <a:schemeClr val="accent1"/>
-          </a:effectRef>
-          <a:fontRef idx="minor">
-            <a:schemeClr val="lt1"/>
-          </a:fontRef>
-        </p:style>
-        <p:txBody>
-          <a:bodyPr rtlCol="0" anchor="ctr"/>
-          <a:lstStyle/>
-          <a:p>
-            <a:pPr algn="ctr"/>
-          </a:p>
-        </p:txBody>
-      </p:sp>
-      <p:sp>
-        <p:nvSpPr>
-          <p:cNvPr id="5" name="zM_l" descr="Editable text; source id zM_l"/>
-          <p:cNvSpPr txBox="1"/>
-          <p:nvPr/>
-        </p:nvSpPr>
-        <p:spPr>
-          <a:xfrm>
-            <a:off x="349249" y="3667124"/>
-            <a:ext cx="1063624" cy="357187"/>
-          </a:xfrm>
-          <a:prstGeom prst="rect">
-            <a:avLst/>
-          </a:prstGeom>
-          <a:noFill/>
-          <a:effectLst/>
-        </p:spPr>
-        <p:txBody>
-          <a:bodyPr wrap="none" anchor="ctr" tIns="0" rIns="0" bIns="0" lIns="0" anchorCtr="0" vertOverflow="overflow">
-            <a:noAutofit/>
-          </a:bodyPr>
-          <a:lstStyle/>
-          <a:p>
-            <a:pPr algn="l" fontAlgn="base">
-              <a:lnSpc>
-                <a:spcPts val="2359"/>
-              </a:lnSpc>
-              <a:spcBef>
-                <a:spcPts val="0"/>
-              </a:spcBef>
-              <a:spcAft>
-                <a:spcPts val="0"/>
-              </a:spcAft>
-              <a:defRPr sz="1624" b="1" i="0" lang="zh-CN" dirty="0">
-                <a:solidFill>
-                  <a:srgbClr val="2B3E57"/>
-                </a:solidFill>
-                <a:latin typeface="Noto Sans CJK SC"/>
-                <a:ea typeface="Noto Sans CJK SC"/>
-                <a:cs typeface="Noto Sans CJK SC"/>
-              </a:defRPr>
-            </a:pPr>
-            <a:r>
-              <a:rPr sz="1624" b="1" i="0" lang="zh-CN" dirty="0">
-                <a:solidFill>
-                  <a:srgbClr val="2B3E57"/>
-                </a:solidFill>
-                <a:latin typeface="Noto Sans CJK SC"/>
-                <a:ea typeface="Noto Sans CJK SC"/>
-                <a:cs typeface="Noto Sans CJK SC"/>
-              </a:rPr>
-              <a:t>文献证据</a:t>
-            </a:r>
-          </a:p>
-        </p:txBody>
-      </p:sp>
-      <p:sp>
-        <p:nvSpPr>
-          <p:cNvPr id="6" name="zB" descr="Editable shape; source id zB"/>
-          <p:cNvSpPr/>
-          <p:nvPr/>
-        </p:nvSpPr>
-        <p:spPr>
-          <a:xfrm>
-            <a:off x="206374" y="5778499"/>
-            <a:ext cx="11779249" cy="2127249"/>
-          </a:xfrm>
-          <a:prstGeom prst="roundRect">
-            <a:avLst>
-              <a:gd name="adj" fmla="val 5223"/>
-            </a:avLst>
-          </a:prstGeom>
-          <a:solidFill>
-            <a:srgbClr val="E6F2F3"/>
-          </a:solidFill>
-          <a:ln w="12699">
-            <a:solidFill>
-              <a:srgbClr val="1F7F8C"/>
-            </a:solidFill>
-          </a:ln>
-          <a:effectLst/>
-        </p:spPr>
-        <p:style>
-          <a:lnRef idx="1">
-            <a:schemeClr val="accent1"/>
-          </a:lnRef>
-          <a:fillRef idx="3">
-            <a:schemeClr val="accent1"/>
-          </a:fillRef>
-          <a:effectRef idx="0">
-            <a:schemeClr val="accent1"/>
-          </a:effectRef>
-          <a:fontRef idx="minor">
-            <a:schemeClr val="lt1"/>
-          </a:fontRef>
-        </p:style>
-        <p:txBody>
-          <a:bodyPr rtlCol="0" anchor="ctr"/>
-          <a:lstStyle/>
-          <a:p>
-            <a:pPr algn="ctr"/>
-          </a:p>
-        </p:txBody>
-      </p:sp>
-      <p:sp>
-        <p:nvSpPr>
-          <p:cNvPr id="7" name="zB_l" descr="Editable text; source id zB_l"/>
-          <p:cNvSpPr txBox="1"/>
-          <p:nvPr/>
-        </p:nvSpPr>
-        <p:spPr>
-          <a:xfrm>
-            <a:off x="349249" y="5857874"/>
-            <a:ext cx="1063624" cy="357187"/>
-          </a:xfrm>
-          <a:prstGeom prst="rect">
-            <a:avLst/>
-          </a:prstGeom>
-          <a:noFill/>
-          <a:effectLst/>
-        </p:spPr>
-        <p:txBody>
-          <a:bodyPr wrap="none" anchor="ctr" tIns="0" rIns="0" bIns="0" lIns="0" anchorCtr="0" vertOverflow="overflow">
-            <a:noAutofit/>
-          </a:bodyPr>
-          <a:lstStyle/>
-          <a:p>
-            <a:pPr algn="l" fontAlgn="base">
-              <a:lnSpc>
-                <a:spcPts val="2359"/>
-              </a:lnSpc>
-              <a:spcBef>
-                <a:spcPts val="0"/>
-              </a:spcBef>
-              <a:spcAft>
-                <a:spcPts val="0"/>
-              </a:spcAft>
-              <a:defRPr sz="1624" b="1" i="0" lang="zh-CN" dirty="0">
-                <a:solidFill>
-                  <a:srgbClr val="0F4F58"/>
-                </a:solidFill>
-                <a:latin typeface="Noto Sans CJK SC"/>
-                <a:ea typeface="Noto Sans CJK SC"/>
-                <a:cs typeface="Noto Sans CJK SC"/>
-              </a:defRPr>
-            </a:pPr>
-            <a:r>
-              <a:rPr sz="1624" b="1" i="0" lang="zh-CN" dirty="0">
-                <a:solidFill>
-                  <a:srgbClr val="0F4F58"/>
-                </a:solidFill>
-                <a:latin typeface="Noto Sans CJK SC"/>
-                <a:ea typeface="Noto Sans CJK SC"/>
-                <a:cs typeface="Noto Sans CJK SC"/>
-              </a:rPr>
-              <a:t>产物表征</a:t>
-            </a:r>
-          </a:p>
-        </p:txBody>
-      </p:sp>
-      <p:sp>
-        <p:nvSpPr>
-          <p:cNvPr id="8" name="leg" descr="Editable shape; source id leg"/>
-          <p:cNvSpPr/>
-          <p:nvPr/>
-        </p:nvSpPr>
-        <p:spPr>
-          <a:xfrm>
-            <a:off x="10406062" y="317499"/>
-            <a:ext cx="1285874" cy="309562"/>
-          </a:xfrm>
-          <a:prstGeom prst="roundRect">
-            <a:avLst>
-              <a:gd name="adj" fmla="val 50000"/>
-            </a:avLst>
-          </a:prstGeom>
-          <a:solidFill>
-            <a:srgbClr val="F5F6F7"/>
-          </a:solidFill>
-          <a:ln w="12699">
-            <a:solidFill>
-              <a:srgbClr val="9AA3AB"/>
-            </a:solidFill>
-          </a:ln>
-          <a:effectLst/>
-        </p:spPr>
-        <p:style>
-          <a:lnRef idx="1">
-            <a:schemeClr val="accent1"/>
-          </a:lnRef>
-          <a:fillRef idx="3">
-            <a:schemeClr val="accent1"/>
-          </a:fillRef>
-          <a:effectRef idx="0">
-            <a:schemeClr val="accent1"/>
-          </a:effectRef>
-          <a:fontRef idx="minor">
-            <a:schemeClr val="lt1"/>
-          </a:fontRef>
-        </p:style>
-        <p:txBody>
-          <a:bodyPr rtlCol="0" anchor="ctr"/>
-          <a:lstStyle/>
-          <a:p>
-            <a:pPr algn="ctr"/>
-          </a:p>
-        </p:txBody>
-      </p:sp>
-      <p:sp>
-        <p:nvSpPr>
-          <p:cNvPr id="9" name="leg_t" descr="Editable text; source id leg_t"/>
-          <p:cNvSpPr txBox="1"/>
-          <p:nvPr/>
-        </p:nvSpPr>
-        <p:spPr>
-          <a:xfrm>
-            <a:off x="10485437" y="349249"/>
-            <a:ext cx="1127124" cy="246062"/>
-          </a:xfrm>
-          <a:prstGeom prst="rect">
-            <a:avLst/>
-          </a:prstGeom>
-          <a:noFill/>
-          <a:effectLst/>
-        </p:spPr>
-        <p:txBody>
-          <a:bodyPr wrap="none" anchor="ctr" tIns="0" rIns="0" bIns="0" lIns="0" anchorCtr="0" vertOverflow="overflow">
-            <a:noAutofit/>
-          </a:bodyPr>
-          <a:lstStyle/>
-          <a:p>
-            <a:pPr algn="ctr" fontAlgn="base">
-              <a:lnSpc>
-                <a:spcPts val="1640"/>
-              </a:lnSpc>
-              <a:spcBef>
-                <a:spcPts val="0"/>
-              </a:spcBef>
-              <a:spcAft>
-                <a:spcPts val="0"/>
-              </a:spcAft>
-              <a:defRPr sz="1124" b="1" i="0" lang="zh-CN" dirty="0">
-                <a:solidFill>
-                  <a:srgbClr val="5B6570"/>
-                </a:solidFill>
-                <a:latin typeface="Noto Sans CJK SC"/>
-                <a:ea typeface="Noto Sans CJK SC"/>
-                <a:cs typeface="Noto Sans CJK SC"/>
-              </a:defRPr>
-            </a:pPr>
-            <a:r>
-              <a:rPr sz="1124" b="1" i="0" lang="zh-CN" dirty="0">
-                <a:solidFill>
-                  <a:srgbClr val="5B6570"/>
-                </a:solidFill>
-                <a:latin typeface="Noto Sans CJK SC"/>
-                <a:ea typeface="Noto Sans CJK SC"/>
-                <a:cs typeface="Noto Sans CJK SC"/>
-              </a:rPr>
-              <a:t>虚线＝工艺参照</a:t>
-            </a:r>
-          </a:p>
-        </p:txBody>
-      </p:sp>
-      <p:sp>
-        <p:nvSpPr>
-          <p:cNvPr id="10" name="r1" descr="Editable shape; source id r1"/>
-          <p:cNvSpPr/>
-          <p:nvPr/>
-        </p:nvSpPr>
-        <p:spPr>
-          <a:xfrm>
-            <a:off x="396874" y="793749"/>
-            <a:ext cx="2206624" cy="2381249"/>
-          </a:xfrm>
-          <a:prstGeom prst="roundRect">
-            <a:avLst>
-              <a:gd name="adj" fmla="val 3237"/>
-            </a:avLst>
-          </a:prstGeom>
-          <a:solidFill>
-            <a:srgbClr val="FFFFFF"/>
-          </a:solidFill>
-          <a:ln w="15081">
-            <a:solidFill>
-              <a:srgbClr val="1F7F8C"/>
-            </a:solidFill>
-          </a:ln>
-          <a:effectLst/>
-        </p:spPr>
-        <p:style>
-          <a:lnRef idx="1">
-            <a:schemeClr val="accent1"/>
-          </a:lnRef>
-          <a:fillRef idx="3">
-            <a:schemeClr val="accent1"/>
-          </a:fillRef>
-          <a:effectRef idx="0">
-            <a:schemeClr val="accent1"/>
-          </a:effectRef>
-          <a:fontRef idx="minor">
-            <a:schemeClr val="lt1"/>
-          </a:fontRef>
-        </p:style>
-        <p:txBody>
-          <a:bodyPr rtlCol="0" anchor="ctr"/>
-          <a:lstStyle/>
-          <a:p>
-            <a:pPr algn="ctr"/>
-          </a:p>
-        </p:txBody>
-      </p:sp>
-      <p:sp>
-        <p:nvSpPr>
-          <p:cNvPr id="11" name="r1_b" descr="Editable shape; source id r1_b"/>
-          <p:cNvSpPr/>
-          <p:nvPr/>
-        </p:nvSpPr>
-        <p:spPr>
-          <a:xfrm>
-            <a:off x="396874" y="793749"/>
-            <a:ext cx="55562" cy="2381249"/>
-          </a:xfrm>
-          <a:prstGeom prst="roundRect">
-            <a:avLst>
-              <a:gd name="adj" fmla="val 42857"/>
-            </a:avLst>
-          </a:prstGeom>
-          <a:solidFill>
-            <a:srgbClr val="1F7F8C"/>
-          </a:solidFill>
-          <a:ln>
-            <a:noFill/>
-          </a:ln>
-          <a:effectLst/>
-        </p:spPr>
-        <p:style>
-          <a:lnRef idx="1">
-            <a:schemeClr val="accent1"/>
-          </a:lnRef>
-          <a:fillRef idx="3">
-            <a:schemeClr val="accent1"/>
-          </a:fillRef>
-          <a:effectRef idx="0">
-            <a:schemeClr val="accent1"/>
-          </a:effectRef>
-          <a:fontRef idx="minor">
-            <a:schemeClr val="lt1"/>
-          </a:fontRef>
-        </p:style>
-        <p:txBody>
-          <a:bodyPr rtlCol="0" anchor="ctr"/>
-          <a:lstStyle/>
-          <a:p>
-            <a:pPr algn="ctr"/>
-          </a:p>
-        </p:txBody>
-      </p:sp>
-      <p:sp>
-        <p:nvSpPr>
-          <p:cNvPr id="12" name="r1_t" descr="Editable text; source id r1_t"/>
-          <p:cNvSpPr txBox="1"/>
-          <p:nvPr/>
-        </p:nvSpPr>
-        <p:spPr>
-          <a:xfrm>
-            <a:off x="523874" y="904874"/>
-            <a:ext cx="1952624" cy="317499"/>
-          </a:xfrm>
-          <a:prstGeom prst="rect">
-            <a:avLst/>
-          </a:prstGeom>
-          <a:noFill/>
-          <a:effectLst/>
-        </p:spPr>
-        <p:txBody>
-          <a:bodyPr wrap="none" anchor="ctr" tIns="0" rIns="0" bIns="0" lIns="0" anchorCtr="0" vertOverflow="overflow">
-            <a:noAutofit/>
-          </a:bodyPr>
-          <a:lstStyle/>
-          <a:p>
-            <a:pPr algn="ctr" fontAlgn="base">
-              <a:lnSpc>
-                <a:spcPts val="2187"/>
-              </a:lnSpc>
-              <a:spcBef>
-                <a:spcPts val="0"/>
-              </a:spcBef>
-              <a:spcAft>
-                <a:spcPts val="0"/>
-              </a:spcAft>
-              <a:defRPr sz="1499" b="1" i="0" lang="zh-CN" dirty="0">
-                <a:solidFill>
-                  <a:srgbClr val="0F4F58"/>
-                </a:solidFill>
-                <a:latin typeface="Noto Sans CJK SC"/>
-                <a:ea typeface="Noto Sans CJK SC"/>
-                <a:cs typeface="Noto Sans CJK SC"/>
-              </a:defRPr>
-            </a:pPr>
-            <a:r>
-              <a:rPr sz="1499" b="1" i="0" lang="zh-CN" dirty="0">
+              <a:rPr sz="1937" b="1" i="0" lang="zh-CN" dirty="0">
                 <a:solidFill>
                   <a:srgbClr val="0F4F58"/>
                 </a:solidFill>
@@ -4084,14 +3876,14 @@
       </p:sp>
       <p:cxnSp>
         <p:nvCxnSpPr>
-          <p:cNvPr id="13" name="r1_g_b_0" descr="Editable line; source id r1_g_b_0"/>
+          <p:cNvPr id="9" name="r1_g_b_0" descr="Editable line; source id r1_g_b_0"/>
           <p:cNvCxnSpPr/>
           <p:nvPr/>
         </p:nvCxnSpPr>
         <p:spPr>
           <a:xfrm>
-            <a:off x="1381124" y="1325562"/>
-            <a:ext cx="0" cy="333375"/>
+            <a:off x="1381124" y="1420812"/>
+            <a:ext cx="0" cy="269875"/>
           </a:xfrm>
           <a:prstGeom prst="line">
             <a:avLst/>
@@ -4120,14 +3912,14 @@
       </p:cxnSp>
       <p:cxnSp>
         <p:nvCxnSpPr>
-          <p:cNvPr id="14" name="r1_g_b_1" descr="Editable line; source id r1_g_b_1"/>
+          <p:cNvPr id="10" name="r1_g_b_1" descr="Editable line; source id r1_g_b_1"/>
           <p:cNvCxnSpPr/>
           <p:nvPr/>
         </p:nvCxnSpPr>
         <p:spPr>
           <a:xfrm>
-            <a:off x="1381124" y="1658937"/>
-            <a:ext cx="55563" cy="31750"/>
+            <a:off x="1381124" y="1690687"/>
+            <a:ext cx="39688" cy="31750"/>
           </a:xfrm>
           <a:prstGeom prst="line">
             <a:avLst/>
@@ -4156,14 +3948,14 @@
       </p:cxnSp>
       <p:cxnSp>
         <p:nvCxnSpPr>
-          <p:cNvPr id="15" name="r1_g_b_2" descr="Editable line; source id r1_g_b_2"/>
+          <p:cNvPr id="11" name="r1_g_b_2" descr="Editable line; source id r1_g_b_2"/>
           <p:cNvCxnSpPr/>
           <p:nvPr/>
         </p:nvCxnSpPr>
         <p:spPr>
           <a:xfrm>
-            <a:off x="1436687" y="1690687"/>
-            <a:ext cx="127000" cy="0"/>
+            <a:off x="1420812" y="1722437"/>
+            <a:ext cx="111125" cy="0"/>
           </a:xfrm>
           <a:prstGeom prst="line">
             <a:avLst/>
@@ -4192,14 +3984,14 @@
       </p:cxnSp>
       <p:cxnSp>
         <p:nvCxnSpPr>
-          <p:cNvPr id="16" name="r1_g_b_3" descr="Editable line; source id r1_g_b_3"/>
+          <p:cNvPr id="12" name="r1_g_b_3" descr="Editable line; source id r1_g_b_3"/>
           <p:cNvCxnSpPr/>
           <p:nvPr/>
         </p:nvCxnSpPr>
         <p:spPr>
           <a:xfrm flipV="1">
-            <a:off x="1563687" y="1658937"/>
-            <a:ext cx="55562" cy="31750"/>
+            <a:off x="1531937" y="1690687"/>
+            <a:ext cx="39687" cy="31750"/>
           </a:xfrm>
           <a:prstGeom prst="line">
             <a:avLst/>
@@ -4228,14 +4020,14 @@
       </p:cxnSp>
       <p:cxnSp>
         <p:nvCxnSpPr>
-          <p:cNvPr id="17" name="r1_g_b_4" descr="Editable line; source id r1_g_b_4"/>
+          <p:cNvPr id="13" name="r1_g_b_4" descr="Editable line; source id r1_g_b_4"/>
           <p:cNvCxnSpPr/>
           <p:nvPr/>
         </p:nvCxnSpPr>
         <p:spPr>
           <a:xfrm flipV="1">
-            <a:off x="1619249" y="1325562"/>
-            <a:ext cx="0" cy="333375"/>
+            <a:off x="1571624" y="1420812"/>
+            <a:ext cx="0" cy="269875"/>
           </a:xfrm>
           <a:prstGeom prst="line">
             <a:avLst/>
@@ -4264,14 +4056,14 @@
       </p:cxnSp>
       <p:cxnSp>
         <p:nvCxnSpPr>
-          <p:cNvPr id="18" name="r1_g_t" descr="Editable line; source id r1_g_t"/>
+          <p:cNvPr id="14" name="r1_g_t" descr="Editable line; source id r1_g_t"/>
           <p:cNvCxnSpPr/>
           <p:nvPr/>
         </p:nvCxnSpPr>
         <p:spPr>
           <a:xfrm>
-            <a:off x="1349374" y="1325562"/>
-            <a:ext cx="301625" cy="0"/>
+            <a:off x="1357312" y="1420812"/>
+            <a:ext cx="238125" cy="0"/>
           </a:xfrm>
           <a:prstGeom prst="line">
             <a:avLst/>
@@ -4300,14 +4092,14 @@
       </p:cxnSp>
       <p:sp>
         <p:nvSpPr>
-          <p:cNvPr id="19" name="r1_g_d1" descr="Editable shape; source id r1_g_d1"/>
+          <p:cNvPr id="15" name="r1_g_d1" descr="Editable shape; source id r1_g_d1"/>
           <p:cNvSpPr/>
           <p:nvPr/>
         </p:nvSpPr>
         <p:spPr>
           <a:xfrm>
-            <a:off x="1444624" y="1523999"/>
-            <a:ext cx="39687" cy="39687"/>
+            <a:off x="1428749" y="1587499"/>
+            <a:ext cx="31749" cy="31749"/>
           </a:xfrm>
           <a:prstGeom prst="ellipse">
             <a:avLst/>
@@ -4344,13 +4136,13 @@
       </p:sp>
       <p:sp>
         <p:nvSpPr>
-          <p:cNvPr id="20" name="r1_g_d2" descr="Editable shape; source id r1_g_d2"/>
+          <p:cNvPr id="16" name="r1_g_d2" descr="Editable shape; source id r1_g_d2"/>
           <p:cNvSpPr/>
           <p:nvPr/>
         </p:nvSpPr>
         <p:spPr>
           <a:xfrm>
-            <a:off x="1523999" y="1579562"/>
+            <a:off x="1492249" y="1627187"/>
             <a:ext cx="23812" cy="23812"/>
           </a:xfrm>
           <a:prstGeom prst="ellipse">
@@ -4388,18 +4180,18 @@
       </p:sp>
       <p:sp>
         <p:nvSpPr>
-          <p:cNvPr id="21" name="r1c_t0" descr="Editable shape; source id r1c_t0"/>
+          <p:cNvPr id="17" name="r1c_t0" descr="Editable shape; source id r1c_t0"/>
           <p:cNvSpPr/>
           <p:nvPr/>
         </p:nvSpPr>
         <p:spPr>
           <a:xfrm>
-            <a:off x="539749" y="1857374"/>
-            <a:ext cx="1920874" cy="301624"/>
+            <a:off x="460374" y="1849437"/>
+            <a:ext cx="2031999" cy="444499"/>
           </a:xfrm>
           <a:prstGeom prst="roundRect">
             <a:avLst>
-              <a:gd name="adj" fmla="val 15789"/>
+              <a:gd name="adj" fmla="val 10714"/>
             </a:avLst>
           </a:prstGeom>
           <a:solidFill>
@@ -4436,14 +4228,14 @@
       </p:sp>
       <p:sp>
         <p:nvSpPr>
-          <p:cNvPr id="22" name="r1c_t0_t" descr="Editable text; source id r1c_t0_t"/>
+          <p:cNvPr id="18" name="r1c_t0_t" descr="Editable text; source id r1c_t0_t"/>
           <p:cNvSpPr txBox="1"/>
           <p:nvPr/>
         </p:nvSpPr>
         <p:spPr>
           <a:xfrm>
-            <a:off x="595312" y="1889124"/>
-            <a:ext cx="1809749" cy="238124"/>
+            <a:off x="515937" y="1881187"/>
+            <a:ext cx="1920874" cy="380999"/>
           </a:xfrm>
           <a:prstGeom prst="rect">
             <a:avLst/>
@@ -4459,7 +4251,7 @@
           <a:p>
             <a:pPr algn="ctr" fontAlgn="base">
               <a:lnSpc>
-                <a:spcPts val="1734"/>
+                <a:spcPts val="2546"/>
               </a:lnSpc>
               <a:spcBef>
                 <a:spcPts val="0"/>
@@ -4467,7 +4259,7 @@
               <a:spcAft>
                 <a:spcPts val="0"/>
               </a:spcAft>
-              <a:defRPr sz="1187" b="1" i="0" lang="zh-CN" dirty="0">
+              <a:defRPr sz="1749" b="0" i="0" lang="zh-CN" dirty="0">
                 <a:solidFill>
                   <a:srgbClr val="27303A"/>
                 </a:solidFill>
@@ -4477,7 +4269,7 @@
               </a:defRPr>
             </a:pPr>
             <a:r>
-              <a:rPr sz="1187" b="1" i="0" lang="zh-CN" dirty="0">
+              <a:rPr sz="1749" b="0" i="0" lang="zh-CN" dirty="0">
                 <a:solidFill>
                   <a:srgbClr val="27303A"/>
                 </a:solidFill>
@@ -4492,18 +4284,18 @@
       </p:sp>
       <p:sp>
         <p:nvSpPr>
-          <p:cNvPr id="23" name="r1c_t1" descr="Editable shape; source id r1c_t1"/>
+          <p:cNvPr id="19" name="r1c_t1" descr="Editable shape; source id r1c_t1"/>
           <p:cNvSpPr/>
           <p:nvPr/>
         </p:nvSpPr>
         <p:spPr>
           <a:xfrm>
-            <a:off x="539749" y="2301874"/>
-            <a:ext cx="1920874" cy="301624"/>
+            <a:off x="460374" y="2436812"/>
+            <a:ext cx="2031999" cy="444499"/>
           </a:xfrm>
           <a:prstGeom prst="roundRect">
             <a:avLst>
-              <a:gd name="adj" fmla="val 15789"/>
+              <a:gd name="adj" fmla="val 10714"/>
             </a:avLst>
           </a:prstGeom>
           <a:solidFill>
@@ -4540,14 +4332,14 @@
       </p:sp>
       <p:sp>
         <p:nvSpPr>
-          <p:cNvPr id="24" name="r1c_t1_t" descr="Editable text; source id r1c_t1_t"/>
+          <p:cNvPr id="20" name="r1c_t1_t" descr="Editable text; source id r1c_t1_t"/>
           <p:cNvSpPr txBox="1"/>
           <p:nvPr/>
         </p:nvSpPr>
         <p:spPr>
           <a:xfrm>
-            <a:off x="595312" y="2333624"/>
-            <a:ext cx="1809749" cy="238124"/>
+            <a:off x="515937" y="2468562"/>
+            <a:ext cx="1920874" cy="380999"/>
           </a:xfrm>
           <a:prstGeom prst="rect">
             <a:avLst/>
@@ -4563,7 +4355,7 @@
           <a:p>
             <a:pPr algn="ctr" fontAlgn="base">
               <a:lnSpc>
-                <a:spcPts val="1734"/>
+                <a:spcPts val="2546"/>
               </a:lnSpc>
               <a:spcBef>
                 <a:spcPts val="0"/>
@@ -4571,7 +4363,7 @@
               <a:spcAft>
                 <a:spcPts val="0"/>
               </a:spcAft>
-              <a:defRPr sz="1187" b="1" i="0" lang="zh-CN" dirty="0">
+              <a:defRPr sz="1749" b="0" i="0" lang="zh-CN" dirty="0">
                 <a:solidFill>
                   <a:srgbClr val="27303A"/>
                 </a:solidFill>
@@ -4581,7 +4373,7 @@
               </a:defRPr>
             </a:pPr>
             <a:r>
-              <a:rPr sz="1187" b="1" i="0" lang="zh-CN" dirty="0">
+              <a:rPr sz="1749" b="0" i="0" lang="zh-CN" dirty="0">
                 <a:solidFill>
                   <a:srgbClr val="27303A"/>
                 </a:solidFill>
@@ -4596,13 +4388,13 @@
       </p:sp>
       <p:sp>
         <p:nvSpPr>
-          <p:cNvPr id="25" name="r1c_a1" descr="Editable line; source id r1c_a1"/>
+          <p:cNvPr id="21" name="r1c_a1" descr="Editable line; source id r1c_a1"/>
           <p:cNvSpPr/>
           <p:nvPr/>
         </p:nvSpPr>
         <p:spPr>
           <a:xfrm>
-            <a:off x="1476613" y="2182812"/>
+            <a:off x="1452801" y="2317750"/>
             <a:ext cx="47149" cy="95250"/>
           </a:xfrm>
           <a:custGeom>
@@ -4670,18 +4462,18 @@
       </p:sp>
       <p:sp>
         <p:nvSpPr>
-          <p:cNvPr id="26" name="r1c_t2" descr="Editable shape; source id r1c_t2"/>
+          <p:cNvPr id="22" name="r1c_t2" descr="Editable shape; source id r1c_t2"/>
           <p:cNvSpPr/>
           <p:nvPr/>
         </p:nvSpPr>
         <p:spPr>
           <a:xfrm>
-            <a:off x="539749" y="2746374"/>
-            <a:ext cx="1920874" cy="301624"/>
+            <a:off x="460374" y="3024187"/>
+            <a:ext cx="2031999" cy="444499"/>
           </a:xfrm>
           <a:prstGeom prst="roundRect">
             <a:avLst>
-              <a:gd name="adj" fmla="val 15789"/>
+              <a:gd name="adj" fmla="val 10714"/>
             </a:avLst>
           </a:prstGeom>
           <a:solidFill>
@@ -4718,14 +4510,14 @@
       </p:sp>
       <p:sp>
         <p:nvSpPr>
-          <p:cNvPr id="27" name="r1c_t2_t" descr="Editable text; source id r1c_t2_t"/>
+          <p:cNvPr id="23" name="r1c_t2_t" descr="Editable text; source id r1c_t2_t"/>
           <p:cNvSpPr txBox="1"/>
           <p:nvPr/>
         </p:nvSpPr>
         <p:spPr>
           <a:xfrm>
-            <a:off x="595312" y="2778124"/>
-            <a:ext cx="1809749" cy="238124"/>
+            <a:off x="515937" y="3055937"/>
+            <a:ext cx="1920874" cy="380999"/>
           </a:xfrm>
           <a:prstGeom prst="rect">
             <a:avLst/>
@@ -4741,7 +4533,7 @@
           <a:p>
             <a:pPr algn="ctr" fontAlgn="base">
               <a:lnSpc>
-                <a:spcPts val="1734"/>
+                <a:spcPts val="2546"/>
               </a:lnSpc>
               <a:spcBef>
                 <a:spcPts val="0"/>
@@ -4749,7 +4541,7 @@
               <a:spcAft>
                 <a:spcPts val="0"/>
               </a:spcAft>
-              <a:defRPr sz="1187" b="1" i="0" lang="zh-CN" dirty="0">
+              <a:defRPr sz="1749" b="0" i="0" lang="zh-CN" dirty="0">
                 <a:solidFill>
                   <a:srgbClr val="27303A"/>
                 </a:solidFill>
@@ -4759,7 +4551,7 @@
               </a:defRPr>
             </a:pPr>
             <a:r>
-              <a:rPr sz="1187" b="1" i="0" lang="zh-CN" dirty="0">
+              <a:rPr sz="1749" b="0" i="0" lang="zh-CN" dirty="0">
                 <a:solidFill>
                   <a:srgbClr val="27303A"/>
                 </a:solidFill>
@@ -4774,13 +4566,13 @@
       </p:sp>
       <p:sp>
         <p:nvSpPr>
-          <p:cNvPr id="28" name="r1c_a2" descr="Editable line; source id r1c_a2"/>
+          <p:cNvPr id="24" name="r1c_a2" descr="Editable line; source id r1c_a2"/>
           <p:cNvSpPr/>
           <p:nvPr/>
         </p:nvSpPr>
         <p:spPr>
           <a:xfrm>
-            <a:off x="1476613" y="2627312"/>
+            <a:off x="1452801" y="2905125"/>
             <a:ext cx="47149" cy="95250"/>
           </a:xfrm>
           <a:custGeom>
@@ -4848,18 +4640,18 @@
       </p:sp>
       <p:sp>
         <p:nvSpPr>
-          <p:cNvPr id="29" name="r2" descr="Editable shape; source id r2"/>
+          <p:cNvPr id="25" name="r2" descr="Editable shape; source id r2"/>
           <p:cNvSpPr/>
           <p:nvPr/>
         </p:nvSpPr>
         <p:spPr>
           <a:xfrm>
-            <a:off x="2682874" y="793749"/>
-            <a:ext cx="2206624" cy="2381249"/>
+            <a:off x="2651124" y="809624"/>
+            <a:ext cx="2238374" cy="2770187"/>
           </a:xfrm>
           <a:prstGeom prst="roundRect">
             <a:avLst>
-              <a:gd name="adj" fmla="val 3237"/>
+              <a:gd name="adj" fmla="val 3191"/>
             </a:avLst>
           </a:prstGeom>
           <a:solidFill>
@@ -4896,18 +4688,18 @@
       </p:sp>
       <p:sp>
         <p:nvSpPr>
-          <p:cNvPr id="30" name="r2_b" descr="Editable shape; source id r2_b"/>
+          <p:cNvPr id="26" name="r2_b" descr="Editable shape; source id r2_b"/>
           <p:cNvSpPr/>
           <p:nvPr/>
         </p:nvSpPr>
         <p:spPr>
           <a:xfrm>
-            <a:off x="2682874" y="793749"/>
-            <a:ext cx="55562" cy="2381249"/>
+            <a:off x="2651124" y="809624"/>
+            <a:ext cx="47624" cy="2770187"/>
           </a:xfrm>
           <a:prstGeom prst="roundRect">
             <a:avLst>
-              <a:gd name="adj" fmla="val 42857"/>
+              <a:gd name="adj" fmla="val 50000"/>
             </a:avLst>
           </a:prstGeom>
           <a:solidFill>
@@ -4942,14 +4734,14 @@
       </p:sp>
       <p:sp>
         <p:nvSpPr>
-          <p:cNvPr id="31" name="r2_t" descr="Editable text; source id r2_t"/>
+          <p:cNvPr id="27" name="r2_t" descr="Editable text; source id r2_t"/>
           <p:cNvSpPr txBox="1"/>
           <p:nvPr/>
         </p:nvSpPr>
         <p:spPr>
           <a:xfrm>
-            <a:off x="2809874" y="904874"/>
-            <a:ext cx="1952624" cy="317499"/>
+            <a:off x="2778124" y="904874"/>
+            <a:ext cx="2031999" cy="420687"/>
           </a:xfrm>
           <a:prstGeom prst="rect">
             <a:avLst/>
@@ -4965,7 +4757,7 @@
           <a:p>
             <a:pPr algn="ctr" fontAlgn="base">
               <a:lnSpc>
-                <a:spcPts val="2187"/>
+                <a:spcPts val="2812"/>
               </a:lnSpc>
               <a:spcBef>
                 <a:spcPts val="0"/>
@@ -4973,7 +4765,7 @@
               <a:spcAft>
                 <a:spcPts val="0"/>
               </a:spcAft>
-              <a:defRPr sz="1499" b="1" i="0" lang="zh-CN" dirty="0">
+              <a:defRPr sz="1937" b="1" i="0" lang="zh-CN" dirty="0">
                 <a:solidFill>
                   <a:srgbClr val="0F4F58"/>
                 </a:solidFill>
@@ -4983,7 +4775,7 @@
               </a:defRPr>
             </a:pPr>
             <a:r>
-              <a:rPr sz="1499" b="1" i="0" lang="zh-CN" dirty="0">
+              <a:rPr sz="1937" b="1" i="0" lang="zh-CN" dirty="0">
                 <a:solidFill>
                   <a:srgbClr val="0F4F58"/>
                 </a:solidFill>
@@ -4994,7 +4786,7 @@
               <a:t>自熔</a:t>
             </a:r>
             <a:r>
-              <a:rPr sz="1499" b="1" i="0" lang="zh-CN" dirty="0">
+              <a:rPr sz="1937" b="1" i="0" lang="zh-CN" dirty="0">
                 <a:solidFill>
                   <a:srgbClr val="0F4F58"/>
                 </a:solidFill>
@@ -5005,7 +4797,7 @@
               <a:t>/</a:t>
             </a:r>
             <a:r>
-              <a:rPr sz="1499" b="1" i="0" lang="zh-CN" dirty="0">
+              <a:rPr sz="1937" b="1" i="0" lang="zh-CN" dirty="0">
                 <a:solidFill>
                   <a:srgbClr val="0F4F58"/>
                 </a:solidFill>
@@ -5020,14 +4812,14 @@
       </p:sp>
       <p:cxnSp>
         <p:nvCxnSpPr>
-          <p:cNvPr id="32" name="r2_g_b_0" descr="Editable line; source id r2_g_b_0"/>
+          <p:cNvPr id="28" name="r2_g_b_0" descr="Editable line; source id r2_g_b_0"/>
           <p:cNvCxnSpPr/>
           <p:nvPr/>
         </p:nvCxnSpPr>
         <p:spPr>
           <a:xfrm>
-            <a:off x="3611562" y="1389062"/>
-            <a:ext cx="55562" cy="285750"/>
+            <a:off x="3651249" y="1468437"/>
+            <a:ext cx="47625" cy="238125"/>
           </a:xfrm>
           <a:prstGeom prst="line">
             <a:avLst/>
@@ -5056,14 +4848,14 @@
       </p:cxnSp>
       <p:cxnSp>
         <p:nvCxnSpPr>
-          <p:cNvPr id="33" name="r2_g_b_1" descr="Editable line; source id r2_g_b_1"/>
+          <p:cNvPr id="29" name="r2_g_b_1" descr="Editable line; source id r2_g_b_1"/>
           <p:cNvCxnSpPr/>
           <p:nvPr/>
         </p:nvCxnSpPr>
         <p:spPr>
           <a:xfrm>
-            <a:off x="3667124" y="1674812"/>
-            <a:ext cx="238125" cy="0"/>
+            <a:off x="3698874" y="1706562"/>
+            <a:ext cx="190500" cy="0"/>
           </a:xfrm>
           <a:prstGeom prst="line">
             <a:avLst/>
@@ -5092,14 +4884,14 @@
       </p:cxnSp>
       <p:cxnSp>
         <p:nvCxnSpPr>
-          <p:cNvPr id="34" name="r2_g_b_2" descr="Editable line; source id r2_g_b_2"/>
+          <p:cNvPr id="30" name="r2_g_b_2" descr="Editable line; source id r2_g_b_2"/>
           <p:cNvCxnSpPr/>
           <p:nvPr/>
         </p:nvCxnSpPr>
         <p:spPr>
           <a:xfrm flipV="1">
-            <a:off x="3905249" y="1389062"/>
-            <a:ext cx="55563" cy="285750"/>
+            <a:off x="3889374" y="1468437"/>
+            <a:ext cx="47625" cy="238125"/>
           </a:xfrm>
           <a:prstGeom prst="line">
             <a:avLst/>
@@ -5128,14 +4920,14 @@
       </p:cxnSp>
       <p:cxnSp>
         <p:nvCxnSpPr>
-          <p:cNvPr id="35" name="r2_g_r" descr="Editable line; source id r2_g_r"/>
+          <p:cNvPr id="31" name="r2_g_r" descr="Editable line; source id r2_g_r"/>
           <p:cNvCxnSpPr/>
           <p:nvPr/>
         </p:nvCxnSpPr>
         <p:spPr>
           <a:xfrm>
-            <a:off x="3579812" y="1389062"/>
-            <a:ext cx="412750" cy="0"/>
+            <a:off x="3627437" y="1468437"/>
+            <a:ext cx="333375" cy="0"/>
           </a:xfrm>
           <a:prstGeom prst="line">
             <a:avLst/>
@@ -5164,14 +4956,14 @@
       </p:cxnSp>
       <p:cxnSp>
         <p:nvCxnSpPr>
-          <p:cNvPr id="36" name="r2_g_w_0" descr="Editable line; source id r2_g_w_0"/>
+          <p:cNvPr id="32" name="r2_g_w_0" descr="Editable line; source id r2_g_w_0"/>
           <p:cNvCxnSpPr/>
           <p:nvPr/>
         </p:nvCxnSpPr>
         <p:spPr>
           <a:xfrm flipV="1">
-            <a:off x="3651249" y="1452562"/>
-            <a:ext cx="63500" cy="39687"/>
+            <a:off x="3682999" y="1523999"/>
+            <a:ext cx="47625" cy="31750"/>
           </a:xfrm>
           <a:prstGeom prst="line">
             <a:avLst/>
@@ -5200,14 +4992,14 @@
       </p:cxnSp>
       <p:cxnSp>
         <p:nvCxnSpPr>
-          <p:cNvPr id="37" name="r2_g_w_1" descr="Editable line; source id r2_g_w_1"/>
+          <p:cNvPr id="33" name="r2_g_w_1" descr="Editable line; source id r2_g_w_1"/>
           <p:cNvCxnSpPr/>
           <p:nvPr/>
         </p:nvCxnSpPr>
         <p:spPr>
           <a:xfrm>
-            <a:off x="3714749" y="1452562"/>
-            <a:ext cx="71438" cy="39687"/>
+            <a:off x="3730624" y="1523999"/>
+            <a:ext cx="63500" cy="31750"/>
           </a:xfrm>
           <a:prstGeom prst="line">
             <a:avLst/>
@@ -5236,14 +5028,14 @@
       </p:cxnSp>
       <p:cxnSp>
         <p:nvCxnSpPr>
-          <p:cNvPr id="38" name="r2_g_w_2" descr="Editable line; source id r2_g_w_2"/>
+          <p:cNvPr id="34" name="r2_g_w_2" descr="Editable line; source id r2_g_w_2"/>
           <p:cNvCxnSpPr/>
           <p:nvPr/>
         </p:nvCxnSpPr>
         <p:spPr>
           <a:xfrm flipV="1">
-            <a:off x="3786187" y="1452562"/>
-            <a:ext cx="71437" cy="39687"/>
+            <a:off x="3794124" y="1523999"/>
+            <a:ext cx="63500" cy="31750"/>
           </a:xfrm>
           <a:prstGeom prst="line">
             <a:avLst/>
@@ -5272,14 +5064,14 @@
       </p:cxnSp>
       <p:cxnSp>
         <p:nvCxnSpPr>
-          <p:cNvPr id="39" name="r2_g_w_3" descr="Editable line; source id r2_g_w_3"/>
+          <p:cNvPr id="35" name="r2_g_w_3" descr="Editable line; source id r2_g_w_3"/>
           <p:cNvCxnSpPr/>
           <p:nvPr/>
         </p:nvCxnSpPr>
         <p:spPr>
           <a:xfrm>
-            <a:off x="3857624" y="1452562"/>
-            <a:ext cx="63500" cy="39687"/>
+            <a:off x="3857624" y="1523999"/>
+            <a:ext cx="47625" cy="31750"/>
           </a:xfrm>
           <a:prstGeom prst="line">
             <a:avLst/>
@@ -5308,18 +5100,18 @@
       </p:cxnSp>
       <p:sp>
         <p:nvSpPr>
-          <p:cNvPr id="40" name="r2c_t0" descr="Editable shape; source id r2c_t0"/>
+          <p:cNvPr id="36" name="r2c_t0" descr="Editable shape; source id r2c_t0"/>
           <p:cNvSpPr/>
           <p:nvPr/>
         </p:nvSpPr>
         <p:spPr>
           <a:xfrm>
-            <a:off x="2825749" y="1857374"/>
-            <a:ext cx="1920874" cy="301624"/>
+            <a:off x="2778124" y="1849437"/>
+            <a:ext cx="2031999" cy="444499"/>
           </a:xfrm>
           <a:prstGeom prst="roundRect">
             <a:avLst>
-              <a:gd name="adj" fmla="val 15789"/>
+              <a:gd name="adj" fmla="val 10714"/>
             </a:avLst>
           </a:prstGeom>
           <a:solidFill>
@@ -5356,14 +5148,14 @@
       </p:sp>
       <p:sp>
         <p:nvSpPr>
-          <p:cNvPr id="41" name="r2c_t0_t" descr="Editable text; source id r2c_t0_t"/>
+          <p:cNvPr id="37" name="r2c_t0_t" descr="Editable text; source id r2c_t0_t"/>
           <p:cNvSpPr txBox="1"/>
           <p:nvPr/>
         </p:nvSpPr>
         <p:spPr>
           <a:xfrm>
-            <a:off x="2881312" y="1889124"/>
-            <a:ext cx="1809749" cy="238124"/>
+            <a:off x="2833687" y="1881187"/>
+            <a:ext cx="1920874" cy="380999"/>
           </a:xfrm>
           <a:prstGeom prst="rect">
             <a:avLst/>
@@ -5379,7 +5171,7 @@
           <a:p>
             <a:pPr algn="ctr" fontAlgn="base">
               <a:lnSpc>
-                <a:spcPts val="1734"/>
+                <a:spcPts val="2546"/>
               </a:lnSpc>
               <a:spcBef>
                 <a:spcPts val="0"/>
@@ -5387,7 +5179,7 @@
               <a:spcAft>
                 <a:spcPts val="0"/>
               </a:spcAft>
-              <a:defRPr sz="1187" b="1" i="0" lang="zh-CN" dirty="0">
+              <a:defRPr sz="1749" b="0" i="0" lang="zh-CN" dirty="0">
                 <a:solidFill>
                   <a:srgbClr val="27303A"/>
                 </a:solidFill>
@@ -5397,7 +5189,7 @@
               </a:defRPr>
             </a:pPr>
             <a:r>
-              <a:rPr sz="1187" b="1" i="0" lang="zh-CN" dirty="0">
+              <a:rPr sz="1749" b="0" i="0" lang="zh-CN" dirty="0">
                 <a:solidFill>
                   <a:srgbClr val="27303A"/>
                 </a:solidFill>
@@ -5412,18 +5204,18 @@
       </p:sp>
       <p:sp>
         <p:nvSpPr>
-          <p:cNvPr id="42" name="r2c_t1" descr="Editable shape; source id r2c_t1"/>
+          <p:cNvPr id="38" name="r2c_t1" descr="Editable shape; source id r2c_t1"/>
           <p:cNvSpPr/>
           <p:nvPr/>
         </p:nvSpPr>
         <p:spPr>
           <a:xfrm>
-            <a:off x="2825749" y="2301874"/>
-            <a:ext cx="1920874" cy="301624"/>
+            <a:off x="2778124" y="2436812"/>
+            <a:ext cx="2031999" cy="444499"/>
           </a:xfrm>
           <a:prstGeom prst="roundRect">
             <a:avLst>
-              <a:gd name="adj" fmla="val 15789"/>
+              <a:gd name="adj" fmla="val 10714"/>
             </a:avLst>
           </a:prstGeom>
           <a:solidFill>
@@ -5460,14 +5252,14 @@
       </p:sp>
       <p:sp>
         <p:nvSpPr>
-          <p:cNvPr id="43" name="r2c_t1_t" descr="Editable text; source id r2c_t1_t"/>
+          <p:cNvPr id="39" name="r2c_t1_t" descr="Editable text; source id r2c_t1_t"/>
           <p:cNvSpPr txBox="1"/>
           <p:nvPr/>
         </p:nvSpPr>
         <p:spPr>
           <a:xfrm>
-            <a:off x="2881312" y="2333624"/>
-            <a:ext cx="1809749" cy="238124"/>
+            <a:off x="2833687" y="2468562"/>
+            <a:ext cx="1920874" cy="380999"/>
           </a:xfrm>
           <a:prstGeom prst="rect">
             <a:avLst/>
@@ -5483,7 +5275,7 @@
           <a:p>
             <a:pPr algn="ctr" fontAlgn="base">
               <a:lnSpc>
-                <a:spcPts val="1734"/>
+                <a:spcPts val="2546"/>
               </a:lnSpc>
               <a:spcBef>
                 <a:spcPts val="0"/>
@@ -5491,7 +5283,7 @@
               <a:spcAft>
                 <a:spcPts val="0"/>
               </a:spcAft>
-              <a:defRPr sz="1187" b="1" i="0" lang="zh-CN" dirty="0">
+              <a:defRPr sz="1749" b="0" i="0" lang="zh-CN" dirty="0">
                 <a:solidFill>
                   <a:srgbClr val="27303A"/>
                 </a:solidFill>
@@ -5501,7 +5293,7 @@
               </a:defRPr>
             </a:pPr>
             <a:r>
-              <a:rPr sz="1187" b="1" i="0" lang="zh-CN" dirty="0">
+              <a:rPr sz="1749" b="0" i="0" lang="zh-CN" dirty="0">
                 <a:solidFill>
                   <a:srgbClr val="27303A"/>
                 </a:solidFill>
@@ -5516,13 +5308,13 @@
       </p:sp>
       <p:sp>
         <p:nvSpPr>
-          <p:cNvPr id="44" name="r2c_a1" descr="Editable line; source id r2c_a1"/>
+          <p:cNvPr id="40" name="r2c_a1" descr="Editable line; source id r2c_a1"/>
           <p:cNvSpPr/>
           <p:nvPr/>
         </p:nvSpPr>
         <p:spPr>
           <a:xfrm>
-            <a:off x="3762613" y="2182812"/>
+            <a:off x="3770551" y="2317750"/>
             <a:ext cx="47149" cy="95250"/>
           </a:xfrm>
           <a:custGeom>
@@ -5590,18 +5382,18 @@
       </p:sp>
       <p:sp>
         <p:nvSpPr>
-          <p:cNvPr id="45" name="r2c_t2" descr="Editable shape; source id r2c_t2"/>
+          <p:cNvPr id="41" name="r2c_t2" descr="Editable shape; source id r2c_t2"/>
           <p:cNvSpPr/>
           <p:nvPr/>
         </p:nvSpPr>
         <p:spPr>
           <a:xfrm>
-            <a:off x="2825749" y="2746374"/>
-            <a:ext cx="1920874" cy="301624"/>
+            <a:off x="2778124" y="3024187"/>
+            <a:ext cx="2031999" cy="444499"/>
           </a:xfrm>
           <a:prstGeom prst="roundRect">
             <a:avLst>
-              <a:gd name="adj" fmla="val 15789"/>
+              <a:gd name="adj" fmla="val 10714"/>
             </a:avLst>
           </a:prstGeom>
           <a:solidFill>
@@ -5638,14 +5430,14 @@
       </p:sp>
       <p:sp>
         <p:nvSpPr>
-          <p:cNvPr id="46" name="r2c_t2_t" descr="Editable text; source id r2c_t2_t"/>
+          <p:cNvPr id="42" name="r2c_t2_t" descr="Editable text; source id r2c_t2_t"/>
           <p:cNvSpPr txBox="1"/>
           <p:nvPr/>
         </p:nvSpPr>
         <p:spPr>
           <a:xfrm>
-            <a:off x="2881312" y="2778124"/>
-            <a:ext cx="1809749" cy="238124"/>
+            <a:off x="2833687" y="3055937"/>
+            <a:ext cx="1920874" cy="380999"/>
           </a:xfrm>
           <a:prstGeom prst="rect">
             <a:avLst/>
@@ -5661,7 +5453,7 @@
           <a:p>
             <a:pPr algn="ctr" fontAlgn="base">
               <a:lnSpc>
-                <a:spcPts val="1734"/>
+                <a:spcPts val="2546"/>
               </a:lnSpc>
               <a:spcBef>
                 <a:spcPts val="0"/>
@@ -5669,7 +5461,7 @@
               <a:spcAft>
                 <a:spcPts val="0"/>
               </a:spcAft>
-              <a:defRPr sz="1187" b="1" i="0" lang="zh-CN" dirty="0">
+              <a:defRPr sz="1749" b="0" i="0" lang="zh-CN" dirty="0">
                 <a:solidFill>
                   <a:srgbClr val="27303A"/>
                 </a:solidFill>
@@ -5679,7 +5471,7 @@
               </a:defRPr>
             </a:pPr>
             <a:r>
-              <a:rPr sz="1187" b="1" i="0" lang="zh-CN" dirty="0">
+              <a:rPr sz="1749" b="0" i="0" lang="zh-CN" dirty="0">
                 <a:solidFill>
                   <a:srgbClr val="27303A"/>
                 </a:solidFill>
@@ -5694,13 +5486,13 @@
       </p:sp>
       <p:sp>
         <p:nvSpPr>
-          <p:cNvPr id="47" name="r2c_a2" descr="Editable line; source id r2c_a2"/>
+          <p:cNvPr id="43" name="r2c_a2" descr="Editable line; source id r2c_a2"/>
           <p:cNvSpPr/>
           <p:nvPr/>
         </p:nvSpPr>
         <p:spPr>
           <a:xfrm>
-            <a:off x="3762613" y="2627312"/>
+            <a:off x="3770551" y="2905125"/>
             <a:ext cx="47149" cy="95250"/>
           </a:xfrm>
           <a:custGeom>
@@ -5768,18 +5560,18 @@
       </p:sp>
       <p:sp>
         <p:nvSpPr>
-          <p:cNvPr id="48" name="r3" descr="Editable shape; source id r3"/>
+          <p:cNvPr id="44" name="r3" descr="Editable shape; source id r3"/>
           <p:cNvSpPr/>
           <p:nvPr/>
         </p:nvSpPr>
         <p:spPr>
           <a:xfrm>
-            <a:off x="4968874" y="793749"/>
-            <a:ext cx="2206624" cy="2381249"/>
+            <a:off x="4968874" y="809624"/>
+            <a:ext cx="2238374" cy="2770187"/>
           </a:xfrm>
           <a:prstGeom prst="roundRect">
             <a:avLst>
-              <a:gd name="adj" fmla="val 3237"/>
+              <a:gd name="adj" fmla="val 3191"/>
             </a:avLst>
           </a:prstGeom>
           <a:solidFill>
@@ -5816,18 +5608,18 @@
       </p:sp>
       <p:sp>
         <p:nvSpPr>
-          <p:cNvPr id="49" name="r3_b" descr="Editable shape; source id r3_b"/>
+          <p:cNvPr id="45" name="r3_b" descr="Editable shape; source id r3_b"/>
           <p:cNvSpPr/>
           <p:nvPr/>
         </p:nvSpPr>
         <p:spPr>
           <a:xfrm>
-            <a:off x="4968874" y="793749"/>
-            <a:ext cx="55562" cy="2381249"/>
+            <a:off x="4968874" y="809624"/>
+            <a:ext cx="47624" cy="2770187"/>
           </a:xfrm>
           <a:prstGeom prst="roundRect">
             <a:avLst>
-              <a:gd name="adj" fmla="val 42857"/>
+              <a:gd name="adj" fmla="val 50000"/>
             </a:avLst>
           </a:prstGeom>
           <a:solidFill>
@@ -5862,14 +5654,14 @@
       </p:sp>
       <p:sp>
         <p:nvSpPr>
-          <p:cNvPr id="50" name="r3_t" descr="Editable text; source id r3_t"/>
+          <p:cNvPr id="46" name="r3_t" descr="Editable text; source id r3_t"/>
           <p:cNvSpPr txBox="1"/>
           <p:nvPr/>
         </p:nvSpPr>
         <p:spPr>
           <a:xfrm>
             <a:off x="5095874" y="904874"/>
-            <a:ext cx="1952624" cy="317499"/>
+            <a:ext cx="2031999" cy="420687"/>
           </a:xfrm>
           <a:prstGeom prst="rect">
             <a:avLst/>
@@ -5885,7 +5677,7 @@
           <a:p>
             <a:pPr algn="ctr" fontAlgn="base">
               <a:lnSpc>
-                <a:spcPts val="2187"/>
+                <a:spcPts val="2812"/>
               </a:lnSpc>
               <a:spcBef>
                 <a:spcPts val="0"/>
@@ -5893,7 +5685,7 @@
               <a:spcAft>
                 <a:spcPts val="0"/>
               </a:spcAft>
-              <a:defRPr sz="1499" b="1" i="0" lang="zh-CN" dirty="0">
+              <a:defRPr sz="1937" b="1" i="0" lang="zh-CN" dirty="0">
                 <a:solidFill>
                   <a:srgbClr val="0F4F58"/>
                 </a:solidFill>
@@ -5903,7 +5695,7 @@
               </a:defRPr>
             </a:pPr>
             <a:r>
-              <a:rPr sz="1499" b="1" i="0" lang="zh-CN" dirty="0">
+              <a:rPr sz="1937" b="1" i="0" lang="zh-CN" dirty="0">
                 <a:solidFill>
                   <a:srgbClr val="0F4F58"/>
                 </a:solidFill>
@@ -5918,14 +5710,14 @@
       </p:sp>
       <p:sp>
         <p:nvSpPr>
-          <p:cNvPr id="51" name="r3_g_e1" descr="Editable shape; source id r3_g_e1"/>
+          <p:cNvPr id="47" name="r3_g_e1" descr="Editable shape; source id r3_g_e1"/>
           <p:cNvSpPr/>
           <p:nvPr/>
         </p:nvSpPr>
         <p:spPr>
           <a:xfrm>
-            <a:off x="5913437" y="1389062"/>
-            <a:ext cx="309562" cy="95249"/>
+            <a:off x="5984874" y="1468437"/>
+            <a:ext cx="261937" cy="79374"/>
           </a:xfrm>
           <a:prstGeom prst="ellipse">
             <a:avLst/>
@@ -5962,14 +5754,14 @@
       </p:sp>
       <p:cxnSp>
         <p:nvCxnSpPr>
-          <p:cNvPr id="52" name="r3_g_s1" descr="Editable line; source id r3_g_s1"/>
+          <p:cNvPr id="48" name="r3_g_s1" descr="Editable line; source id r3_g_s1"/>
           <p:cNvCxnSpPr/>
           <p:nvPr/>
         </p:nvCxnSpPr>
         <p:spPr>
           <a:xfrm>
-            <a:off x="5913437" y="1436687"/>
-            <a:ext cx="0" cy="127000"/>
+            <a:off x="5984874" y="1508124"/>
+            <a:ext cx="0" cy="111125"/>
           </a:xfrm>
           <a:prstGeom prst="line">
             <a:avLst/>
@@ -5998,14 +5790,14 @@
       </p:cxnSp>
       <p:cxnSp>
         <p:nvCxnSpPr>
-          <p:cNvPr id="53" name="r3_g_s2" descr="Editable line; source id r3_g_s2"/>
+          <p:cNvPr id="49" name="r3_g_s2" descr="Editable line; source id r3_g_s2"/>
           <p:cNvCxnSpPr/>
           <p:nvPr/>
         </p:nvCxnSpPr>
         <p:spPr>
           <a:xfrm>
-            <a:off x="6230937" y="1436687"/>
-            <a:ext cx="0" cy="127000"/>
+            <a:off x="6238874" y="1508124"/>
+            <a:ext cx="0" cy="111125"/>
           </a:xfrm>
           <a:prstGeom prst="line">
             <a:avLst/>
@@ -6034,14 +5826,14 @@
       </p:cxnSp>
       <p:sp>
         <p:nvSpPr>
-          <p:cNvPr id="54" name="r3_g_e2" descr="Editable shape; source id r3_g_e2"/>
+          <p:cNvPr id="50" name="r3_g_e2" descr="Editable shape; source id r3_g_e2"/>
           <p:cNvSpPr/>
           <p:nvPr/>
         </p:nvSpPr>
         <p:spPr>
           <a:xfrm>
-            <a:off x="5913437" y="1516062"/>
-            <a:ext cx="309562" cy="95249"/>
+            <a:off x="5984874" y="1579562"/>
+            <a:ext cx="261937" cy="79374"/>
           </a:xfrm>
           <a:prstGeom prst="ellipse">
             <a:avLst/>
@@ -6078,18 +5870,18 @@
       </p:sp>
       <p:sp>
         <p:nvSpPr>
-          <p:cNvPr id="55" name="r3c_t0" descr="Editable shape; source id r3c_t0"/>
+          <p:cNvPr id="51" name="r3c_t0" descr="Editable shape; source id r3c_t0"/>
           <p:cNvSpPr/>
           <p:nvPr/>
         </p:nvSpPr>
         <p:spPr>
           <a:xfrm>
-            <a:off x="5111749" y="1857374"/>
-            <a:ext cx="1920874" cy="301624"/>
+            <a:off x="5095874" y="1849437"/>
+            <a:ext cx="2031999" cy="444499"/>
           </a:xfrm>
           <a:prstGeom prst="roundRect">
             <a:avLst>
-              <a:gd name="adj" fmla="val 15789"/>
+              <a:gd name="adj" fmla="val 10714"/>
             </a:avLst>
           </a:prstGeom>
           <a:solidFill>
@@ -6126,14 +5918,14 @@
       </p:sp>
       <p:sp>
         <p:nvSpPr>
-          <p:cNvPr id="56" name="r3c_t0_t" descr="Editable text; source id r3c_t0_t"/>
+          <p:cNvPr id="52" name="r3c_t0_t" descr="Editable text; source id r3c_t0_t"/>
           <p:cNvSpPr txBox="1"/>
           <p:nvPr/>
         </p:nvSpPr>
         <p:spPr>
           <a:xfrm>
-            <a:off x="5167312" y="1889124"/>
-            <a:ext cx="1809749" cy="238124"/>
+            <a:off x="5151437" y="1881187"/>
+            <a:ext cx="1920874" cy="380999"/>
           </a:xfrm>
           <a:prstGeom prst="rect">
             <a:avLst/>
@@ -6149,7 +5941,7 @@
           <a:p>
             <a:pPr algn="ctr" fontAlgn="base">
               <a:lnSpc>
-                <a:spcPts val="1734"/>
+                <a:spcPts val="2546"/>
               </a:lnSpc>
               <a:spcBef>
                 <a:spcPts val="0"/>
@@ -6157,7 +5949,7 @@
               <a:spcAft>
                 <a:spcPts val="0"/>
               </a:spcAft>
-              <a:defRPr sz="1187" b="1" i="0" lang="zh-CN" dirty="0">
+              <a:defRPr sz="1749" b="0" i="0" lang="zh-CN" dirty="0">
                 <a:solidFill>
                   <a:srgbClr val="27303A"/>
                 </a:solidFill>
@@ -6167,7 +5959,7 @@
               </a:defRPr>
             </a:pPr>
             <a:r>
-              <a:rPr sz="1187" b="1" i="0" lang="zh-CN" dirty="0">
+              <a:rPr sz="1749" b="0" i="0" lang="zh-CN" dirty="0">
                 <a:solidFill>
                   <a:srgbClr val="27303A"/>
                 </a:solidFill>
@@ -6182,18 +5974,18 @@
       </p:sp>
       <p:sp>
         <p:nvSpPr>
-          <p:cNvPr id="57" name="r3c_t1" descr="Editable shape; source id r3c_t1"/>
+          <p:cNvPr id="53" name="r3c_t1" descr="Editable shape; source id r3c_t1"/>
           <p:cNvSpPr/>
           <p:nvPr/>
         </p:nvSpPr>
         <p:spPr>
           <a:xfrm>
-            <a:off x="5111749" y="2301874"/>
-            <a:ext cx="1920874" cy="301624"/>
+            <a:off x="5095874" y="2436812"/>
+            <a:ext cx="2031999" cy="444499"/>
           </a:xfrm>
           <a:prstGeom prst="roundRect">
             <a:avLst>
-              <a:gd name="adj" fmla="val 15789"/>
+              <a:gd name="adj" fmla="val 10714"/>
             </a:avLst>
           </a:prstGeom>
           <a:solidFill>
@@ -6230,14 +6022,14 @@
       </p:sp>
       <p:sp>
         <p:nvSpPr>
-          <p:cNvPr id="58" name="r3c_t1_t" descr="Editable text; source id r3c_t1_t"/>
+          <p:cNvPr id="54" name="r3c_t1_t" descr="Editable text; source id r3c_t1_t"/>
           <p:cNvSpPr txBox="1"/>
           <p:nvPr/>
         </p:nvSpPr>
         <p:spPr>
           <a:xfrm>
-            <a:off x="5167312" y="2333624"/>
-            <a:ext cx="1809749" cy="238124"/>
+            <a:off x="5151437" y="2468562"/>
+            <a:ext cx="1920874" cy="380999"/>
           </a:xfrm>
           <a:prstGeom prst="rect">
             <a:avLst/>
@@ -6253,7 +6045,7 @@
           <a:p>
             <a:pPr algn="ctr" fontAlgn="base">
               <a:lnSpc>
-                <a:spcPts val="1734"/>
+                <a:spcPts val="2546"/>
               </a:lnSpc>
               <a:spcBef>
                 <a:spcPts val="0"/>
@@ -6261,7 +6053,7 @@
               <a:spcAft>
                 <a:spcPts val="0"/>
               </a:spcAft>
-              <a:defRPr sz="1187" b="1" i="0" lang="zh-CN" dirty="0">
+              <a:defRPr sz="1749" b="0" i="0" lang="zh-CN" dirty="0">
                 <a:solidFill>
                   <a:srgbClr val="27303A"/>
                 </a:solidFill>
@@ -6271,7 +6063,7 @@
               </a:defRPr>
             </a:pPr>
             <a:r>
-              <a:rPr sz="1187" b="1" i="0" lang="zh-CN" dirty="0">
+              <a:rPr sz="1749" b="0" i="0" lang="zh-CN" dirty="0">
                 <a:solidFill>
                   <a:srgbClr val="27303A"/>
                 </a:solidFill>
@@ -6286,13 +6078,13 @@
       </p:sp>
       <p:sp>
         <p:nvSpPr>
-          <p:cNvPr id="59" name="r3c_a1" descr="Editable line; source id r3c_a1"/>
+          <p:cNvPr id="55" name="r3c_a1" descr="Editable line; source id r3c_a1"/>
           <p:cNvSpPr/>
           <p:nvPr/>
         </p:nvSpPr>
         <p:spPr>
           <a:xfrm>
-            <a:off x="6048613" y="2182812"/>
+            <a:off x="6088300" y="2317750"/>
             <a:ext cx="47149" cy="95250"/>
           </a:xfrm>
           <a:custGeom>
@@ -6360,18 +6152,18 @@
       </p:sp>
       <p:sp>
         <p:nvSpPr>
-          <p:cNvPr id="60" name="r3c_t2" descr="Editable shape; source id r3c_t2"/>
+          <p:cNvPr id="56" name="r3c_t2" descr="Editable shape; source id r3c_t2"/>
           <p:cNvSpPr/>
           <p:nvPr/>
         </p:nvSpPr>
         <p:spPr>
           <a:xfrm>
-            <a:off x="5111749" y="2746374"/>
-            <a:ext cx="1920874" cy="301624"/>
+            <a:off x="5095874" y="3024187"/>
+            <a:ext cx="2031999" cy="444499"/>
           </a:xfrm>
           <a:prstGeom prst="roundRect">
             <a:avLst>
-              <a:gd name="adj" fmla="val 15789"/>
+              <a:gd name="adj" fmla="val 10714"/>
             </a:avLst>
           </a:prstGeom>
           <a:solidFill>
@@ -6408,14 +6200,14 @@
       </p:sp>
       <p:sp>
         <p:nvSpPr>
-          <p:cNvPr id="61" name="r3c_t2_t" descr="Editable text; source id r3c_t2_t"/>
+          <p:cNvPr id="57" name="r3c_t2_t" descr="Editable text; source id r3c_t2_t"/>
           <p:cNvSpPr txBox="1"/>
           <p:nvPr/>
         </p:nvSpPr>
         <p:spPr>
           <a:xfrm>
-            <a:off x="5167312" y="2778124"/>
-            <a:ext cx="1809749" cy="238124"/>
+            <a:off x="5151437" y="3055937"/>
+            <a:ext cx="1920874" cy="380999"/>
           </a:xfrm>
           <a:prstGeom prst="rect">
             <a:avLst/>
@@ -6431,7 +6223,7 @@
           <a:p>
             <a:pPr algn="ctr" fontAlgn="base">
               <a:lnSpc>
-                <a:spcPts val="1734"/>
+                <a:spcPts val="2546"/>
               </a:lnSpc>
               <a:spcBef>
                 <a:spcPts val="0"/>
@@ -6439,7 +6231,7 @@
               <a:spcAft>
                 <a:spcPts val="0"/>
               </a:spcAft>
-              <a:defRPr sz="1187" b="1" i="0" lang="zh-CN" dirty="0">
+              <a:defRPr sz="1749" b="0" i="0" lang="zh-CN" dirty="0">
                 <a:solidFill>
                   <a:srgbClr val="27303A"/>
                 </a:solidFill>
@@ -6449,7 +6241,7 @@
               </a:defRPr>
             </a:pPr>
             <a:r>
-              <a:rPr sz="1187" b="1" i="0" lang="zh-CN" dirty="0">
+              <a:rPr sz="1749" b="0" i="0" lang="zh-CN" dirty="0">
                 <a:solidFill>
                   <a:srgbClr val="27303A"/>
                 </a:solidFill>
@@ -6464,13 +6256,13 @@
       </p:sp>
       <p:sp>
         <p:nvSpPr>
-          <p:cNvPr id="62" name="r3c_a2" descr="Editable line; source id r3c_a2"/>
+          <p:cNvPr id="58" name="r3c_a2" descr="Editable line; source id r3c_a2"/>
           <p:cNvSpPr/>
           <p:nvPr/>
         </p:nvSpPr>
         <p:spPr>
           <a:xfrm>
-            <a:off x="6048613" y="2627312"/>
+            <a:off x="6088300" y="2905125"/>
             <a:ext cx="47149" cy="95250"/>
           </a:xfrm>
           <a:custGeom>
@@ -6538,18 +6330,18 @@
       </p:sp>
       <p:sp>
         <p:nvSpPr>
-          <p:cNvPr id="63" name="r4" descr="Editable shape; source id r4"/>
+          <p:cNvPr id="59" name="r4" descr="Editable shape; source id r4"/>
           <p:cNvSpPr/>
           <p:nvPr/>
         </p:nvSpPr>
         <p:spPr>
           <a:xfrm>
-            <a:off x="7254874" y="793749"/>
-            <a:ext cx="2206624" cy="2381249"/>
+            <a:off x="7286624" y="809624"/>
+            <a:ext cx="2238374" cy="2770187"/>
           </a:xfrm>
           <a:prstGeom prst="roundRect">
             <a:avLst>
-              <a:gd name="adj" fmla="val 3237"/>
+              <a:gd name="adj" fmla="val 3191"/>
             </a:avLst>
           </a:prstGeom>
           <a:solidFill>
@@ -6586,18 +6378,18 @@
       </p:sp>
       <p:sp>
         <p:nvSpPr>
-          <p:cNvPr id="64" name="r4_b" descr="Editable shape; source id r4_b"/>
+          <p:cNvPr id="60" name="r4_b" descr="Editable shape; source id r4_b"/>
           <p:cNvSpPr/>
           <p:nvPr/>
         </p:nvSpPr>
         <p:spPr>
           <a:xfrm>
-            <a:off x="7254874" y="793749"/>
-            <a:ext cx="55562" cy="2381249"/>
+            <a:off x="7286624" y="809624"/>
+            <a:ext cx="47624" cy="2770187"/>
           </a:xfrm>
           <a:prstGeom prst="roundRect">
             <a:avLst>
-              <a:gd name="adj" fmla="val 42857"/>
+              <a:gd name="adj" fmla="val 50000"/>
             </a:avLst>
           </a:prstGeom>
           <a:solidFill>
@@ -6632,14 +6424,14 @@
       </p:sp>
       <p:sp>
         <p:nvSpPr>
-          <p:cNvPr id="65" name="r4_t" descr="Editable text; source id r4_t"/>
+          <p:cNvPr id="61" name="r4_t" descr="Editable text; source id r4_t"/>
           <p:cNvSpPr txBox="1"/>
           <p:nvPr/>
         </p:nvSpPr>
         <p:spPr>
           <a:xfrm>
-            <a:off x="7381874" y="904874"/>
-            <a:ext cx="1952624" cy="317499"/>
+            <a:off x="7413624" y="904874"/>
+            <a:ext cx="2031999" cy="420687"/>
           </a:xfrm>
           <a:prstGeom prst="rect">
             <a:avLst/>
@@ -6655,7 +6447,7 @@
           <a:p>
             <a:pPr algn="ctr" fontAlgn="base">
               <a:lnSpc>
-                <a:spcPts val="2187"/>
+                <a:spcPts val="2812"/>
               </a:lnSpc>
               <a:spcBef>
                 <a:spcPts val="0"/>
@@ -6663,7 +6455,7 @@
               <a:spcAft>
                 <a:spcPts val="0"/>
               </a:spcAft>
-              <a:defRPr sz="1499" b="1" i="0" lang="zh-CN" dirty="0">
+              <a:defRPr sz="1937" b="1" i="0" lang="zh-CN" dirty="0">
                 <a:solidFill>
                   <a:srgbClr val="0F4F58"/>
                 </a:solidFill>
@@ -6673,7 +6465,7 @@
               </a:defRPr>
             </a:pPr>
             <a:r>
-              <a:rPr sz="1499" b="1" i="0" lang="zh-CN" dirty="0">
+              <a:rPr sz="1937" b="1" i="0" lang="zh-CN" dirty="0">
                 <a:solidFill>
                   <a:srgbClr val="0F4F58"/>
                 </a:solidFill>
@@ -6688,18 +6480,18 @@
       </p:sp>
       <p:sp>
         <p:nvSpPr>
-          <p:cNvPr id="66" name="r4_g_j" descr="Editable shape; source id r4_g_j"/>
+          <p:cNvPr id="62" name="r4_g_j" descr="Editable shape; source id r4_g_j"/>
           <p:cNvSpPr/>
           <p:nvPr/>
         </p:nvSpPr>
         <p:spPr>
           <a:xfrm>
-            <a:off x="8223249" y="1373187"/>
-            <a:ext cx="277812" cy="293687"/>
+            <a:off x="8318499" y="1460499"/>
+            <a:ext cx="230187" cy="246062"/>
           </a:xfrm>
           <a:prstGeom prst="roundRect">
             <a:avLst>
-              <a:gd name="adj" fmla="val 16571"/>
+              <a:gd name="adj" fmla="val 16551"/>
             </a:avLst>
           </a:prstGeom>
           <a:noFill/>
@@ -6734,14 +6526,14 @@
       </p:sp>
       <p:cxnSp>
         <p:nvCxnSpPr>
-          <p:cNvPr id="67" name="r4_g_c" descr="Editable line; source id r4_g_c"/>
+          <p:cNvPr id="63" name="r4_g_c" descr="Editable line; source id r4_g_c"/>
           <p:cNvCxnSpPr/>
           <p:nvPr/>
         </p:nvCxnSpPr>
         <p:spPr>
           <a:xfrm>
-            <a:off x="8223249" y="1428749"/>
-            <a:ext cx="269875" cy="0"/>
+            <a:off x="8318499" y="1500187"/>
+            <a:ext cx="222250" cy="0"/>
           </a:xfrm>
           <a:prstGeom prst="line">
             <a:avLst/>
@@ -6770,14 +6562,14 @@
       </p:cxnSp>
       <p:sp>
         <p:nvSpPr>
-          <p:cNvPr id="68" name="r4_g_b0" descr="Editable shape; source id r4_g_b0"/>
+          <p:cNvPr id="64" name="r4_g_b0" descr="Editable shape; source id r4_g_b0"/>
           <p:cNvSpPr/>
           <p:nvPr/>
         </p:nvSpPr>
         <p:spPr>
           <a:xfrm>
-            <a:off x="8254999" y="1492249"/>
-            <a:ext cx="71437" cy="71437"/>
+            <a:off x="8342312" y="1555749"/>
+            <a:ext cx="63499" cy="63499"/>
           </a:xfrm>
           <a:prstGeom prst="ellipse">
             <a:avLst/>
@@ -6814,14 +6606,14 @@
       </p:sp>
       <p:sp>
         <p:nvSpPr>
-          <p:cNvPr id="69" name="r4_g_b1" descr="Editable shape; source id r4_g_b1"/>
+          <p:cNvPr id="65" name="r4_g_b1" descr="Editable shape; source id r4_g_b1"/>
           <p:cNvSpPr/>
           <p:nvPr/>
         </p:nvSpPr>
         <p:spPr>
           <a:xfrm>
-            <a:off x="8358187" y="1460499"/>
-            <a:ext cx="71437" cy="71437"/>
+            <a:off x="8429624" y="1531937"/>
+            <a:ext cx="63499" cy="63499"/>
           </a:xfrm>
           <a:prstGeom prst="ellipse">
             <a:avLst/>
@@ -6858,14 +6650,14 @@
       </p:sp>
       <p:sp>
         <p:nvSpPr>
-          <p:cNvPr id="70" name="r4_g_b2" descr="Editable shape; source id r4_g_b2"/>
+          <p:cNvPr id="66" name="r4_g_b2" descr="Editable shape; source id r4_g_b2"/>
           <p:cNvSpPr/>
           <p:nvPr/>
         </p:nvSpPr>
         <p:spPr>
           <a:xfrm>
-            <a:off x="8318499" y="1563687"/>
-            <a:ext cx="71437" cy="71437"/>
+            <a:off x="8397874" y="1619249"/>
+            <a:ext cx="63499" cy="63499"/>
           </a:xfrm>
           <a:prstGeom prst="ellipse">
             <a:avLst/>
@@ -6902,18 +6694,18 @@
       </p:sp>
       <p:sp>
         <p:nvSpPr>
-          <p:cNvPr id="71" name="r4c_t0" descr="Editable shape; source id r4c_t0"/>
+          <p:cNvPr id="67" name="r4c_t0" descr="Editable shape; source id r4c_t0"/>
           <p:cNvSpPr/>
           <p:nvPr/>
         </p:nvSpPr>
         <p:spPr>
           <a:xfrm>
-            <a:off x="7397749" y="1857374"/>
-            <a:ext cx="1920874" cy="301624"/>
+            <a:off x="7413624" y="1849437"/>
+            <a:ext cx="2031999" cy="444499"/>
           </a:xfrm>
           <a:prstGeom prst="roundRect">
             <a:avLst>
-              <a:gd name="adj" fmla="val 15789"/>
+              <a:gd name="adj" fmla="val 10714"/>
             </a:avLst>
           </a:prstGeom>
           <a:solidFill>
@@ -6950,14 +6742,14 @@
       </p:sp>
       <p:sp>
         <p:nvSpPr>
-          <p:cNvPr id="72" name="r4c_t0_t" descr="Editable text; source id r4c_t0_t"/>
+          <p:cNvPr id="68" name="r4c_t0_t" descr="Editable text; source id r4c_t0_t"/>
           <p:cNvSpPr txBox="1"/>
           <p:nvPr/>
         </p:nvSpPr>
         <p:spPr>
           <a:xfrm>
-            <a:off x="7453312" y="1889124"/>
-            <a:ext cx="1809749" cy="238124"/>
+            <a:off x="7469187" y="1881187"/>
+            <a:ext cx="1920874" cy="380999"/>
           </a:xfrm>
           <a:prstGeom prst="rect">
             <a:avLst/>
@@ -6973,7 +6765,7 @@
           <a:p>
             <a:pPr algn="ctr" fontAlgn="base">
               <a:lnSpc>
-                <a:spcPts val="1734"/>
+                <a:spcPts val="2546"/>
               </a:lnSpc>
               <a:spcBef>
                 <a:spcPts val="0"/>
@@ -6981,7 +6773,7 @@
               <a:spcAft>
                 <a:spcPts val="0"/>
               </a:spcAft>
-              <a:defRPr sz="1187" b="1" i="0" lang="zh-CN" dirty="0">
+              <a:defRPr sz="1749" b="0" i="0" lang="zh-CN" dirty="0">
                 <a:solidFill>
                   <a:srgbClr val="27303A"/>
                 </a:solidFill>
@@ -6991,7 +6783,7 @@
               </a:defRPr>
             </a:pPr>
             <a:r>
-              <a:rPr sz="1187" b="1" i="0" lang="zh-CN" dirty="0">
+              <a:rPr sz="1749" b="0" i="0" lang="zh-CN" dirty="0">
                 <a:solidFill>
                   <a:srgbClr val="27303A"/>
                 </a:solidFill>
@@ -7006,18 +6798,18 @@
       </p:sp>
       <p:sp>
         <p:nvSpPr>
-          <p:cNvPr id="73" name="r4c_t1" descr="Editable shape; source id r4c_t1"/>
+          <p:cNvPr id="69" name="r4c_t1" descr="Editable shape; source id r4c_t1"/>
           <p:cNvSpPr/>
           <p:nvPr/>
         </p:nvSpPr>
         <p:spPr>
           <a:xfrm>
-            <a:off x="7397749" y="2301874"/>
-            <a:ext cx="1920874" cy="301624"/>
+            <a:off x="7413624" y="2436812"/>
+            <a:ext cx="2031999" cy="444499"/>
           </a:xfrm>
           <a:prstGeom prst="roundRect">
             <a:avLst>
-              <a:gd name="adj" fmla="val 15789"/>
+              <a:gd name="adj" fmla="val 10714"/>
             </a:avLst>
           </a:prstGeom>
           <a:solidFill>
@@ -7054,14 +6846,14 @@
       </p:sp>
       <p:sp>
         <p:nvSpPr>
-          <p:cNvPr id="74" name="r4c_t1_t" descr="Editable text; source id r4c_t1_t"/>
+          <p:cNvPr id="70" name="r4c_t1_t" descr="Editable text; source id r4c_t1_t"/>
           <p:cNvSpPr txBox="1"/>
           <p:nvPr/>
         </p:nvSpPr>
         <p:spPr>
           <a:xfrm>
-            <a:off x="7453312" y="2333624"/>
-            <a:ext cx="1809749" cy="238124"/>
+            <a:off x="7469187" y="2468562"/>
+            <a:ext cx="1920874" cy="380999"/>
           </a:xfrm>
           <a:prstGeom prst="rect">
             <a:avLst/>
@@ -7077,7 +6869,7 @@
           <a:p>
             <a:pPr algn="ctr" fontAlgn="base">
               <a:lnSpc>
-                <a:spcPts val="1734"/>
+                <a:spcPts val="2546"/>
               </a:lnSpc>
               <a:spcBef>
                 <a:spcPts val="0"/>
@@ -7085,7 +6877,7 @@
               <a:spcAft>
                 <a:spcPts val="0"/>
               </a:spcAft>
-              <a:defRPr sz="1187" b="1" i="0" lang="zh-CN" dirty="0">
+              <a:defRPr sz="1749" b="0" i="0" lang="zh-CN" dirty="0">
                 <a:solidFill>
                   <a:srgbClr val="27303A"/>
                 </a:solidFill>
@@ -7095,7 +6887,7 @@
               </a:defRPr>
             </a:pPr>
             <a:r>
-              <a:rPr sz="1187" b="1" i="0" lang="zh-CN" dirty="0">
+              <a:rPr sz="1749" b="0" i="0" lang="zh-CN" dirty="0">
                 <a:solidFill>
                   <a:srgbClr val="27303A"/>
                 </a:solidFill>
@@ -7110,13 +6902,13 @@
       </p:sp>
       <p:sp>
         <p:nvSpPr>
-          <p:cNvPr id="75" name="r4c_a1" descr="Editable line; source id r4c_a1"/>
+          <p:cNvPr id="71" name="r4c_a1" descr="Editable line; source id r4c_a1"/>
           <p:cNvSpPr/>
           <p:nvPr/>
         </p:nvSpPr>
         <p:spPr>
           <a:xfrm>
-            <a:off x="8334613" y="2182812"/>
+            <a:off x="8406050" y="2317750"/>
             <a:ext cx="47149" cy="95250"/>
           </a:xfrm>
           <a:custGeom>
@@ -7184,18 +6976,18 @@
       </p:sp>
       <p:sp>
         <p:nvSpPr>
-          <p:cNvPr id="76" name="r4c_t2" descr="Editable shape; source id r4c_t2"/>
+          <p:cNvPr id="72" name="r4c_t2" descr="Editable shape; source id r4c_t2"/>
           <p:cNvSpPr/>
           <p:nvPr/>
         </p:nvSpPr>
         <p:spPr>
           <a:xfrm>
-            <a:off x="7397749" y="2746374"/>
-            <a:ext cx="1920874" cy="301624"/>
+            <a:off x="7413624" y="3024187"/>
+            <a:ext cx="2031999" cy="444499"/>
           </a:xfrm>
           <a:prstGeom prst="roundRect">
             <a:avLst>
-              <a:gd name="adj" fmla="val 15789"/>
+              <a:gd name="adj" fmla="val 10714"/>
             </a:avLst>
           </a:prstGeom>
           <a:solidFill>
@@ -7232,14 +7024,14 @@
       </p:sp>
       <p:sp>
         <p:nvSpPr>
-          <p:cNvPr id="77" name="r4c_t2_t" descr="Editable text; source id r4c_t2_t"/>
+          <p:cNvPr id="73" name="r4c_t2_t" descr="Editable text; source id r4c_t2_t"/>
           <p:cNvSpPr txBox="1"/>
           <p:nvPr/>
         </p:nvSpPr>
         <p:spPr>
           <a:xfrm>
-            <a:off x="7453312" y="2778124"/>
-            <a:ext cx="1809749" cy="238124"/>
+            <a:off x="7469187" y="3055937"/>
+            <a:ext cx="1920874" cy="380999"/>
           </a:xfrm>
           <a:prstGeom prst="rect">
             <a:avLst/>
@@ -7255,7 +7047,7 @@
           <a:p>
             <a:pPr algn="ctr" fontAlgn="base">
               <a:lnSpc>
-                <a:spcPts val="1734"/>
+                <a:spcPts val="2546"/>
               </a:lnSpc>
               <a:spcBef>
                 <a:spcPts val="0"/>
@@ -7263,7 +7055,7 @@
               <a:spcAft>
                 <a:spcPts val="0"/>
               </a:spcAft>
-              <a:defRPr sz="1187" b="1" i="0" lang="zh-CN" dirty="0">
+              <a:defRPr sz="1749" b="0" i="0" lang="zh-CN" dirty="0">
                 <a:solidFill>
                   <a:srgbClr val="27303A"/>
                 </a:solidFill>
@@ -7273,7 +7065,7 @@
               </a:defRPr>
             </a:pPr>
             <a:r>
-              <a:rPr sz="1187" b="1" i="0" lang="zh-CN" dirty="0">
+              <a:rPr sz="1749" b="0" i="0" lang="zh-CN" dirty="0">
                 <a:solidFill>
                   <a:srgbClr val="27303A"/>
                 </a:solidFill>
@@ -7288,13 +7080,13 @@
       </p:sp>
       <p:sp>
         <p:nvSpPr>
-          <p:cNvPr id="78" name="r4c_a2" descr="Editable line; source id r4c_a2"/>
+          <p:cNvPr id="74" name="r4c_a2" descr="Editable line; source id r4c_a2"/>
           <p:cNvSpPr/>
           <p:nvPr/>
         </p:nvSpPr>
         <p:spPr>
           <a:xfrm>
-            <a:off x="8334613" y="2627312"/>
+            <a:off x="8406050" y="2905125"/>
             <a:ext cx="47149" cy="95250"/>
           </a:xfrm>
           <a:custGeom>
@@ -7362,18 +7154,18 @@
       </p:sp>
       <p:sp>
         <p:nvSpPr>
-          <p:cNvPr id="79" name="r5" descr="Editable shape; source id r5"/>
+          <p:cNvPr id="75" name="r5" descr="Editable shape; source id r5"/>
           <p:cNvSpPr/>
           <p:nvPr/>
         </p:nvSpPr>
         <p:spPr>
           <a:xfrm>
-            <a:off x="9540874" y="793749"/>
-            <a:ext cx="2206624" cy="2381249"/>
+            <a:off x="9604374" y="809624"/>
+            <a:ext cx="2238374" cy="2770187"/>
           </a:xfrm>
           <a:prstGeom prst="roundRect">
             <a:avLst>
-              <a:gd name="adj" fmla="val 3237"/>
+              <a:gd name="adj" fmla="val 3191"/>
             </a:avLst>
           </a:prstGeom>
           <a:solidFill>
@@ -7413,14 +7205,14 @@
       </p:sp>
       <p:sp>
         <p:nvSpPr>
-          <p:cNvPr id="80" name="r5_t" descr="Editable text; source id r5_t"/>
+          <p:cNvPr id="76" name="r5_t" descr="Editable text; source id r5_t"/>
           <p:cNvSpPr txBox="1"/>
           <p:nvPr/>
         </p:nvSpPr>
         <p:spPr>
           <a:xfrm>
-            <a:off x="9667874" y="904874"/>
-            <a:ext cx="1952624" cy="317499"/>
+            <a:off x="9731374" y="904874"/>
+            <a:ext cx="2031999" cy="420687"/>
           </a:xfrm>
           <a:prstGeom prst="rect">
             <a:avLst/>
@@ -7436,7 +7228,7 @@
           <a:p>
             <a:pPr algn="ctr" fontAlgn="base">
               <a:lnSpc>
-                <a:spcPts val="1765"/>
+                <a:spcPts val="2281"/>
               </a:lnSpc>
               <a:spcBef>
                 <a:spcPts val="0"/>
@@ -7444,7 +7236,7 @@
               <a:spcAft>
                 <a:spcPts val="0"/>
               </a:spcAft>
-              <a:defRPr sz="1499" b="1" i="0" lang="zh-CN" dirty="0">
+              <a:defRPr sz="1937" b="1" i="0" lang="zh-CN" dirty="0">
                 <a:solidFill>
                   <a:srgbClr val="5B6570"/>
                 </a:solidFill>
@@ -7454,7 +7246,7 @@
               </a:defRPr>
             </a:pPr>
             <a:r>
-              <a:rPr sz="1499" b="1" i="0" lang="zh-CN" dirty="0">
+              <a:rPr sz="1937" b="1" i="0" lang="zh-CN" dirty="0">
                 <a:solidFill>
                   <a:srgbClr val="5B6570"/>
                 </a:solidFill>
@@ -7469,14 +7261,14 @@
       </p:sp>
       <p:cxnSp>
         <p:nvCxnSpPr>
-          <p:cNvPr id="81" name="r5_g_r" descr="Editable line; source id r5_g_r"/>
+          <p:cNvPr id="77" name="r5_g_r" descr="Editable line; source id r5_g_r"/>
           <p:cNvCxnSpPr/>
           <p:nvPr/>
         </p:nvCxnSpPr>
         <p:spPr>
           <a:xfrm>
-            <a:off x="10644187" y="1293812"/>
-            <a:ext cx="0" cy="134937"/>
+            <a:off x="10747374" y="1396999"/>
+            <a:ext cx="0" cy="103188"/>
           </a:xfrm>
           <a:prstGeom prst="line">
             <a:avLst/>
@@ -7505,14 +7297,14 @@
       </p:cxnSp>
       <p:cxnSp>
         <p:nvCxnSpPr>
-          <p:cNvPr id="82" name="r5_g_c_0" descr="Editable line; source id r5_g_c_0"/>
+          <p:cNvPr id="78" name="r5_g_c_0" descr="Editable line; source id r5_g_c_0"/>
           <p:cNvCxnSpPr/>
           <p:nvPr/>
         </p:nvCxnSpPr>
         <p:spPr>
           <a:xfrm>
-            <a:off x="10644187" y="1428749"/>
-            <a:ext cx="63500" cy="79375"/>
+            <a:off x="10747374" y="1500187"/>
+            <a:ext cx="55563" cy="71437"/>
           </a:xfrm>
           <a:prstGeom prst="line">
             <a:avLst/>
@@ -7541,14 +7333,14 @@
       </p:cxnSp>
       <p:cxnSp>
         <p:nvCxnSpPr>
-          <p:cNvPr id="83" name="r5_g_c_1" descr="Editable line; source id r5_g_c_1"/>
+          <p:cNvPr id="79" name="r5_g_c_1" descr="Editable line; source id r5_g_c_1"/>
           <p:cNvCxnSpPr/>
           <p:nvPr/>
         </p:nvCxnSpPr>
         <p:spPr>
           <a:xfrm flipH="1">
-            <a:off x="10644187" y="1508124"/>
-            <a:ext cx="63500" cy="87313"/>
+            <a:off x="10747374" y="1571624"/>
+            <a:ext cx="55563" cy="71438"/>
           </a:xfrm>
           <a:prstGeom prst="line">
             <a:avLst/>
@@ -7577,14 +7369,14 @@
       </p:cxnSp>
       <p:cxnSp>
         <p:nvCxnSpPr>
-          <p:cNvPr id="84" name="r5_g_c_2" descr="Editable line; source id r5_g_c_2"/>
+          <p:cNvPr id="80" name="r5_g_c_2" descr="Editable line; source id r5_g_c_2"/>
           <p:cNvCxnSpPr/>
           <p:nvPr/>
         </p:nvCxnSpPr>
         <p:spPr>
           <a:xfrm flipH="1" flipV="1">
-            <a:off x="10580687" y="1508124"/>
-            <a:ext cx="63500" cy="87313"/>
+            <a:off x="10691812" y="1571624"/>
+            <a:ext cx="55562" cy="71438"/>
           </a:xfrm>
           <a:prstGeom prst="line">
             <a:avLst/>
@@ -7613,14 +7405,14 @@
       </p:cxnSp>
       <p:cxnSp>
         <p:nvCxnSpPr>
-          <p:cNvPr id="85" name="r5_g_c_3" descr="Editable line; source id r5_g_c_3"/>
+          <p:cNvPr id="81" name="r5_g_c_3" descr="Editable line; source id r5_g_c_3"/>
           <p:cNvCxnSpPr/>
           <p:nvPr/>
         </p:nvCxnSpPr>
         <p:spPr>
           <a:xfrm flipV="1">
-            <a:off x="10580687" y="1428749"/>
-            <a:ext cx="63500" cy="79375"/>
+            <a:off x="10691812" y="1500187"/>
+            <a:ext cx="55562" cy="71437"/>
           </a:xfrm>
           <a:prstGeom prst="line">
             <a:avLst/>
@@ -7649,14 +7441,14 @@
       </p:cxnSp>
       <p:cxnSp>
         <p:nvCxnSpPr>
-          <p:cNvPr id="86" name="r5_g_m_0" descr="Editable line; source id r5_g_m_0"/>
+          <p:cNvPr id="82" name="r5_g_m_0" descr="Editable line; source id r5_g_m_0"/>
           <p:cNvCxnSpPr/>
           <p:nvPr/>
         </p:nvCxnSpPr>
         <p:spPr>
           <a:xfrm>
-            <a:off x="10525124" y="1619249"/>
-            <a:ext cx="23813" cy="71438"/>
+            <a:off x="10652124" y="1658937"/>
+            <a:ext cx="15875" cy="63500"/>
           </a:xfrm>
           <a:prstGeom prst="line">
             <a:avLst/>
@@ -7685,14 +7477,14 @@
       </p:cxnSp>
       <p:cxnSp>
         <p:nvCxnSpPr>
-          <p:cNvPr id="87" name="r5_g_m_1" descr="Editable line; source id r5_g_m_1"/>
+          <p:cNvPr id="83" name="r5_g_m_1" descr="Editable line; source id r5_g_m_1"/>
           <p:cNvCxnSpPr/>
           <p:nvPr/>
         </p:nvCxnSpPr>
         <p:spPr>
           <a:xfrm>
-            <a:off x="10548937" y="1690687"/>
-            <a:ext cx="190500" cy="0"/>
+            <a:off x="10667999" y="1722437"/>
+            <a:ext cx="158750" cy="0"/>
           </a:xfrm>
           <a:prstGeom prst="line">
             <a:avLst/>
@@ -7721,14 +7513,14 @@
       </p:cxnSp>
       <p:cxnSp>
         <p:nvCxnSpPr>
-          <p:cNvPr id="88" name="r5_g_m_2" descr="Editable line; source id r5_g_m_2"/>
+          <p:cNvPr id="84" name="r5_g_m_2" descr="Editable line; source id r5_g_m_2"/>
           <p:cNvCxnSpPr/>
           <p:nvPr/>
         </p:nvCxnSpPr>
         <p:spPr>
           <a:xfrm flipV="1">
-            <a:off x="10739437" y="1619249"/>
-            <a:ext cx="23812" cy="71438"/>
+            <a:off x="10826749" y="1658937"/>
+            <a:ext cx="15875" cy="63500"/>
           </a:xfrm>
           <a:prstGeom prst="line">
             <a:avLst/>
@@ -7757,14 +7549,14 @@
       </p:cxnSp>
       <p:cxnSp>
         <p:nvCxnSpPr>
-          <p:cNvPr id="89" name="r5_g_t" descr="Editable line; source id r5_g_t"/>
+          <p:cNvPr id="85" name="r5_g_t" descr="Editable line; source id r5_g_t"/>
           <p:cNvCxnSpPr/>
           <p:nvPr/>
         </p:nvCxnSpPr>
         <p:spPr>
           <a:xfrm>
-            <a:off x="10493374" y="1619249"/>
-            <a:ext cx="301625" cy="0"/>
+            <a:off x="10628312" y="1658937"/>
+            <a:ext cx="238125" cy="0"/>
           </a:xfrm>
           <a:prstGeom prst="line">
             <a:avLst/>
@@ -7793,18 +7585,18 @@
       </p:cxnSp>
       <p:sp>
         <p:nvSpPr>
-          <p:cNvPr id="90" name="r5c_t0" descr="Editable shape; source id r5c_t0"/>
+          <p:cNvPr id="86" name="r5c_t0" descr="Editable shape; source id r5c_t0"/>
           <p:cNvSpPr/>
           <p:nvPr/>
         </p:nvSpPr>
         <p:spPr>
           <a:xfrm>
-            <a:off x="9683749" y="1857374"/>
-            <a:ext cx="1920874" cy="301624"/>
+            <a:off x="9731374" y="1849437"/>
+            <a:ext cx="2031999" cy="444499"/>
           </a:xfrm>
           <a:prstGeom prst="roundRect">
             <a:avLst>
-              <a:gd name="adj" fmla="val 15789"/>
+              <a:gd name="adj" fmla="val 10714"/>
             </a:avLst>
           </a:prstGeom>
           <a:solidFill>
@@ -7841,14 +7633,14 @@
       </p:sp>
       <p:sp>
         <p:nvSpPr>
-          <p:cNvPr id="91" name="r5c_t0_t" descr="Editable text; source id r5c_t0_t"/>
+          <p:cNvPr id="87" name="r5c_t0_t" descr="Editable text; source id r5c_t0_t"/>
           <p:cNvSpPr txBox="1"/>
           <p:nvPr/>
         </p:nvSpPr>
         <p:spPr>
           <a:xfrm>
-            <a:off x="9739312" y="1889124"/>
-            <a:ext cx="1809749" cy="238124"/>
+            <a:off x="9786937" y="1881187"/>
+            <a:ext cx="1920874" cy="380999"/>
           </a:xfrm>
           <a:prstGeom prst="rect">
             <a:avLst/>
@@ -7864,7 +7656,7 @@
           <a:p>
             <a:pPr algn="ctr" fontAlgn="base">
               <a:lnSpc>
-                <a:spcPts val="1734"/>
+                <a:spcPts val="2546"/>
               </a:lnSpc>
               <a:spcBef>
                 <a:spcPts val="0"/>
@@ -7872,7 +7664,7 @@
               <a:spcAft>
                 <a:spcPts val="0"/>
               </a:spcAft>
-              <a:defRPr sz="1187" b="1" i="0" lang="zh-CN" dirty="0">
+              <a:defRPr sz="1749" b="0" i="0" lang="zh-CN" dirty="0">
                 <a:solidFill>
                   <a:srgbClr val="27303A"/>
                 </a:solidFill>
@@ -7882,7 +7674,7 @@
               </a:defRPr>
             </a:pPr>
             <a:r>
-              <a:rPr sz="1187" b="1" i="0" lang="zh-CN" dirty="0">
+              <a:rPr sz="1749" b="0" i="0" lang="zh-CN" dirty="0">
                 <a:solidFill>
                   <a:srgbClr val="27303A"/>
                 </a:solidFill>
@@ -7897,18 +7689,18 @@
       </p:sp>
       <p:sp>
         <p:nvSpPr>
-          <p:cNvPr id="92" name="r5c_t1" descr="Editable shape; source id r5c_t1"/>
+          <p:cNvPr id="88" name="r5c_t1" descr="Editable shape; source id r5c_t1"/>
           <p:cNvSpPr/>
           <p:nvPr/>
         </p:nvSpPr>
         <p:spPr>
           <a:xfrm>
-            <a:off x="9683749" y="2301874"/>
-            <a:ext cx="1920874" cy="301624"/>
+            <a:off x="9731374" y="2436812"/>
+            <a:ext cx="2031999" cy="444499"/>
           </a:xfrm>
           <a:prstGeom prst="roundRect">
             <a:avLst>
-              <a:gd name="adj" fmla="val 15789"/>
+              <a:gd name="adj" fmla="val 10714"/>
             </a:avLst>
           </a:prstGeom>
           <a:solidFill>
@@ -7945,14 +7737,14 @@
       </p:sp>
       <p:sp>
         <p:nvSpPr>
-          <p:cNvPr id="93" name="r5c_t1_t" descr="Editable text; source id r5c_t1_t"/>
+          <p:cNvPr id="89" name="r5c_t1_t" descr="Editable text; source id r5c_t1_t"/>
           <p:cNvSpPr txBox="1"/>
           <p:nvPr/>
         </p:nvSpPr>
         <p:spPr>
           <a:xfrm>
-            <a:off x="9739312" y="2333624"/>
-            <a:ext cx="1809749" cy="238124"/>
+            <a:off x="9786937" y="2468562"/>
+            <a:ext cx="1920874" cy="380999"/>
           </a:xfrm>
           <a:prstGeom prst="rect">
             <a:avLst/>
@@ -7968,7 +7760,7 @@
           <a:p>
             <a:pPr algn="ctr" fontAlgn="base">
               <a:lnSpc>
-                <a:spcPts val="1734"/>
+                <a:spcPts val="2546"/>
               </a:lnSpc>
               <a:spcBef>
                 <a:spcPts val="0"/>
@@ -7976,7 +7768,7 @@
               <a:spcAft>
                 <a:spcPts val="0"/>
               </a:spcAft>
-              <a:defRPr sz="1187" b="1" i="0" lang="zh-CN" dirty="0">
+              <a:defRPr sz="1749" b="0" i="0" lang="zh-CN" dirty="0">
                 <a:solidFill>
                   <a:srgbClr val="27303A"/>
                 </a:solidFill>
@@ -7986,7 +7778,7 @@
               </a:defRPr>
             </a:pPr>
             <a:r>
-              <a:rPr sz="1187" b="1" i="0" lang="zh-CN" dirty="0">
+              <a:rPr sz="1749" b="0" i="0" lang="zh-CN" dirty="0">
                 <a:solidFill>
                   <a:srgbClr val="27303A"/>
                 </a:solidFill>
@@ -8001,13 +7793,13 @@
       </p:sp>
       <p:sp>
         <p:nvSpPr>
-          <p:cNvPr id="94" name="r5c_a1" descr="Editable line; source id r5c_a1"/>
+          <p:cNvPr id="90" name="r5c_a1" descr="Editable line; source id r5c_a1"/>
           <p:cNvSpPr/>
           <p:nvPr/>
         </p:nvSpPr>
         <p:spPr>
           <a:xfrm>
-            <a:off x="10620613" y="2182812"/>
+            <a:off x="10723800" y="2317750"/>
             <a:ext cx="47149" cy="95250"/>
           </a:xfrm>
           <a:custGeom>
@@ -8075,18 +7867,18 @@
       </p:sp>
       <p:sp>
         <p:nvSpPr>
-          <p:cNvPr id="95" name="r5c_t2" descr="Editable shape; source id r5c_t2"/>
+          <p:cNvPr id="91" name="r5c_t2" descr="Editable shape; source id r5c_t2"/>
           <p:cNvSpPr/>
           <p:nvPr/>
         </p:nvSpPr>
         <p:spPr>
           <a:xfrm>
-            <a:off x="9683749" y="2746374"/>
-            <a:ext cx="1920874" cy="301624"/>
+            <a:off x="9731374" y="3024187"/>
+            <a:ext cx="2031999" cy="444499"/>
           </a:xfrm>
           <a:prstGeom prst="roundRect">
             <a:avLst>
-              <a:gd name="adj" fmla="val 15789"/>
+              <a:gd name="adj" fmla="val 10714"/>
             </a:avLst>
           </a:prstGeom>
           <a:solidFill>
@@ -8123,14 +7915,14 @@
       </p:sp>
       <p:sp>
         <p:nvSpPr>
-          <p:cNvPr id="96" name="r5c_t2_t" descr="Editable text; source id r5c_t2_t"/>
+          <p:cNvPr id="92" name="r5c_t2_t" descr="Editable text; source id r5c_t2_t"/>
           <p:cNvSpPr txBox="1"/>
           <p:nvPr/>
         </p:nvSpPr>
         <p:spPr>
           <a:xfrm>
-            <a:off x="9739312" y="2778124"/>
-            <a:ext cx="1809749" cy="238124"/>
+            <a:off x="9786937" y="3055937"/>
+            <a:ext cx="1920874" cy="380999"/>
           </a:xfrm>
           <a:prstGeom prst="rect">
             <a:avLst/>
@@ -8146,7 +7938,7 @@
           <a:p>
             <a:pPr algn="ctr" fontAlgn="base">
               <a:lnSpc>
-                <a:spcPts val="1734"/>
+                <a:spcPts val="2546"/>
               </a:lnSpc>
               <a:spcBef>
                 <a:spcPts val="0"/>
@@ -8154,7 +7946,7 @@
               <a:spcAft>
                 <a:spcPts val="0"/>
               </a:spcAft>
-              <a:defRPr sz="1187" b="1" i="0" lang="zh-CN" dirty="0">
+              <a:defRPr sz="1749" b="0" i="0" lang="zh-CN" dirty="0">
                 <a:solidFill>
                   <a:srgbClr val="27303A"/>
                 </a:solidFill>
@@ -8164,7 +7956,7 @@
               </a:defRPr>
             </a:pPr>
             <a:r>
-              <a:rPr sz="1187" b="1" i="0" lang="zh-CN" dirty="0">
+              <a:rPr sz="1749" b="0" i="0" lang="zh-CN" dirty="0">
                 <a:solidFill>
                   <a:srgbClr val="27303A"/>
                 </a:solidFill>
@@ -8179,13 +7971,13 @@
       </p:sp>
       <p:sp>
         <p:nvSpPr>
-          <p:cNvPr id="97" name="r5c_a2" descr="Editable line; source id r5c_a2"/>
+          <p:cNvPr id="93" name="r5c_a2" descr="Editable line; source id r5c_a2"/>
           <p:cNvSpPr/>
           <p:nvPr/>
         </p:nvSpPr>
         <p:spPr>
           <a:xfrm>
-            <a:off x="10620613" y="2627312"/>
+            <a:off x="10723800" y="2905125"/>
             <a:ext cx="47149" cy="95250"/>
           </a:xfrm>
           <a:custGeom>
@@ -8253,24 +8045,24 @@
       </p:sp>
       <p:sp>
         <p:nvSpPr>
-          <p:cNvPr id="98" name="led" descr="Editable shape; source id led"/>
+          <p:cNvPr id="94" name="zM" descr="Editable shape; source id zM"/>
           <p:cNvSpPr/>
           <p:nvPr/>
         </p:nvSpPr>
         <p:spPr>
           <a:xfrm>
-            <a:off x="396874" y="4079874"/>
-            <a:ext cx="11398249" cy="1349374"/>
+            <a:off x="206374" y="4468812"/>
+            <a:ext cx="11779249" cy="2285999"/>
           </a:xfrm>
           <a:prstGeom prst="roundRect">
             <a:avLst>
-              <a:gd name="adj" fmla="val 5294"/>
+              <a:gd name="adj" fmla="val 4861"/>
             </a:avLst>
           </a:prstGeom>
           <a:solidFill>
-            <a:srgbClr val="FFFFFF"/>
+            <a:srgbClr val="EEF2F7"/>
           </a:solidFill>
-          <a:ln w="15081">
+          <a:ln w="12699">
             <a:solidFill>
               <a:srgbClr val="5B7592"/>
             </a:solidFill>
@@ -8301,60 +8093,14 @@
       </p:sp>
       <p:sp>
         <p:nvSpPr>
-          <p:cNvPr id="99" name="led_b" descr="Editable shape; source id led_b"/>
-          <p:cNvSpPr/>
-          <p:nvPr/>
-        </p:nvSpPr>
-        <p:spPr>
-          <a:xfrm>
-            <a:off x="396874" y="4079874"/>
-            <a:ext cx="55562" cy="1349374"/>
-          </a:xfrm>
-          <a:prstGeom prst="roundRect">
-            <a:avLst>
-              <a:gd name="adj" fmla="val 42857"/>
-            </a:avLst>
-          </a:prstGeom>
-          <a:solidFill>
-            <a:srgbClr val="5B7592"/>
-          </a:solidFill>
-          <a:ln>
-            <a:noFill/>
-          </a:ln>
-          <a:effectLst/>
-        </p:spPr>
-        <p:style>
-          <a:lnRef idx="1">
-            <a:schemeClr val="accent1"/>
-          </a:lnRef>
-          <a:fillRef idx="3">
-            <a:schemeClr val="accent1"/>
-          </a:fillRef>
-          <a:effectRef idx="0">
-            <a:schemeClr val="accent1"/>
-          </a:effectRef>
-          <a:fontRef idx="minor">
-            <a:schemeClr val="lt1"/>
-          </a:fontRef>
-        </p:style>
-        <p:txBody>
-          <a:bodyPr rtlCol="0" anchor="ctr"/>
-          <a:lstStyle/>
-          <a:p>
-            <a:pPr algn="ctr"/>
-          </a:p>
-        </p:txBody>
-      </p:sp>
-      <p:sp>
-        <p:nvSpPr>
-          <p:cNvPr id="100" name="led_t" descr="Editable text; source id led_t"/>
+          <p:cNvPr id="95" name="zM_l" descr="Editable text; source id zM_l"/>
           <p:cNvSpPr txBox="1"/>
           <p:nvPr/>
         </p:nvSpPr>
         <p:spPr>
           <a:xfrm>
-            <a:off x="619124" y="4206874"/>
-            <a:ext cx="2381249" cy="333374"/>
+            <a:off x="349249" y="4548187"/>
+            <a:ext cx="1285874" cy="444499"/>
           </a:xfrm>
           <a:prstGeom prst="rect">
             <a:avLst/>
@@ -8370,7 +8116,7 @@
           <a:p>
             <a:pPr algn="l" fontAlgn="base">
               <a:lnSpc>
-                <a:spcPts val="2265"/>
+                <a:spcPts val="3015"/>
               </a:lnSpc>
               <a:spcBef>
                 <a:spcPts val="0"/>
@@ -8378,7 +8124,7 @@
               <a:spcAft>
                 <a:spcPts val="0"/>
               </a:spcAft>
-              <a:defRPr sz="1562" b="1" i="0" lang="zh-CN" dirty="0">
+              <a:defRPr sz="2062" b="1" i="0" lang="zh-CN" dirty="0">
                 <a:solidFill>
                   <a:srgbClr val="2B3E57"/>
                 </a:solidFill>
@@ -8388,7 +8134,157 @@
               </a:defRPr>
             </a:pPr>
             <a:r>
-              <a:rPr sz="1562" b="1" i="0" lang="zh-CN" dirty="0">
+              <a:rPr sz="2062" b="1" i="0" lang="zh-CN" dirty="0">
+                <a:solidFill>
+                  <a:srgbClr val="2B3E57"/>
+                </a:solidFill>
+                <a:latin typeface="Noto Sans CJK SC"/>
+                <a:ea typeface="Noto Sans CJK SC"/>
+                <a:cs typeface="Noto Sans CJK SC"/>
+              </a:rPr>
+              <a:t>文献证据</a:t>
+            </a:r>
+          </a:p>
+        </p:txBody>
+      </p:sp>
+      <p:sp>
+        <p:nvSpPr>
+          <p:cNvPr id="96" name="led" descr="Editable shape; source id led"/>
+          <p:cNvSpPr/>
+          <p:nvPr/>
+        </p:nvSpPr>
+        <p:spPr>
+          <a:xfrm>
+            <a:off x="333374" y="5072062"/>
+            <a:ext cx="11525249" cy="1555749"/>
+          </a:xfrm>
+          <a:prstGeom prst="roundRect">
+            <a:avLst>
+              <a:gd name="adj" fmla="val 4591"/>
+            </a:avLst>
+          </a:prstGeom>
+          <a:solidFill>
+            <a:srgbClr val="FFFFFF"/>
+          </a:solidFill>
+          <a:ln w="15081">
+            <a:solidFill>
+              <a:srgbClr val="5B7592"/>
+            </a:solidFill>
+          </a:ln>
+          <a:effectLst/>
+        </p:spPr>
+        <p:style>
+          <a:lnRef idx="1">
+            <a:schemeClr val="accent1"/>
+          </a:lnRef>
+          <a:fillRef idx="3">
+            <a:schemeClr val="accent1"/>
+          </a:fillRef>
+          <a:effectRef idx="0">
+            <a:schemeClr val="accent1"/>
+          </a:effectRef>
+          <a:fontRef idx="minor">
+            <a:schemeClr val="lt1"/>
+          </a:fontRef>
+        </p:style>
+        <p:txBody>
+          <a:bodyPr rtlCol="0" anchor="ctr"/>
+          <a:lstStyle/>
+          <a:p>
+            <a:pPr algn="ctr"/>
+          </a:p>
+        </p:txBody>
+      </p:sp>
+      <p:sp>
+        <p:nvSpPr>
+          <p:cNvPr id="97" name="led_b" descr="Editable shape; source id led_b"/>
+          <p:cNvSpPr/>
+          <p:nvPr/>
+        </p:nvSpPr>
+        <p:spPr>
+          <a:xfrm>
+            <a:off x="333374" y="5072062"/>
+            <a:ext cx="47624" cy="1555749"/>
+          </a:xfrm>
+          <a:prstGeom prst="roundRect">
+            <a:avLst>
+              <a:gd name="adj" fmla="val 50000"/>
+            </a:avLst>
+          </a:prstGeom>
+          <a:solidFill>
+            <a:srgbClr val="5B7592"/>
+          </a:solidFill>
+          <a:ln>
+            <a:noFill/>
+          </a:ln>
+          <a:effectLst/>
+        </p:spPr>
+        <p:style>
+          <a:lnRef idx="1">
+            <a:schemeClr val="accent1"/>
+          </a:lnRef>
+          <a:fillRef idx="3">
+            <a:schemeClr val="accent1"/>
+          </a:fillRef>
+          <a:effectRef idx="0">
+            <a:schemeClr val="accent1"/>
+          </a:effectRef>
+          <a:fontRef idx="minor">
+            <a:schemeClr val="lt1"/>
+          </a:fontRef>
+        </p:style>
+        <p:txBody>
+          <a:bodyPr rtlCol="0" anchor="ctr"/>
+          <a:lstStyle/>
+          <a:p>
+            <a:pPr algn="ctr"/>
+          </a:p>
+        </p:txBody>
+      </p:sp>
+      <p:sp>
+        <p:nvSpPr>
+          <p:cNvPr id="98" name="led_t" descr="Editable text; source id led_t"/>
+          <p:cNvSpPr txBox="1"/>
+          <p:nvPr/>
+        </p:nvSpPr>
+        <p:spPr>
+          <a:xfrm>
+            <a:off x="492124" y="5183187"/>
+            <a:ext cx="1650999" cy="420687"/>
+          </a:xfrm>
+          <a:prstGeom prst="rect">
+            <a:avLst/>
+          </a:prstGeom>
+          <a:noFill/>
+          <a:effectLst/>
+        </p:spPr>
+        <p:txBody>
+          <a:bodyPr wrap="none" anchor="ctr" tIns="0" rIns="0" bIns="0" lIns="0" anchorCtr="0" vertOverflow="overflow">
+            <a:noAutofit/>
+          </a:bodyPr>
+          <a:lstStyle/>
+          <a:p>
+            <a:pPr algn="l" fontAlgn="base">
+              <a:lnSpc>
+                <a:spcPts val="2812"/>
+              </a:lnSpc>
+              <a:spcBef>
+                <a:spcPts val="0"/>
+              </a:spcBef>
+              <a:spcAft>
+                <a:spcPts val="0"/>
+              </a:spcAft>
+              <a:defRPr sz="1937" b="1" i="0" lang="zh-CN" dirty="0">
+                <a:solidFill>
+                  <a:srgbClr val="2B3E57"/>
+                </a:solidFill>
+                <a:latin typeface="Noto Sans CJK SC"/>
+                <a:ea typeface="Noto Sans CJK SC"/>
+                <a:cs typeface="Noto Sans CJK SC"/>
+              </a:defRPr>
+            </a:pPr>
+            <a:r>
+              <a:rPr sz="1937" b="1" i="0" lang="zh-CN" dirty="0">
                 <a:solidFill>
                   <a:srgbClr val="2B3E57"/>
                 </a:solidFill>
@@ -8403,22 +8299,26 @@
       </p:sp>
       <p:sp>
         <p:nvSpPr>
-          <p:cNvPr id="101" name="cl0_g_s0" descr="Editable shape; source id cl0_g_s0"/>
+          <p:cNvPr id="99" name="cav" descr="Editable shape; source id cav"/>
           <p:cNvSpPr/>
           <p:nvPr/>
         </p:nvSpPr>
         <p:spPr>
           <a:xfrm>
-            <a:off x="1389062" y="4619624"/>
-            <a:ext cx="174624" cy="261937"/>
-          </a:xfrm>
-          <a:prstGeom prst="rect">
-            <a:avLst/>
-          </a:prstGeom>
-          <a:noFill/>
-          <a:ln w="18216">
+            <a:off x="9556749" y="5191124"/>
+            <a:ext cx="2182812" cy="404812"/>
+          </a:xfrm>
+          <a:prstGeom prst="roundRect">
+            <a:avLst>
+              <a:gd name="adj" fmla="val 50000"/>
+            </a:avLst>
+          </a:prstGeom>
+          <a:solidFill>
+            <a:srgbClr val="FFF6E3"/>
+          </a:solidFill>
+          <a:ln w="12699">
             <a:solidFill>
-              <a:srgbClr val="111A24"/>
+              <a:srgbClr val="C48A24"/>
             </a:solidFill>
           </a:ln>
           <a:effectLst/>
@@ -8445,240 +8345,16 @@
           </a:p>
         </p:txBody>
       </p:sp>
-      <p:cxnSp>
-        <p:nvCxnSpPr>
-          <p:cNvPr id="102" name="cl0_g_l1" descr="Editable line; source id cl0_g_l1"/>
-          <p:cNvCxnSpPr/>
-          <p:nvPr/>
-        </p:nvCxnSpPr>
-        <p:spPr>
-          <a:xfrm>
-            <a:off x="1436687" y="4714874"/>
-            <a:ext cx="119062" cy="0"/>
-          </a:xfrm>
-          <a:prstGeom prst="line">
-            <a:avLst/>
-          </a:prstGeom>
-          <a:ln w="18216">
-            <a:solidFill>
-              <a:srgbClr val="111A24"/>
-            </a:solidFill>
-          </a:ln>
-          <a:effectLst/>
-        </p:spPr>
-        <p:style>
-          <a:lnRef idx="2">
-            <a:schemeClr val="accent1"/>
-          </a:lnRef>
-          <a:fillRef idx="0">
-            <a:schemeClr val="accent1"/>
-          </a:fillRef>
-          <a:effectRef idx="0">
-            <a:schemeClr val="accent1"/>
-          </a:effectRef>
-          <a:fontRef idx="minor">
-            <a:schemeClr val="tx1"/>
-          </a:fontRef>
-        </p:style>
-      </p:cxnSp>
-      <p:cxnSp>
-        <p:nvCxnSpPr>
-          <p:cNvPr id="103" name="cl0_g_l2" descr="Editable line; source id cl0_g_l2"/>
-          <p:cNvCxnSpPr/>
-          <p:nvPr/>
-        </p:nvCxnSpPr>
-        <p:spPr>
-          <a:xfrm>
-            <a:off x="1436687" y="4770437"/>
-            <a:ext cx="119062" cy="0"/>
-          </a:xfrm>
-          <a:prstGeom prst="line">
-            <a:avLst/>
-          </a:prstGeom>
-          <a:ln w="18216">
-            <a:solidFill>
-              <a:srgbClr val="111A24"/>
-            </a:solidFill>
-          </a:ln>
-          <a:effectLst/>
-        </p:spPr>
-        <p:style>
-          <a:lnRef idx="2">
-            <a:schemeClr val="accent1"/>
-          </a:lnRef>
-          <a:fillRef idx="0">
-            <a:schemeClr val="accent1"/>
-          </a:fillRef>
-          <a:effectRef idx="0">
-            <a:schemeClr val="accent1"/>
-          </a:effectRef>
-          <a:fontRef idx="minor">
-            <a:schemeClr val="tx1"/>
-          </a:fontRef>
-        </p:style>
-      </p:cxnSp>
-      <p:cxnSp>
-        <p:nvCxnSpPr>
-          <p:cNvPr id="104" name="cl0_g_l3" descr="Editable line; source id cl0_g_l3"/>
-          <p:cNvCxnSpPr/>
-          <p:nvPr/>
-        </p:nvCxnSpPr>
-        <p:spPr>
-          <a:xfrm>
-            <a:off x="1436687" y="4818062"/>
-            <a:ext cx="79375" cy="0"/>
-          </a:xfrm>
-          <a:prstGeom prst="line">
-            <a:avLst/>
-          </a:prstGeom>
-          <a:ln w="18216">
-            <a:solidFill>
-              <a:srgbClr val="111A24"/>
-            </a:solidFill>
-          </a:ln>
-          <a:effectLst/>
-        </p:spPr>
-        <p:style>
-          <a:lnRef idx="2">
-            <a:schemeClr val="accent1"/>
-          </a:lnRef>
-          <a:fillRef idx="0">
-            <a:schemeClr val="accent1"/>
-          </a:fillRef>
-          <a:effectRef idx="0">
-            <a:schemeClr val="accent1"/>
-          </a:effectRef>
-          <a:fontRef idx="minor">
-            <a:schemeClr val="tx1"/>
-          </a:fontRef>
-        </p:style>
-      </p:cxnSp>
-      <p:sp>
-        <p:nvSpPr>
-          <p:cNvPr id="105" name="cl0_k_c" descr="Editable shape; source id cl0_k_c"/>
-          <p:cNvSpPr/>
-          <p:nvPr/>
-        </p:nvSpPr>
-        <p:spPr>
-          <a:xfrm>
-            <a:off x="1873249" y="4643437"/>
-            <a:ext cx="230187" cy="230187"/>
-          </a:xfrm>
-          <a:prstGeom prst="ellipse">
-            <a:avLst/>
-          </a:prstGeom>
-          <a:noFill/>
-          <a:ln w="18216">
-            <a:solidFill>
-              <a:srgbClr val="111A24"/>
-            </a:solidFill>
-          </a:ln>
-          <a:effectLst/>
-        </p:spPr>
-        <p:style>
-          <a:lnRef idx="1">
-            <a:schemeClr val="accent1"/>
-          </a:lnRef>
-          <a:fillRef idx="3">
-            <a:schemeClr val="accent1"/>
-          </a:fillRef>
-          <a:effectRef idx="0">
-            <a:schemeClr val="accent1"/>
-          </a:effectRef>
-          <a:fontRef idx="minor">
-            <a:schemeClr val="lt1"/>
-          </a:fontRef>
-        </p:style>
-        <p:txBody>
-          <a:bodyPr rtlCol="0" anchor="ctr"/>
-          <a:lstStyle/>
-          <a:p>
-            <a:pPr algn="ctr"/>
-          </a:p>
-        </p:txBody>
-      </p:sp>
-      <p:cxnSp>
-        <p:nvCxnSpPr>
-          <p:cNvPr id="106" name="cl0_k_k_0" descr="Editable line; source id cl0_k_k_0"/>
-          <p:cNvCxnSpPr/>
-          <p:nvPr/>
-        </p:nvCxnSpPr>
-        <p:spPr>
-          <a:xfrm>
-            <a:off x="1928812" y="4762499"/>
-            <a:ext cx="39687" cy="39688"/>
-          </a:xfrm>
-          <a:prstGeom prst="line">
-            <a:avLst/>
-          </a:prstGeom>
-          <a:ln w="23681">
-            <a:solidFill>
-              <a:srgbClr val="111A24"/>
-            </a:solidFill>
-          </a:ln>
-          <a:effectLst/>
-        </p:spPr>
-        <p:style>
-          <a:lnRef idx="2">
-            <a:schemeClr val="accent1"/>
-          </a:lnRef>
-          <a:fillRef idx="0">
-            <a:schemeClr val="accent1"/>
-          </a:fillRef>
-          <a:effectRef idx="0">
-            <a:schemeClr val="accent1"/>
-          </a:effectRef>
-          <a:fontRef idx="minor">
-            <a:schemeClr val="tx1"/>
-          </a:fontRef>
-        </p:style>
-      </p:cxnSp>
-      <p:cxnSp>
-        <p:nvCxnSpPr>
-          <p:cNvPr id="107" name="cl0_k_k_1" descr="Editable line; source id cl0_k_k_1"/>
-          <p:cNvCxnSpPr/>
-          <p:nvPr/>
-        </p:nvCxnSpPr>
-        <p:spPr>
-          <a:xfrm flipV="1">
-            <a:off x="1968499" y="4706937"/>
-            <a:ext cx="79375" cy="95250"/>
-          </a:xfrm>
-          <a:prstGeom prst="line">
-            <a:avLst/>
-          </a:prstGeom>
-          <a:ln w="23681">
-            <a:solidFill>
-              <a:srgbClr val="111A24"/>
-            </a:solidFill>
-          </a:ln>
-          <a:effectLst/>
-        </p:spPr>
-        <p:style>
-          <a:lnRef idx="2">
-            <a:schemeClr val="accent1"/>
-          </a:lnRef>
-          <a:fillRef idx="0">
-            <a:schemeClr val="accent1"/>
-          </a:fillRef>
-          <a:effectRef idx="0">
-            <a:schemeClr val="accent1"/>
-          </a:effectRef>
-          <a:fontRef idx="minor">
-            <a:schemeClr val="tx1"/>
-          </a:fontRef>
-        </p:style>
-      </p:cxnSp>
-      <p:sp>
-        <p:nvSpPr>
-          <p:cNvPr id="108" name="cl0_t" descr="Editable text; source id cl0_t"/>
+      <p:sp>
+        <p:nvSpPr>
+          <p:cNvPr id="100" name="cav_t" descr="Editable text; source id cav_t"/>
           <p:cNvSpPr txBox="1"/>
           <p:nvPr/>
         </p:nvSpPr>
         <p:spPr>
           <a:xfrm>
-            <a:off x="619124" y="5032374"/>
-            <a:ext cx="2270124" cy="253999"/>
+            <a:off x="9636124" y="5222874"/>
+            <a:ext cx="2024062" cy="341312"/>
           </a:xfrm>
           <a:prstGeom prst="rect">
             <a:avLst/>
@@ -8694,7 +8370,7 @@
           <a:p>
             <a:pPr algn="ctr" fontAlgn="base">
               <a:lnSpc>
-                <a:spcPts val="1828"/>
+                <a:spcPts val="2359"/>
               </a:lnSpc>
               <a:spcBef>
                 <a:spcPts val="0"/>
@@ -8702,7 +8378,353 @@
               <a:spcAft>
                 <a:spcPts val="0"/>
               </a:spcAft>
-              <a:defRPr sz="1249" b="1" i="0" lang="zh-CN" dirty="0">
+              <a:defRPr sz="1624" b="0" i="0" lang="zh-CN" dirty="0">
+                <a:solidFill>
+                  <a:srgbClr val="7A5410"/>
+                </a:solidFill>
+                <a:latin typeface="Noto Sans CJK SC"/>
+                <a:ea typeface="Noto Sans CJK SC"/>
+                <a:cs typeface="Noto Sans CJK SC"/>
+              </a:defRPr>
+            </a:pPr>
+            <a:r>
+              <a:rPr sz="1624" b="0" i="0" lang="zh-CN" dirty="0">
+                <a:solidFill>
+                  <a:srgbClr val="7A5410"/>
+                </a:solidFill>
+                <a:latin typeface="Noto Sans CJK SC"/>
+                <a:ea typeface="Noto Sans CJK SC"/>
+                <a:cs typeface="Noto Sans CJK SC"/>
+              </a:rPr>
+              <a:t>抽取框架</a:t>
+            </a:r>
+            <a:r>
+              <a:rPr sz="1624" b="0" i="0" lang="zh-CN" dirty="0">
+                <a:solidFill>
+                  <a:srgbClr val="7A5410"/>
+                </a:solidFill>
+                <a:latin typeface="DejaVu Sans"/>
+                <a:ea typeface="DejaVu Sans"/>
+                <a:cs typeface="DejaVu Sans"/>
+              </a:rPr>
+              <a:t> ≠ </a:t>
+            </a:r>
+            <a:r>
+              <a:rPr sz="1624" b="0" i="0" lang="zh-CN" dirty="0">
+                <a:solidFill>
+                  <a:srgbClr val="7A5410"/>
+                </a:solidFill>
+                <a:latin typeface="Noto Sans CJK SC"/>
+                <a:ea typeface="Noto Sans CJK SC"/>
+                <a:cs typeface="Noto Sans CJK SC"/>
+              </a:rPr>
+              <a:t>实验配方</a:t>
+            </a:r>
+          </a:p>
+        </p:txBody>
+      </p:sp>
+      <p:sp>
+        <p:nvSpPr>
+          <p:cNvPr id="101" name="cl0_g_s0" descr="Editable shape; source id cl0_g_s0"/>
+          <p:cNvSpPr/>
+          <p:nvPr/>
+        </p:nvSpPr>
+        <p:spPr>
+          <a:xfrm>
+            <a:off x="1484312" y="5730874"/>
+            <a:ext cx="174624" cy="261937"/>
+          </a:xfrm>
+          <a:prstGeom prst="rect">
+            <a:avLst/>
+          </a:prstGeom>
+          <a:noFill/>
+          <a:ln w="18216">
+            <a:solidFill>
+              <a:srgbClr val="111A24"/>
+            </a:solidFill>
+          </a:ln>
+          <a:effectLst/>
+        </p:spPr>
+        <p:style>
+          <a:lnRef idx="1">
+            <a:schemeClr val="accent1"/>
+          </a:lnRef>
+          <a:fillRef idx="3">
+            <a:schemeClr val="accent1"/>
+          </a:fillRef>
+          <a:effectRef idx="0">
+            <a:schemeClr val="accent1"/>
+          </a:effectRef>
+          <a:fontRef idx="minor">
+            <a:schemeClr val="lt1"/>
+          </a:fontRef>
+        </p:style>
+        <p:txBody>
+          <a:bodyPr rtlCol="0" anchor="ctr"/>
+          <a:lstStyle/>
+          <a:p>
+            <a:pPr algn="ctr"/>
+          </a:p>
+        </p:txBody>
+      </p:sp>
+      <p:cxnSp>
+        <p:nvCxnSpPr>
+          <p:cNvPr id="102" name="cl0_g_l1" descr="Editable line; source id cl0_g_l1"/>
+          <p:cNvCxnSpPr/>
+          <p:nvPr/>
+        </p:nvCxnSpPr>
+        <p:spPr>
+          <a:xfrm>
+            <a:off x="1523999" y="5826124"/>
+            <a:ext cx="119063" cy="0"/>
+          </a:xfrm>
+          <a:prstGeom prst="line">
+            <a:avLst/>
+          </a:prstGeom>
+          <a:ln w="18216">
+            <a:solidFill>
+              <a:srgbClr val="111A24"/>
+            </a:solidFill>
+          </a:ln>
+          <a:effectLst/>
+        </p:spPr>
+        <p:style>
+          <a:lnRef idx="2">
+            <a:schemeClr val="accent1"/>
+          </a:lnRef>
+          <a:fillRef idx="0">
+            <a:schemeClr val="accent1"/>
+          </a:fillRef>
+          <a:effectRef idx="0">
+            <a:schemeClr val="accent1"/>
+          </a:effectRef>
+          <a:fontRef idx="minor">
+            <a:schemeClr val="tx1"/>
+          </a:fontRef>
+        </p:style>
+      </p:cxnSp>
+      <p:cxnSp>
+        <p:nvCxnSpPr>
+          <p:cNvPr id="103" name="cl0_g_l2" descr="Editable line; source id cl0_g_l2"/>
+          <p:cNvCxnSpPr/>
+          <p:nvPr/>
+        </p:nvCxnSpPr>
+        <p:spPr>
+          <a:xfrm>
+            <a:off x="1523999" y="5881687"/>
+            <a:ext cx="119063" cy="0"/>
+          </a:xfrm>
+          <a:prstGeom prst="line">
+            <a:avLst/>
+          </a:prstGeom>
+          <a:ln w="18216">
+            <a:solidFill>
+              <a:srgbClr val="111A24"/>
+            </a:solidFill>
+          </a:ln>
+          <a:effectLst/>
+        </p:spPr>
+        <p:style>
+          <a:lnRef idx="2">
+            <a:schemeClr val="accent1"/>
+          </a:lnRef>
+          <a:fillRef idx="0">
+            <a:schemeClr val="accent1"/>
+          </a:fillRef>
+          <a:effectRef idx="0">
+            <a:schemeClr val="accent1"/>
+          </a:effectRef>
+          <a:fontRef idx="minor">
+            <a:schemeClr val="tx1"/>
+          </a:fontRef>
+        </p:style>
+      </p:cxnSp>
+      <p:cxnSp>
+        <p:nvCxnSpPr>
+          <p:cNvPr id="104" name="cl0_g_l3" descr="Editable line; source id cl0_g_l3"/>
+          <p:cNvCxnSpPr/>
+          <p:nvPr/>
+        </p:nvCxnSpPr>
+        <p:spPr>
+          <a:xfrm>
+            <a:off x="1523999" y="5929312"/>
+            <a:ext cx="79375" cy="0"/>
+          </a:xfrm>
+          <a:prstGeom prst="line">
+            <a:avLst/>
+          </a:prstGeom>
+          <a:ln w="18216">
+            <a:solidFill>
+              <a:srgbClr val="111A24"/>
+            </a:solidFill>
+          </a:ln>
+          <a:effectLst/>
+        </p:spPr>
+        <p:style>
+          <a:lnRef idx="2">
+            <a:schemeClr val="accent1"/>
+          </a:lnRef>
+          <a:fillRef idx="0">
+            <a:schemeClr val="accent1"/>
+          </a:fillRef>
+          <a:effectRef idx="0">
+            <a:schemeClr val="accent1"/>
+          </a:effectRef>
+          <a:fontRef idx="minor">
+            <a:schemeClr val="tx1"/>
+          </a:fontRef>
+        </p:style>
+      </p:cxnSp>
+      <p:sp>
+        <p:nvSpPr>
+          <p:cNvPr id="105" name="cl0_k_c" descr="Editable shape; source id cl0_k_c"/>
+          <p:cNvSpPr/>
+          <p:nvPr/>
+        </p:nvSpPr>
+        <p:spPr>
+          <a:xfrm>
+            <a:off x="1928812" y="5754687"/>
+            <a:ext cx="230187" cy="230187"/>
+          </a:xfrm>
+          <a:prstGeom prst="ellipse">
+            <a:avLst/>
+          </a:prstGeom>
+          <a:noFill/>
+          <a:ln w="18216">
+            <a:solidFill>
+              <a:srgbClr val="111A24"/>
+            </a:solidFill>
+          </a:ln>
+          <a:effectLst/>
+        </p:spPr>
+        <p:style>
+          <a:lnRef idx="1">
+            <a:schemeClr val="accent1"/>
+          </a:lnRef>
+          <a:fillRef idx="3">
+            <a:schemeClr val="accent1"/>
+          </a:fillRef>
+          <a:effectRef idx="0">
+            <a:schemeClr val="accent1"/>
+          </a:effectRef>
+          <a:fontRef idx="minor">
+            <a:schemeClr val="lt1"/>
+          </a:fontRef>
+        </p:style>
+        <p:txBody>
+          <a:bodyPr rtlCol="0" anchor="ctr"/>
+          <a:lstStyle/>
+          <a:p>
+            <a:pPr algn="ctr"/>
+          </a:p>
+        </p:txBody>
+      </p:sp>
+      <p:cxnSp>
+        <p:nvCxnSpPr>
+          <p:cNvPr id="106" name="cl0_k_k_0" descr="Editable line; source id cl0_k_k_0"/>
+          <p:cNvCxnSpPr/>
+          <p:nvPr/>
+        </p:nvCxnSpPr>
+        <p:spPr>
+          <a:xfrm>
+            <a:off x="1984374" y="5873749"/>
+            <a:ext cx="39688" cy="39688"/>
+          </a:xfrm>
+          <a:prstGeom prst="line">
+            <a:avLst/>
+          </a:prstGeom>
+          <a:ln w="23681">
+            <a:solidFill>
+              <a:srgbClr val="111A24"/>
+            </a:solidFill>
+          </a:ln>
+          <a:effectLst/>
+        </p:spPr>
+        <p:style>
+          <a:lnRef idx="2">
+            <a:schemeClr val="accent1"/>
+          </a:lnRef>
+          <a:fillRef idx="0">
+            <a:schemeClr val="accent1"/>
+          </a:fillRef>
+          <a:effectRef idx="0">
+            <a:schemeClr val="accent1"/>
+          </a:effectRef>
+          <a:fontRef idx="minor">
+            <a:schemeClr val="tx1"/>
+          </a:fontRef>
+        </p:style>
+      </p:cxnSp>
+      <p:cxnSp>
+        <p:nvCxnSpPr>
+          <p:cNvPr id="107" name="cl0_k_k_1" descr="Editable line; source id cl0_k_k_1"/>
+          <p:cNvCxnSpPr/>
+          <p:nvPr/>
+        </p:nvCxnSpPr>
+        <p:spPr>
+          <a:xfrm flipV="1">
+            <a:off x="2024062" y="5818187"/>
+            <a:ext cx="79375" cy="95250"/>
+          </a:xfrm>
+          <a:prstGeom prst="line">
+            <a:avLst/>
+          </a:prstGeom>
+          <a:ln w="23681">
+            <a:solidFill>
+              <a:srgbClr val="111A24"/>
+            </a:solidFill>
+          </a:ln>
+          <a:effectLst/>
+        </p:spPr>
+        <p:style>
+          <a:lnRef idx="2">
+            <a:schemeClr val="accent1"/>
+          </a:lnRef>
+          <a:fillRef idx="0">
+            <a:schemeClr val="accent1"/>
+          </a:fillRef>
+          <a:effectRef idx="0">
+            <a:schemeClr val="accent1"/>
+          </a:effectRef>
+          <a:fontRef idx="minor">
+            <a:schemeClr val="tx1"/>
+          </a:fontRef>
+        </p:style>
+      </p:cxnSp>
+      <p:sp>
+        <p:nvSpPr>
+          <p:cNvPr id="108" name="cl0_t" descr="Editable text; source id cl0_t"/>
+          <p:cNvSpPr txBox="1"/>
+          <p:nvPr/>
+        </p:nvSpPr>
+        <p:spPr>
+          <a:xfrm>
+            <a:off x="492124" y="6127749"/>
+            <a:ext cx="2666999" cy="373062"/>
+          </a:xfrm>
+          <a:prstGeom prst="rect">
+            <a:avLst/>
+          </a:prstGeom>
+          <a:noFill/>
+          <a:effectLst/>
+        </p:spPr>
+        <p:txBody>
+          <a:bodyPr wrap="none" anchor="ctr" tIns="0" rIns="0" bIns="0" lIns="0" anchorCtr="0" vertOverflow="overflow">
+            <a:noAutofit/>
+          </a:bodyPr>
+          <a:lstStyle/>
+          <a:p>
+            <a:pPr algn="ctr" fontAlgn="base">
+              <a:lnSpc>
+                <a:spcPts val="2546"/>
+              </a:lnSpc>
+              <a:spcBef>
+                <a:spcPts val="0"/>
+              </a:spcBef>
+              <a:spcAft>
+                <a:spcPts val="0"/>
+              </a:spcAft>
+              <a:defRPr sz="1749" b="0" i="0" lang="zh-CN" dirty="0">
                 <a:solidFill>
                   <a:srgbClr val="27303A"/>
                 </a:solidFill>
@@ -8712,7 +8734,7 @@
               </a:defRPr>
             </a:pPr>
             <a:r>
-              <a:rPr sz="1249" b="1" i="0" lang="zh-CN" dirty="0">
+              <a:rPr sz="1749" b="0" i="0" lang="zh-CN" dirty="0">
                 <a:solidFill>
                   <a:srgbClr val="27303A"/>
                 </a:solidFill>
@@ -8733,7 +8755,7 @@
         </p:nvSpPr>
         <p:spPr>
           <a:xfrm>
-            <a:off x="3897312" y="4603749"/>
+            <a:off x="4421187" y="5714999"/>
             <a:ext cx="71437" cy="214312"/>
           </a:xfrm>
           <a:prstGeom prst="roundRect">
@@ -8779,7 +8801,7 @@
         </p:nvSpPr>
         <p:spPr>
           <a:xfrm>
-            <a:off x="3881437" y="4802187"/>
+            <a:off x="4397374" y="5913437"/>
             <a:ext cx="119062" cy="119062"/>
           </a:xfrm>
           <a:prstGeom prst="ellipse">
@@ -8823,8 +8845,8 @@
         </p:nvCxnSpPr>
         <p:spPr>
           <a:xfrm>
-            <a:off x="3984624" y="4659312"/>
-            <a:ext cx="39688" cy="0"/>
+            <a:off x="4500562" y="5770562"/>
+            <a:ext cx="47625" cy="0"/>
           </a:xfrm>
           <a:prstGeom prst="line">
             <a:avLst/>
@@ -8859,8 +8881,8 @@
         </p:nvCxnSpPr>
         <p:spPr>
           <a:xfrm>
-            <a:off x="3984624" y="4706937"/>
-            <a:ext cx="39688" cy="0"/>
+            <a:off x="4500562" y="5818187"/>
+            <a:ext cx="47625" cy="0"/>
           </a:xfrm>
           <a:prstGeom prst="line">
             <a:avLst/>
@@ -8895,8 +8917,8 @@
         </p:nvCxnSpPr>
         <p:spPr>
           <a:xfrm>
-            <a:off x="3984624" y="4746624"/>
-            <a:ext cx="39688" cy="0"/>
+            <a:off x="4500562" y="5857874"/>
+            <a:ext cx="47625" cy="0"/>
           </a:xfrm>
           <a:prstGeom prst="line">
             <a:avLst/>
@@ -8931,7 +8953,7 @@
         </p:nvSpPr>
         <p:spPr>
           <a:xfrm>
-            <a:off x="4302124" y="4643437"/>
+            <a:off x="4786312" y="5754687"/>
             <a:ext cx="230187" cy="230187"/>
           </a:xfrm>
           <a:prstGeom prst="ellipse">
@@ -8975,8 +8997,8 @@
         </p:nvCxnSpPr>
         <p:spPr>
           <a:xfrm>
-            <a:off x="4357687" y="4762499"/>
-            <a:ext cx="39687" cy="39688"/>
+            <a:off x="4841874" y="5873749"/>
+            <a:ext cx="47625" cy="39688"/>
           </a:xfrm>
           <a:prstGeom prst="line">
             <a:avLst/>
@@ -9011,7 +9033,7 @@
         </p:nvCxnSpPr>
         <p:spPr>
           <a:xfrm flipV="1">
-            <a:off x="4397374" y="4706937"/>
+            <a:off x="4889499" y="5818187"/>
             <a:ext cx="79375" cy="95250"/>
           </a:xfrm>
           <a:prstGeom prst="line">
@@ -9047,8 +9069,8 @@
         </p:nvSpPr>
         <p:spPr>
           <a:xfrm>
-            <a:off x="3047999" y="5032374"/>
-            <a:ext cx="2270124" cy="253999"/>
+            <a:off x="3349624" y="6127749"/>
+            <a:ext cx="2666999" cy="373062"/>
           </a:xfrm>
           <a:prstGeom prst="rect">
             <a:avLst/>
@@ -9064,7 +9086,7 @@
           <a:p>
             <a:pPr algn="ctr" fontAlgn="base">
               <a:lnSpc>
-                <a:spcPts val="1828"/>
+                <a:spcPts val="2546"/>
               </a:lnSpc>
               <a:spcBef>
                 <a:spcPts val="0"/>
@@ -9072,7 +9094,7 @@
               <a:spcAft>
                 <a:spcPts val="0"/>
               </a:spcAft>
-              <a:defRPr sz="1249" b="1" i="0" lang="zh-CN" dirty="0">
+              <a:defRPr sz="1749" b="0" i="0" lang="zh-CN" dirty="0">
                 <a:solidFill>
                   <a:srgbClr val="27303A"/>
                 </a:solidFill>
@@ -9082,7 +9104,7 @@
               </a:defRPr>
             </a:pPr>
             <a:r>
-              <a:rPr sz="1249" b="1" i="0" lang="zh-CN" dirty="0">
+              <a:rPr sz="1749" b="0" i="0" lang="zh-CN" dirty="0">
                 <a:solidFill>
                   <a:srgbClr val="27303A"/>
                 </a:solidFill>
@@ -9093,7 +9115,7 @@
               <a:t>温度</a:t>
             </a:r>
             <a:r>
-              <a:rPr sz="1249" b="1" i="0" lang="zh-CN" dirty="0">
+              <a:rPr sz="1749" b="0" i="0" lang="zh-CN" dirty="0">
                 <a:solidFill>
                   <a:srgbClr val="27303A"/>
                 </a:solidFill>
@@ -9104,7 +9126,7 @@
               <a:t>—</a:t>
             </a:r>
             <a:r>
-              <a:rPr sz="1249" b="1" i="0" lang="zh-CN" dirty="0">
+              <a:rPr sz="1749" b="0" i="0" lang="zh-CN" dirty="0">
                 <a:solidFill>
                   <a:srgbClr val="27303A"/>
                 </a:solidFill>
@@ -9125,8 +9147,8 @@
         </p:nvCxnSpPr>
         <p:spPr>
           <a:xfrm>
-            <a:off x="2952749" y="4540249"/>
-            <a:ext cx="0" cy="762000"/>
+            <a:off x="3254374" y="5667374"/>
+            <a:ext cx="0" cy="833438"/>
           </a:xfrm>
           <a:prstGeom prst="line">
             <a:avLst/>
@@ -9161,7 +9183,7 @@
         </p:nvCxnSpPr>
         <p:spPr>
           <a:xfrm>
-            <a:off x="6262687" y="4683124"/>
+            <a:off x="7215187" y="5794374"/>
             <a:ext cx="39687" cy="198438"/>
           </a:xfrm>
           <a:prstGeom prst="line">
@@ -9197,8 +9219,8 @@
         </p:nvCxnSpPr>
         <p:spPr>
           <a:xfrm>
-            <a:off x="6302374" y="4881562"/>
-            <a:ext cx="127000" cy="0"/>
+            <a:off x="7254874" y="5992812"/>
+            <a:ext cx="134938" cy="0"/>
           </a:xfrm>
           <a:prstGeom prst="line">
             <a:avLst/>
@@ -9233,8 +9255,8 @@
         </p:nvCxnSpPr>
         <p:spPr>
           <a:xfrm flipV="1">
-            <a:off x="6429374" y="4683124"/>
-            <a:ext cx="39688" cy="198438"/>
+            <a:off x="7389812" y="5794374"/>
+            <a:ext cx="31750" cy="198438"/>
           </a:xfrm>
           <a:prstGeom prst="line">
             <a:avLst/>
@@ -9269,8 +9291,8 @@
         </p:nvCxnSpPr>
         <p:spPr>
           <a:xfrm>
-            <a:off x="6238874" y="4683124"/>
-            <a:ext cx="254000" cy="0"/>
+            <a:off x="7199312" y="5794374"/>
+            <a:ext cx="246062" cy="0"/>
           </a:xfrm>
           <a:prstGeom prst="line">
             <a:avLst/>
@@ -9305,7 +9327,7 @@
         </p:nvSpPr>
         <p:spPr>
           <a:xfrm>
-            <a:off x="6730999" y="4643437"/>
+            <a:off x="7651749" y="5754687"/>
             <a:ext cx="230187" cy="230187"/>
           </a:xfrm>
           <a:prstGeom prst="ellipse">
@@ -9349,7 +9371,7 @@
         </p:nvCxnSpPr>
         <p:spPr>
           <a:xfrm>
-            <a:off x="6786562" y="4762499"/>
+            <a:off x="7707312" y="5873749"/>
             <a:ext cx="39687" cy="39688"/>
           </a:xfrm>
           <a:prstGeom prst="line">
@@ -9385,7 +9407,7 @@
         </p:nvCxnSpPr>
         <p:spPr>
           <a:xfrm flipV="1">
-            <a:off x="6826249" y="4706937"/>
+            <a:off x="7746999" y="5818187"/>
             <a:ext cx="79375" cy="95250"/>
           </a:xfrm>
           <a:prstGeom prst="line">
@@ -9421,8 +9443,8 @@
         </p:nvSpPr>
         <p:spPr>
           <a:xfrm>
-            <a:off x="5476874" y="5032374"/>
-            <a:ext cx="2270124" cy="253999"/>
+            <a:off x="6215062" y="6127749"/>
+            <a:ext cx="2666999" cy="373062"/>
           </a:xfrm>
           <a:prstGeom prst="rect">
             <a:avLst/>
@@ -9438,7 +9460,7 @@
           <a:p>
             <a:pPr algn="ctr" fontAlgn="base">
               <a:lnSpc>
-                <a:spcPts val="1828"/>
+                <a:spcPts val="2546"/>
               </a:lnSpc>
               <a:spcBef>
                 <a:spcPts val="0"/>
@@ -9446,7 +9468,7 @@
               <a:spcAft>
                 <a:spcPts val="0"/>
               </a:spcAft>
-              <a:defRPr sz="1249" b="1" i="0" lang="zh-CN" dirty="0">
+              <a:defRPr sz="1749" b="0" i="0" lang="zh-CN" dirty="0">
                 <a:solidFill>
                   <a:srgbClr val="27303A"/>
                 </a:solidFill>
@@ -9456,7 +9478,7 @@
               </a:defRPr>
             </a:pPr>
             <a:r>
-              <a:rPr sz="1249" b="1" i="0" lang="zh-CN" dirty="0">
+              <a:rPr sz="1749" b="0" i="0" lang="zh-CN" dirty="0">
                 <a:solidFill>
                   <a:srgbClr val="27303A"/>
                 </a:solidFill>
@@ -9477,8 +9499,8 @@
         </p:nvCxnSpPr>
         <p:spPr>
           <a:xfrm>
-            <a:off x="5381624" y="4540249"/>
-            <a:ext cx="0" cy="762000"/>
+            <a:off x="6119812" y="5667374"/>
+            <a:ext cx="0" cy="833438"/>
           </a:xfrm>
           <a:prstGeom prst="line">
             <a:avLst/>
@@ -9513,8 +9535,8 @@
         </p:nvCxnSpPr>
         <p:spPr>
           <a:xfrm>
-            <a:off x="8794749" y="4611687"/>
-            <a:ext cx="87313" cy="127000"/>
+            <a:off x="10183812" y="5722937"/>
+            <a:ext cx="87312" cy="127000"/>
           </a:xfrm>
           <a:prstGeom prst="line">
             <a:avLst/>
@@ -9549,8 +9571,8 @@
         </p:nvCxnSpPr>
         <p:spPr>
           <a:xfrm flipH="1">
-            <a:off x="8842374" y="4738687"/>
-            <a:ext cx="39688" cy="79375"/>
+            <a:off x="10223499" y="5849937"/>
+            <a:ext cx="47625" cy="79375"/>
           </a:xfrm>
           <a:prstGeom prst="line">
             <a:avLst/>
@@ -9585,8 +9607,8 @@
         </p:nvCxnSpPr>
         <p:spPr>
           <a:xfrm flipH="1">
-            <a:off x="8747124" y="4818062"/>
-            <a:ext cx="95250" cy="0"/>
+            <a:off x="10136187" y="5929312"/>
+            <a:ext cx="87312" cy="0"/>
           </a:xfrm>
           <a:prstGeom prst="line">
             <a:avLst/>
@@ -9621,8 +9643,8 @@
         </p:nvCxnSpPr>
         <p:spPr>
           <a:xfrm flipH="1" flipV="1">
-            <a:off x="8707437" y="4738687"/>
-            <a:ext cx="39687" cy="79375"/>
+            <a:off x="10096499" y="5849937"/>
+            <a:ext cx="39688" cy="79375"/>
           </a:xfrm>
           <a:prstGeom prst="line">
             <a:avLst/>
@@ -9657,8 +9679,8 @@
         </p:nvCxnSpPr>
         <p:spPr>
           <a:xfrm flipV="1">
-            <a:off x="8707437" y="4611687"/>
-            <a:ext cx="87312" cy="127000"/>
+            <a:off x="10096499" y="5722937"/>
+            <a:ext cx="87313" cy="127000"/>
           </a:xfrm>
           <a:prstGeom prst="line">
             <a:avLst/>
@@ -9693,7 +9715,7 @@
         </p:nvSpPr>
         <p:spPr>
           <a:xfrm>
-            <a:off x="8723312" y="4857749"/>
+            <a:off x="10112374" y="5968999"/>
             <a:ext cx="47624" cy="47624"/>
           </a:xfrm>
           <a:prstGeom prst="ellipse">
@@ -9737,7 +9759,7 @@
         </p:nvSpPr>
         <p:spPr>
           <a:xfrm>
-            <a:off x="8786812" y="4873624"/>
+            <a:off x="10175874" y="5984874"/>
             <a:ext cx="47624" cy="47624"/>
           </a:xfrm>
           <a:prstGeom prst="ellipse">
@@ -9781,7 +9803,7 @@
         </p:nvSpPr>
         <p:spPr>
           <a:xfrm>
-            <a:off x="8842374" y="4841874"/>
+            <a:off x="10231437" y="5953124"/>
             <a:ext cx="47624" cy="47624"/>
           </a:xfrm>
           <a:prstGeom prst="ellipse">
@@ -9825,7 +9847,7 @@
         </p:nvSpPr>
         <p:spPr>
           <a:xfrm>
-            <a:off x="9159874" y="4643437"/>
+            <a:off x="10509249" y="5754687"/>
             <a:ext cx="230187" cy="230187"/>
           </a:xfrm>
           <a:prstGeom prst="ellipse">
@@ -9869,8 +9891,8 @@
         </p:nvCxnSpPr>
         <p:spPr>
           <a:xfrm>
-            <a:off x="9215437" y="4762499"/>
-            <a:ext cx="39687" cy="39688"/>
+            <a:off x="10564812" y="5873749"/>
+            <a:ext cx="47625" cy="39688"/>
           </a:xfrm>
           <a:prstGeom prst="line">
             <a:avLst/>
@@ -9905,7 +9927,7 @@
         </p:nvCxnSpPr>
         <p:spPr>
           <a:xfrm flipV="1">
-            <a:off x="9255124" y="4706937"/>
+            <a:off x="10612437" y="5818187"/>
             <a:ext cx="79375" cy="95250"/>
           </a:xfrm>
           <a:prstGeom prst="line">
@@ -9941,8 +9963,8 @@
         </p:nvSpPr>
         <p:spPr>
           <a:xfrm>
-            <a:off x="7905749" y="5032374"/>
-            <a:ext cx="2270124" cy="253999"/>
+            <a:off x="9080499" y="6127749"/>
+            <a:ext cx="2666999" cy="373062"/>
           </a:xfrm>
           <a:prstGeom prst="rect">
             <a:avLst/>
@@ -9958,7 +9980,7 @@
           <a:p>
             <a:pPr algn="ctr" fontAlgn="base">
               <a:lnSpc>
-                <a:spcPts val="1828"/>
+                <a:spcPts val="2546"/>
               </a:lnSpc>
               <a:spcBef>
                 <a:spcPts val="0"/>
@@ -9966,7 +9988,7 @@
               <a:spcAft>
                 <a:spcPts val="0"/>
               </a:spcAft>
-              <a:defRPr sz="1249" b="1" i="0" lang="zh-CN" dirty="0">
+              <a:defRPr sz="1749" b="0" i="0" lang="zh-CN" dirty="0">
                 <a:solidFill>
                   <a:srgbClr val="27303A"/>
                 </a:solidFill>
@@ -9976,7 +9998,7 @@
               </a:defRPr>
             </a:pPr>
             <a:r>
-              <a:rPr sz="1249" b="1" i="0" lang="zh-CN" dirty="0">
+              <a:rPr sz="1749" b="0" i="0" lang="zh-CN" dirty="0">
                 <a:solidFill>
                   <a:srgbClr val="27303A"/>
                 </a:solidFill>
@@ -9997,8 +10019,8 @@
         </p:nvCxnSpPr>
         <p:spPr>
           <a:xfrm>
-            <a:off x="7810499" y="4540249"/>
-            <a:ext cx="0" cy="762000"/>
+            <a:off x="8985249" y="5667374"/>
+            <a:ext cx="0" cy="833438"/>
           </a:xfrm>
           <a:prstGeom prst="line">
             <a:avLst/>
@@ -10027,26 +10049,26 @@
       </p:cxnSp>
       <p:sp>
         <p:nvSpPr>
-          <p:cNvPr id="141" name="cav" descr="Editable shape; source id cav"/>
+          <p:cNvPr id="141" name="zB" descr="Editable shape; source id zB"/>
           <p:cNvSpPr/>
           <p:nvPr/>
         </p:nvSpPr>
         <p:spPr>
           <a:xfrm>
-            <a:off x="10096499" y="4635499"/>
-            <a:ext cx="1674812" cy="317499"/>
+            <a:off x="206374" y="7516812"/>
+            <a:ext cx="11779249" cy="2309812"/>
           </a:xfrm>
           <a:prstGeom prst="roundRect">
             <a:avLst>
-              <a:gd name="adj" fmla="val 50000"/>
+              <a:gd name="adj" fmla="val 4810"/>
             </a:avLst>
           </a:prstGeom>
           <a:solidFill>
-            <a:srgbClr val="FFF6E3"/>
+            <a:srgbClr val="E6F2F3"/>
           </a:solidFill>
           <a:ln w="12699">
             <a:solidFill>
-              <a:srgbClr val="C48A24"/>
+              <a:srgbClr val="1F7F8C"/>
             </a:solidFill>
           </a:ln>
           <a:effectLst/>
@@ -10075,14 +10097,14 @@
       </p:sp>
       <p:sp>
         <p:nvSpPr>
-          <p:cNvPr id="142" name="cav_t" descr="Editable text; source id cav_t"/>
+          <p:cNvPr id="142" name="zB_l" descr="Editable text; source id zB_l"/>
           <p:cNvSpPr txBox="1"/>
           <p:nvPr/>
         </p:nvSpPr>
         <p:spPr>
           <a:xfrm>
-            <a:off x="10175874" y="4667249"/>
-            <a:ext cx="1516062" cy="253999"/>
+            <a:off x="349249" y="7596187"/>
+            <a:ext cx="1285874" cy="444499"/>
           </a:xfrm>
           <a:prstGeom prst="rect">
             <a:avLst/>
@@ -10096,9 +10118,9 @@
           </a:bodyPr>
           <a:lstStyle/>
           <a:p>
-            <a:pPr algn="ctr" fontAlgn="base">
+            <a:pPr algn="l" fontAlgn="base">
               <a:lnSpc>
-                <a:spcPts val="1734"/>
+                <a:spcPts val="3015"/>
               </a:lnSpc>
               <a:spcBef>
                 <a:spcPts val="0"/>
@@ -10106,179 +10128,7 @@
               <a:spcAft>
                 <a:spcPts val="0"/>
               </a:spcAft>
-              <a:defRPr sz="1187" b="1" i="0" lang="zh-CN" dirty="0">
-                <a:solidFill>
-                  <a:srgbClr val="7A5410"/>
-                </a:solidFill>
-                <a:latin typeface="Noto Sans CJK SC"/>
-                <a:ea typeface="Noto Sans CJK SC"/>
-                <a:cs typeface="Noto Sans CJK SC"/>
-              </a:defRPr>
-            </a:pPr>
-            <a:r>
-              <a:rPr sz="1187" b="1" i="0" lang="zh-CN" dirty="0">
-                <a:solidFill>
-                  <a:srgbClr val="7A5410"/>
-                </a:solidFill>
-                <a:latin typeface="Noto Sans CJK SC"/>
-                <a:ea typeface="Noto Sans CJK SC"/>
-                <a:cs typeface="Noto Sans CJK SC"/>
-              </a:rPr>
-              <a:t>抽取框架</a:t>
-            </a:r>
-            <a:r>
-              <a:rPr sz="1187" b="1" i="0" lang="zh-CN" dirty="0">
-                <a:solidFill>
-                  <a:srgbClr val="7A5410"/>
-                </a:solidFill>
-                <a:latin typeface="DejaVu Sans"/>
-                <a:ea typeface="DejaVu Sans"/>
-                <a:cs typeface="DejaVu Sans"/>
-              </a:rPr>
-              <a:t> ≠ </a:t>
-            </a:r>
-            <a:r>
-              <a:rPr sz="1187" b="1" i="0" lang="zh-CN" dirty="0">
-                <a:solidFill>
-                  <a:srgbClr val="7A5410"/>
-                </a:solidFill>
-                <a:latin typeface="Noto Sans CJK SC"/>
-                <a:ea typeface="Noto Sans CJK SC"/>
-                <a:cs typeface="Noto Sans CJK SC"/>
-              </a:rPr>
-              <a:t>实验配方</a:t>
-            </a:r>
-          </a:p>
-        </p:txBody>
-      </p:sp>
-      <p:sp>
-        <p:nvSpPr>
-          <p:cNvPr id="143" name="k1" descr="Editable shape; source id k1"/>
-          <p:cNvSpPr/>
-          <p:nvPr/>
-        </p:nvSpPr>
-        <p:spPr>
-          <a:xfrm>
-            <a:off x="396874" y="6270624"/>
-            <a:ext cx="2778124" cy="1476374"/>
-          </a:xfrm>
-          <a:prstGeom prst="roundRect">
-            <a:avLst>
-              <a:gd name="adj" fmla="val 4838"/>
-            </a:avLst>
-          </a:prstGeom>
-          <a:solidFill>
-            <a:srgbClr val="FFFFFF"/>
-          </a:solidFill>
-          <a:ln w="15081">
-            <a:solidFill>
-              <a:srgbClr val="1F7F8C"/>
-            </a:solidFill>
-          </a:ln>
-          <a:effectLst/>
-        </p:spPr>
-        <p:style>
-          <a:lnRef idx="1">
-            <a:schemeClr val="accent1"/>
-          </a:lnRef>
-          <a:fillRef idx="3">
-            <a:schemeClr val="accent1"/>
-          </a:fillRef>
-          <a:effectRef idx="0">
-            <a:schemeClr val="accent1"/>
-          </a:effectRef>
-          <a:fontRef idx="minor">
-            <a:schemeClr val="lt1"/>
-          </a:fontRef>
-        </p:style>
-        <p:txBody>
-          <a:bodyPr rtlCol="0" anchor="ctr"/>
-          <a:lstStyle/>
-          <a:p>
-            <a:pPr algn="ctr"/>
-          </a:p>
-        </p:txBody>
-      </p:sp>
-      <p:sp>
-        <p:nvSpPr>
-          <p:cNvPr id="144" name="k1_b" descr="Editable shape; source id k1_b"/>
-          <p:cNvSpPr/>
-          <p:nvPr/>
-        </p:nvSpPr>
-        <p:spPr>
-          <a:xfrm>
-            <a:off x="396874" y="6270624"/>
-            <a:ext cx="55562" cy="1476374"/>
-          </a:xfrm>
-          <a:prstGeom prst="roundRect">
-            <a:avLst>
-              <a:gd name="adj" fmla="val 42857"/>
-            </a:avLst>
-          </a:prstGeom>
-          <a:solidFill>
-            <a:srgbClr val="1F7F8C"/>
-          </a:solidFill>
-          <a:ln>
-            <a:noFill/>
-          </a:ln>
-          <a:effectLst/>
-        </p:spPr>
-        <p:style>
-          <a:lnRef idx="1">
-            <a:schemeClr val="accent1"/>
-          </a:lnRef>
-          <a:fillRef idx="3">
-            <a:schemeClr val="accent1"/>
-          </a:fillRef>
-          <a:effectRef idx="0">
-            <a:schemeClr val="accent1"/>
-          </a:effectRef>
-          <a:fontRef idx="minor">
-            <a:schemeClr val="lt1"/>
-          </a:fontRef>
-        </p:style>
-        <p:txBody>
-          <a:bodyPr rtlCol="0" anchor="ctr"/>
-          <a:lstStyle/>
-          <a:p>
-            <a:pPr algn="ctr"/>
-          </a:p>
-        </p:txBody>
-      </p:sp>
-      <p:sp>
-        <p:nvSpPr>
-          <p:cNvPr id="145" name="k1_t" descr="Editable text; source id k1_t"/>
-          <p:cNvSpPr txBox="1"/>
-          <p:nvPr/>
-        </p:nvSpPr>
-        <p:spPr>
-          <a:xfrm>
-            <a:off x="523874" y="6381749"/>
-            <a:ext cx="2524124" cy="317499"/>
-          </a:xfrm>
-          <a:prstGeom prst="rect">
-            <a:avLst/>
-          </a:prstGeom>
-          <a:noFill/>
-          <a:effectLst/>
-        </p:spPr>
-        <p:txBody>
-          <a:bodyPr wrap="none" anchor="ctr" tIns="0" rIns="0" bIns="0" lIns="0" anchorCtr="0" vertOverflow="overflow">
-            <a:noAutofit/>
-          </a:bodyPr>
-          <a:lstStyle/>
-          <a:p>
-            <a:pPr algn="ctr" fontAlgn="base">
-              <a:lnSpc>
-                <a:spcPts val="2187"/>
-              </a:lnSpc>
-              <a:spcBef>
-                <a:spcPts val="0"/>
-              </a:spcBef>
-              <a:spcAft>
-                <a:spcPts val="0"/>
-              </a:spcAft>
-              <a:defRPr sz="1499" b="1" i="0" lang="zh-CN" dirty="0">
+              <a:defRPr sz="2062" b="1" i="0" lang="zh-CN" dirty="0">
                 <a:solidFill>
                   <a:srgbClr val="0F4F58"/>
                 </a:solidFill>
@@ -10288,7 +10138,157 @@
               </a:defRPr>
             </a:pPr>
             <a:r>
-              <a:rPr sz="1499" b="1" i="0" lang="zh-CN" dirty="0">
+              <a:rPr sz="2062" b="1" i="0" lang="zh-CN" dirty="0">
+                <a:solidFill>
+                  <a:srgbClr val="0F4F58"/>
+                </a:solidFill>
+                <a:latin typeface="Noto Sans CJK SC"/>
+                <a:ea typeface="Noto Sans CJK SC"/>
+                <a:cs typeface="Noto Sans CJK SC"/>
+              </a:rPr>
+              <a:t>产物表征</a:t>
+            </a:r>
+          </a:p>
+        </p:txBody>
+      </p:sp>
+      <p:sp>
+        <p:nvSpPr>
+          <p:cNvPr id="143" name="k1" descr="Editable shape; source id k1"/>
+          <p:cNvSpPr/>
+          <p:nvPr/>
+        </p:nvSpPr>
+        <p:spPr>
+          <a:xfrm>
+            <a:off x="333374" y="8120062"/>
+            <a:ext cx="2809874" cy="1579562"/>
+          </a:xfrm>
+          <a:prstGeom prst="roundRect">
+            <a:avLst>
+              <a:gd name="adj" fmla="val 4522"/>
+            </a:avLst>
+          </a:prstGeom>
+          <a:solidFill>
+            <a:srgbClr val="FFFFFF"/>
+          </a:solidFill>
+          <a:ln w="15081">
+            <a:solidFill>
+              <a:srgbClr val="1F7F8C"/>
+            </a:solidFill>
+          </a:ln>
+          <a:effectLst/>
+        </p:spPr>
+        <p:style>
+          <a:lnRef idx="1">
+            <a:schemeClr val="accent1"/>
+          </a:lnRef>
+          <a:fillRef idx="3">
+            <a:schemeClr val="accent1"/>
+          </a:fillRef>
+          <a:effectRef idx="0">
+            <a:schemeClr val="accent1"/>
+          </a:effectRef>
+          <a:fontRef idx="minor">
+            <a:schemeClr val="lt1"/>
+          </a:fontRef>
+        </p:style>
+        <p:txBody>
+          <a:bodyPr rtlCol="0" anchor="ctr"/>
+          <a:lstStyle/>
+          <a:p>
+            <a:pPr algn="ctr"/>
+          </a:p>
+        </p:txBody>
+      </p:sp>
+      <p:sp>
+        <p:nvSpPr>
+          <p:cNvPr id="144" name="k1_b" descr="Editable shape; source id k1_b"/>
+          <p:cNvSpPr/>
+          <p:nvPr/>
+        </p:nvSpPr>
+        <p:spPr>
+          <a:xfrm>
+            <a:off x="333374" y="8120062"/>
+            <a:ext cx="47624" cy="1579562"/>
+          </a:xfrm>
+          <a:prstGeom prst="roundRect">
+            <a:avLst>
+              <a:gd name="adj" fmla="val 50000"/>
+            </a:avLst>
+          </a:prstGeom>
+          <a:solidFill>
+            <a:srgbClr val="1F7F8C"/>
+          </a:solidFill>
+          <a:ln>
+            <a:noFill/>
+          </a:ln>
+          <a:effectLst/>
+        </p:spPr>
+        <p:style>
+          <a:lnRef idx="1">
+            <a:schemeClr val="accent1"/>
+          </a:lnRef>
+          <a:fillRef idx="3">
+            <a:schemeClr val="accent1"/>
+          </a:fillRef>
+          <a:effectRef idx="0">
+            <a:schemeClr val="accent1"/>
+          </a:effectRef>
+          <a:fontRef idx="minor">
+            <a:schemeClr val="lt1"/>
+          </a:fontRef>
+        </p:style>
+        <p:txBody>
+          <a:bodyPr rtlCol="0" anchor="ctr"/>
+          <a:lstStyle/>
+          <a:p>
+            <a:pPr algn="ctr"/>
+          </a:p>
+        </p:txBody>
+      </p:sp>
+      <p:sp>
+        <p:nvSpPr>
+          <p:cNvPr id="145" name="k1_t" descr="Editable text; source id k1_t"/>
+          <p:cNvSpPr txBox="1"/>
+          <p:nvPr/>
+        </p:nvSpPr>
+        <p:spPr>
+          <a:xfrm>
+            <a:off x="460374" y="8215312"/>
+            <a:ext cx="2603499" cy="420687"/>
+          </a:xfrm>
+          <a:prstGeom prst="rect">
+            <a:avLst/>
+          </a:prstGeom>
+          <a:noFill/>
+          <a:effectLst/>
+        </p:spPr>
+        <p:txBody>
+          <a:bodyPr wrap="none" anchor="ctr" tIns="0" rIns="0" bIns="0" lIns="0" anchorCtr="0" vertOverflow="overflow">
+            <a:noAutofit/>
+          </a:bodyPr>
+          <a:lstStyle/>
+          <a:p>
+            <a:pPr algn="ctr" fontAlgn="base">
+              <a:lnSpc>
+                <a:spcPts val="2812"/>
+              </a:lnSpc>
+              <a:spcBef>
+                <a:spcPts val="0"/>
+              </a:spcBef>
+              <a:spcAft>
+                <a:spcPts val="0"/>
+              </a:spcAft>
+              <a:defRPr sz="1937" b="1" i="0" lang="zh-CN" dirty="0">
+                <a:solidFill>
+                  <a:srgbClr val="0F4F58"/>
+                </a:solidFill>
+                <a:latin typeface="Noto Sans CJK SC"/>
+                <a:ea typeface="Noto Sans CJK SC"/>
+                <a:cs typeface="Noto Sans CJK SC"/>
+              </a:defRPr>
+            </a:pPr>
+            <a:r>
+              <a:rPr sz="1937" b="1" i="0" lang="zh-CN" dirty="0">
                 <a:solidFill>
                   <a:srgbClr val="0F4F58"/>
                 </a:solidFill>
@@ -10309,8 +10309,8 @@
         </p:nvCxnSpPr>
         <p:spPr>
           <a:xfrm>
-            <a:off x="1650999" y="6826249"/>
-            <a:ext cx="269875" cy="0"/>
+            <a:off x="1643062" y="8755062"/>
+            <a:ext cx="238125" cy="0"/>
           </a:xfrm>
           <a:prstGeom prst="line">
             <a:avLst/>
@@ -10345,8 +10345,8 @@
         </p:nvCxnSpPr>
         <p:spPr>
           <a:xfrm>
-            <a:off x="1650999" y="6826249"/>
-            <a:ext cx="0" cy="269875"/>
+            <a:off x="1643062" y="8755062"/>
+            <a:ext cx="0" cy="238125"/>
           </a:xfrm>
           <a:prstGeom prst="line">
             <a:avLst/>
@@ -10381,8 +10381,8 @@
         </p:nvCxnSpPr>
         <p:spPr>
           <a:xfrm>
-            <a:off x="1650999" y="6961187"/>
-            <a:ext cx="269875" cy="0"/>
+            <a:off x="1643062" y="8874124"/>
+            <a:ext cx="238125" cy="0"/>
           </a:xfrm>
           <a:prstGeom prst="line">
             <a:avLst/>
@@ -10417,8 +10417,8 @@
         </p:nvCxnSpPr>
         <p:spPr>
           <a:xfrm>
-            <a:off x="1785937" y="6826249"/>
-            <a:ext cx="0" cy="269875"/>
+            <a:off x="1762124" y="8755062"/>
+            <a:ext cx="0" cy="238125"/>
           </a:xfrm>
           <a:prstGeom prst="line">
             <a:avLst/>
@@ -10453,8 +10453,8 @@
         </p:nvCxnSpPr>
         <p:spPr>
           <a:xfrm>
-            <a:off x="1650999" y="7096124"/>
-            <a:ext cx="269875" cy="0"/>
+            <a:off x="1643062" y="8993187"/>
+            <a:ext cx="238125" cy="0"/>
           </a:xfrm>
           <a:prstGeom prst="line">
             <a:avLst/>
@@ -10489,8 +10489,8 @@
         </p:nvCxnSpPr>
         <p:spPr>
           <a:xfrm>
-            <a:off x="1920874" y="6826249"/>
-            <a:ext cx="0" cy="269875"/>
+            <a:off x="1881187" y="8755062"/>
+            <a:ext cx="0" cy="238125"/>
           </a:xfrm>
           <a:prstGeom prst="line">
             <a:avLst/>
@@ -10525,8 +10525,8 @@
         </p:nvSpPr>
         <p:spPr>
           <a:xfrm>
-            <a:off x="1619249" y="6794499"/>
-            <a:ext cx="63499" cy="63499"/>
+            <a:off x="1611312" y="8723312"/>
+            <a:ext cx="55562" cy="55562"/>
           </a:xfrm>
           <a:prstGeom prst="ellipse">
             <a:avLst/>
@@ -10569,8 +10569,8 @@
         </p:nvSpPr>
         <p:spPr>
           <a:xfrm>
-            <a:off x="1619249" y="6929437"/>
-            <a:ext cx="63499" cy="63499"/>
+            <a:off x="1611312" y="8850312"/>
+            <a:ext cx="55562" cy="55562"/>
           </a:xfrm>
           <a:prstGeom prst="ellipse">
             <a:avLst/>
@@ -10613,8 +10613,8 @@
         </p:nvSpPr>
         <p:spPr>
           <a:xfrm>
-            <a:off x="1619249" y="7064374"/>
-            <a:ext cx="63499" cy="63499"/>
+            <a:off x="1611312" y="8969374"/>
+            <a:ext cx="55562" cy="55562"/>
           </a:xfrm>
           <a:prstGeom prst="ellipse">
             <a:avLst/>
@@ -10657,8 +10657,8 @@
         </p:nvSpPr>
         <p:spPr>
           <a:xfrm>
-            <a:off x="1754187" y="6794499"/>
-            <a:ext cx="63499" cy="63499"/>
+            <a:off x="1738312" y="8723312"/>
+            <a:ext cx="55562" cy="55562"/>
           </a:xfrm>
           <a:prstGeom prst="ellipse">
             <a:avLst/>
@@ -10701,8 +10701,8 @@
         </p:nvSpPr>
         <p:spPr>
           <a:xfrm>
-            <a:off x="1754187" y="6929437"/>
-            <a:ext cx="63499" cy="63499"/>
+            <a:off x="1738312" y="8850312"/>
+            <a:ext cx="55562" cy="55562"/>
           </a:xfrm>
           <a:prstGeom prst="ellipse">
             <a:avLst/>
@@ -10745,8 +10745,8 @@
         </p:nvSpPr>
         <p:spPr>
           <a:xfrm>
-            <a:off x="1754187" y="7064374"/>
-            <a:ext cx="63499" cy="63499"/>
+            <a:off x="1738312" y="8969374"/>
+            <a:ext cx="55562" cy="55562"/>
           </a:xfrm>
           <a:prstGeom prst="ellipse">
             <a:avLst/>
@@ -10789,8 +10789,8 @@
         </p:nvSpPr>
         <p:spPr>
           <a:xfrm>
-            <a:off x="1889124" y="6794499"/>
-            <a:ext cx="63499" cy="63499"/>
+            <a:off x="1857374" y="8723312"/>
+            <a:ext cx="55562" cy="55562"/>
           </a:xfrm>
           <a:prstGeom prst="ellipse">
             <a:avLst/>
@@ -10833,8 +10833,8 @@
         </p:nvSpPr>
         <p:spPr>
           <a:xfrm>
-            <a:off x="1889124" y="6929437"/>
-            <a:ext cx="63499" cy="63499"/>
+            <a:off x="1857374" y="8850312"/>
+            <a:ext cx="55562" cy="55562"/>
           </a:xfrm>
           <a:prstGeom prst="ellipse">
             <a:avLst/>
@@ -10877,8 +10877,8 @@
         </p:nvSpPr>
         <p:spPr>
           <a:xfrm>
-            <a:off x="1889124" y="7064374"/>
-            <a:ext cx="63499" cy="63499"/>
+            <a:off x="1857374" y="8969374"/>
+            <a:ext cx="55562" cy="55562"/>
           </a:xfrm>
           <a:prstGeom prst="ellipse">
             <a:avLst/>
@@ -10921,12 +10921,12 @@
         </p:nvSpPr>
         <p:spPr>
           <a:xfrm>
-            <a:off x="539749" y="7286624"/>
-            <a:ext cx="2492374" cy="349249"/>
+            <a:off x="460374" y="9143999"/>
+            <a:ext cx="2603499" cy="444499"/>
           </a:xfrm>
           <a:prstGeom prst="roundRect">
             <a:avLst>
-              <a:gd name="adj" fmla="val 13636"/>
+              <a:gd name="adj" fmla="val 10714"/>
             </a:avLst>
           </a:prstGeom>
           <a:solidFill>
@@ -10969,8 +10969,8 @@
         </p:nvSpPr>
         <p:spPr>
           <a:xfrm>
-            <a:off x="595312" y="7318374"/>
-            <a:ext cx="2381249" cy="285749"/>
+            <a:off x="515937" y="9175749"/>
+            <a:ext cx="2492374" cy="380999"/>
           </a:xfrm>
           <a:prstGeom prst="rect">
             <a:avLst/>
@@ -10986,7 +10986,7 @@
           <a:p>
             <a:pPr algn="ctr" fontAlgn="base">
               <a:lnSpc>
-                <a:spcPts val="1734"/>
+                <a:spcPts val="2546"/>
               </a:lnSpc>
               <a:spcBef>
                 <a:spcPts val="0"/>
@@ -10994,7 +10994,7 @@
               <a:spcAft>
                 <a:spcPts val="0"/>
               </a:spcAft>
-              <a:defRPr sz="1187" b="1" i="0" lang="zh-CN" dirty="0">
+              <a:defRPr sz="1749" b="0" i="0" lang="zh-CN" dirty="0">
                 <a:solidFill>
                   <a:srgbClr val="27303A"/>
                 </a:solidFill>
@@ -11004,7 +11004,7 @@
               </a:defRPr>
             </a:pPr>
             <a:r>
-              <a:rPr sz="1187" b="1" i="0" lang="zh-CN" dirty="0">
+              <a:rPr sz="1749" b="0" i="0" lang="zh-CN" dirty="0">
                 <a:solidFill>
                   <a:srgbClr val="27303A"/>
                 </a:solidFill>
@@ -11025,12 +11025,12 @@
         </p:nvSpPr>
         <p:spPr>
           <a:xfrm>
-            <a:off x="3270249" y="6270624"/>
-            <a:ext cx="2778124" cy="1476374"/>
+            <a:off x="3238499" y="8120062"/>
+            <a:ext cx="2809874" cy="1579562"/>
           </a:xfrm>
           <a:prstGeom prst="roundRect">
             <a:avLst>
-              <a:gd name="adj" fmla="val 4838"/>
+              <a:gd name="adj" fmla="val 4522"/>
             </a:avLst>
           </a:prstGeom>
           <a:solidFill>
@@ -11073,12 +11073,12 @@
         </p:nvSpPr>
         <p:spPr>
           <a:xfrm>
-            <a:off x="3270249" y="6270624"/>
-            <a:ext cx="55562" cy="1476374"/>
+            <a:off x="3238499" y="8120062"/>
+            <a:ext cx="47624" cy="1579562"/>
           </a:xfrm>
           <a:prstGeom prst="roundRect">
             <a:avLst>
-              <a:gd name="adj" fmla="val 42857"/>
+              <a:gd name="adj" fmla="val 50000"/>
             </a:avLst>
           </a:prstGeom>
           <a:solidFill>
@@ -11119,8 +11119,8 @@
         </p:nvSpPr>
         <p:spPr>
           <a:xfrm>
-            <a:off x="3397249" y="6381749"/>
-            <a:ext cx="2524124" cy="317499"/>
+            <a:off x="3365499" y="8215312"/>
+            <a:ext cx="2603499" cy="420687"/>
           </a:xfrm>
           <a:prstGeom prst="rect">
             <a:avLst/>
@@ -11136,7 +11136,7 @@
           <a:p>
             <a:pPr algn="ctr" fontAlgn="base">
               <a:lnSpc>
-                <a:spcPts val="1765"/>
+                <a:spcPts val="2281"/>
               </a:lnSpc>
               <a:spcBef>
                 <a:spcPts val="0"/>
@@ -11144,7 +11144,7 @@
               <a:spcAft>
                 <a:spcPts val="0"/>
               </a:spcAft>
-              <a:defRPr sz="1499" b="1" i="0" lang="zh-CN" dirty="0">
+              <a:defRPr sz="1937" b="1" i="0" lang="zh-CN" dirty="0">
                 <a:solidFill>
                   <a:srgbClr val="0F4F58"/>
                 </a:solidFill>
@@ -11154,7 +11154,7 @@
               </a:defRPr>
             </a:pPr>
             <a:r>
-              <a:rPr sz="1499" b="1" i="0" lang="zh-CN" dirty="0">
+              <a:rPr sz="1937" b="1" i="0" lang="zh-CN" dirty="0">
                 <a:solidFill>
                   <a:srgbClr val="0F4F58"/>
                 </a:solidFill>
@@ -11175,8 +11175,8 @@
         </p:nvCxnSpPr>
         <p:spPr>
           <a:xfrm>
-            <a:off x="4484687" y="7096124"/>
-            <a:ext cx="71437" cy="0"/>
+            <a:off x="4516437" y="8993187"/>
+            <a:ext cx="55562" cy="0"/>
           </a:xfrm>
           <a:prstGeom prst="line">
             <a:avLst/>
@@ -11211,8 +11211,8 @@
         </p:nvCxnSpPr>
         <p:spPr>
           <a:xfrm flipV="1">
-            <a:off x="4556124" y="6889749"/>
-            <a:ext cx="23813" cy="206375"/>
+            <a:off x="4571999" y="8810624"/>
+            <a:ext cx="23813" cy="182563"/>
           </a:xfrm>
           <a:prstGeom prst="line">
             <a:avLst/>
@@ -11247,8 +11247,8 @@
         </p:nvCxnSpPr>
         <p:spPr>
           <a:xfrm>
-            <a:off x="4579937" y="6889749"/>
-            <a:ext cx="31750" cy="206375"/>
+            <a:off x="4595812" y="8810624"/>
+            <a:ext cx="23812" cy="182563"/>
           </a:xfrm>
           <a:prstGeom prst="line">
             <a:avLst/>
@@ -11283,7 +11283,7 @@
         </p:nvCxnSpPr>
         <p:spPr>
           <a:xfrm>
-            <a:off x="4611687" y="7096124"/>
+            <a:off x="4619624" y="8993187"/>
             <a:ext cx="47625" cy="0"/>
           </a:xfrm>
           <a:prstGeom prst="line">
@@ -11319,8 +11319,8 @@
         </p:nvCxnSpPr>
         <p:spPr>
           <a:xfrm flipV="1">
-            <a:off x="4659312" y="6961187"/>
-            <a:ext cx="23812" cy="134937"/>
+            <a:off x="4667249" y="8874124"/>
+            <a:ext cx="23813" cy="119063"/>
           </a:xfrm>
           <a:prstGeom prst="line">
             <a:avLst/>
@@ -11355,8 +11355,8 @@
         </p:nvCxnSpPr>
         <p:spPr>
           <a:xfrm>
-            <a:off x="4683124" y="6961187"/>
-            <a:ext cx="23813" cy="134937"/>
+            <a:off x="4691062" y="8874124"/>
+            <a:ext cx="23812" cy="119063"/>
           </a:xfrm>
           <a:prstGeom prst="line">
             <a:avLst/>
@@ -11391,8 +11391,8 @@
         </p:nvCxnSpPr>
         <p:spPr>
           <a:xfrm>
-            <a:off x="4706937" y="7096124"/>
-            <a:ext cx="55562" cy="0"/>
+            <a:off x="4714874" y="8993187"/>
+            <a:ext cx="47625" cy="0"/>
           </a:xfrm>
           <a:prstGeom prst="line">
             <a:avLst/>
@@ -11427,8 +11427,8 @@
         </p:nvCxnSpPr>
         <p:spPr>
           <a:xfrm flipV="1">
-            <a:off x="4762499" y="7008812"/>
-            <a:ext cx="15875" cy="87312"/>
+            <a:off x="4762499" y="8921749"/>
+            <a:ext cx="7938" cy="71438"/>
           </a:xfrm>
           <a:prstGeom prst="line">
             <a:avLst/>
@@ -11463,8 +11463,8 @@
         </p:nvCxnSpPr>
         <p:spPr>
           <a:xfrm>
-            <a:off x="4778374" y="7008812"/>
-            <a:ext cx="15875" cy="87312"/>
+            <a:off x="4770437" y="8921749"/>
+            <a:ext cx="15875" cy="71438"/>
           </a:xfrm>
           <a:prstGeom prst="line">
             <a:avLst/>
@@ -11499,8 +11499,8 @@
         </p:nvCxnSpPr>
         <p:spPr>
           <a:xfrm>
-            <a:off x="4794249" y="7096124"/>
-            <a:ext cx="47625" cy="0"/>
+            <a:off x="4786312" y="8993187"/>
+            <a:ext cx="39687" cy="0"/>
           </a:xfrm>
           <a:prstGeom prst="line">
             <a:avLst/>
@@ -11535,12 +11535,12 @@
         </p:nvSpPr>
         <p:spPr>
           <a:xfrm>
-            <a:off x="3413124" y="7286624"/>
-            <a:ext cx="2492374" cy="349249"/>
+            <a:off x="3365499" y="9143999"/>
+            <a:ext cx="2603499" cy="444499"/>
           </a:xfrm>
           <a:prstGeom prst="roundRect">
             <a:avLst>
-              <a:gd name="adj" fmla="val 13636"/>
+              <a:gd name="adj" fmla="val 10714"/>
             </a:avLst>
           </a:prstGeom>
           <a:solidFill>
@@ -11583,8 +11583,8 @@
         </p:nvSpPr>
         <p:spPr>
           <a:xfrm>
-            <a:off x="3468687" y="7318374"/>
-            <a:ext cx="2381249" cy="285749"/>
+            <a:off x="3421062" y="9175749"/>
+            <a:ext cx="2492374" cy="380999"/>
           </a:xfrm>
           <a:prstGeom prst="rect">
             <a:avLst/>
@@ -11600,7 +11600,7 @@
           <a:p>
             <a:pPr algn="ctr" fontAlgn="base">
               <a:lnSpc>
-                <a:spcPts val="1734"/>
+                <a:spcPts val="2546"/>
               </a:lnSpc>
               <a:spcBef>
                 <a:spcPts val="0"/>
@@ -11608,7 +11608,7 @@
               <a:spcAft>
                 <a:spcPts val="0"/>
               </a:spcAft>
-              <a:defRPr sz="1187" b="1" i="0" lang="zh-CN" dirty="0">
+              <a:defRPr sz="1749" b="0" i="0" lang="zh-CN" dirty="0">
                 <a:solidFill>
                   <a:srgbClr val="27303A"/>
                 </a:solidFill>
@@ -11618,7 +11618,7 @@
               </a:defRPr>
             </a:pPr>
             <a:r>
-              <a:rPr sz="1187" b="1" i="0" lang="zh-CN" dirty="0">
+              <a:rPr sz="1749" b="0" i="0" lang="zh-CN" dirty="0">
                 <a:solidFill>
                   <a:srgbClr val="27303A"/>
                 </a:solidFill>
@@ -11639,12 +11639,12 @@
         </p:nvSpPr>
         <p:spPr>
           <a:xfrm>
-            <a:off x="6143624" y="6270624"/>
-            <a:ext cx="2778124" cy="1476374"/>
+            <a:off x="6143624" y="8120062"/>
+            <a:ext cx="2809874" cy="1579562"/>
           </a:xfrm>
           <a:prstGeom prst="roundRect">
             <a:avLst>
-              <a:gd name="adj" fmla="val 4838"/>
+              <a:gd name="adj" fmla="val 4522"/>
             </a:avLst>
           </a:prstGeom>
           <a:solidFill>
@@ -11687,12 +11687,12 @@
         </p:nvSpPr>
         <p:spPr>
           <a:xfrm>
-            <a:off x="6143624" y="6270624"/>
-            <a:ext cx="55562" cy="1476374"/>
+            <a:off x="6143624" y="8120062"/>
+            <a:ext cx="47624" cy="1579562"/>
           </a:xfrm>
           <a:prstGeom prst="roundRect">
             <a:avLst>
-              <a:gd name="adj" fmla="val 42857"/>
+              <a:gd name="adj" fmla="val 50000"/>
             </a:avLst>
           </a:prstGeom>
           <a:solidFill>
@@ -11733,8 +11733,8 @@
         </p:nvSpPr>
         <p:spPr>
           <a:xfrm>
-            <a:off x="6270624" y="6381749"/>
-            <a:ext cx="2524124" cy="317499"/>
+            <a:off x="6270624" y="8215312"/>
+            <a:ext cx="2603499" cy="420687"/>
           </a:xfrm>
           <a:prstGeom prst="rect">
             <a:avLst/>
@@ -11750,7 +11750,7 @@
           <a:p>
             <a:pPr algn="ctr" fontAlgn="base">
               <a:lnSpc>
-                <a:spcPts val="2187"/>
+                <a:spcPts val="2812"/>
               </a:lnSpc>
               <a:spcBef>
                 <a:spcPts val="0"/>
@@ -11758,7 +11758,7 @@
               <a:spcAft>
                 <a:spcPts val="0"/>
               </a:spcAft>
-              <a:defRPr sz="1499" b="1" i="0" lang="zh-CN" dirty="0">
+              <a:defRPr sz="1937" b="1" i="0" lang="zh-CN" dirty="0">
                 <a:solidFill>
                   <a:srgbClr val="0F4F58"/>
                 </a:solidFill>
@@ -11768,7 +11768,7 @@
               </a:defRPr>
             </a:pPr>
             <a:r>
-              <a:rPr sz="1499" b="1" i="0" lang="zh-CN" dirty="0">
+              <a:rPr sz="1937" b="1" i="0" lang="zh-CN" dirty="0">
                 <a:solidFill>
                   <a:srgbClr val="0F4F58"/>
                 </a:solidFill>
@@ -11789,8 +11789,8 @@
         </p:nvSpPr>
         <p:spPr>
           <a:xfrm>
-            <a:off x="7358062" y="6897687"/>
-            <a:ext cx="119062" cy="119062"/>
+            <a:off x="7421562" y="8818562"/>
+            <a:ext cx="103187" cy="103187"/>
           </a:xfrm>
           <a:prstGeom prst="ellipse">
             <a:avLst/>
@@ -11833,8 +11833,8 @@
         </p:nvSpPr>
         <p:spPr>
           <a:xfrm>
-            <a:off x="7492999" y="6921499"/>
-            <a:ext cx="87312" cy="87312"/>
+            <a:off x="7532687" y="8834437"/>
+            <a:ext cx="79374" cy="79374"/>
           </a:xfrm>
           <a:prstGeom prst="ellipse">
             <a:avLst/>
@@ -11877,8 +11877,8 @@
         </p:nvSpPr>
         <p:spPr>
           <a:xfrm>
-            <a:off x="7612062" y="6929437"/>
-            <a:ext cx="63499" cy="63499"/>
+            <a:off x="7643812" y="8850312"/>
+            <a:ext cx="55562" cy="55562"/>
           </a:xfrm>
           <a:prstGeom prst="ellipse">
             <a:avLst/>
@@ -11921,12 +11921,12 @@
         </p:nvSpPr>
         <p:spPr>
           <a:xfrm>
-            <a:off x="6286499" y="7286624"/>
-            <a:ext cx="2492374" cy="349249"/>
+            <a:off x="6270624" y="9143999"/>
+            <a:ext cx="2603499" cy="444499"/>
           </a:xfrm>
           <a:prstGeom prst="roundRect">
             <a:avLst>
-              <a:gd name="adj" fmla="val 13636"/>
+              <a:gd name="adj" fmla="val 10714"/>
             </a:avLst>
           </a:prstGeom>
           <a:solidFill>
@@ -11969,8 +11969,8 @@
         </p:nvSpPr>
         <p:spPr>
           <a:xfrm>
-            <a:off x="6342062" y="7318374"/>
-            <a:ext cx="2381249" cy="285749"/>
+            <a:off x="6326187" y="9175749"/>
+            <a:ext cx="2492374" cy="380999"/>
           </a:xfrm>
           <a:prstGeom prst="rect">
             <a:avLst/>
@@ -11986,7 +11986,7 @@
           <a:p>
             <a:pPr algn="ctr" fontAlgn="base">
               <a:lnSpc>
-                <a:spcPts val="1734"/>
+                <a:spcPts val="2546"/>
               </a:lnSpc>
               <a:spcBef>
                 <a:spcPts val="0"/>
@@ -11994,7 +11994,7 @@
               <a:spcAft>
                 <a:spcPts val="0"/>
               </a:spcAft>
-              <a:defRPr sz="1187" b="1" i="0" lang="zh-CN" dirty="0">
+              <a:defRPr sz="1749" b="0" i="0" lang="zh-CN" dirty="0">
                 <a:solidFill>
                   <a:srgbClr val="27303A"/>
                 </a:solidFill>
@@ -12004,7 +12004,7 @@
               </a:defRPr>
             </a:pPr>
             <a:r>
-              <a:rPr sz="1187" b="1" i="0" lang="zh-CN" dirty="0">
+              <a:rPr sz="1749" b="0" i="0" lang="zh-CN" dirty="0">
                 <a:solidFill>
                   <a:srgbClr val="27303A"/>
                 </a:solidFill>
@@ -12015,7 +12015,7 @@
               <a:t>名义</a:t>
             </a:r>
             <a:r>
-              <a:rPr sz="1187" b="1" i="0" lang="zh-CN" dirty="0">
+              <a:rPr sz="1749" b="0" i="0" lang="zh-CN" dirty="0">
                 <a:solidFill>
                   <a:srgbClr val="27303A"/>
                 </a:solidFill>
@@ -12026,7 +12026,7 @@
               <a:t>—</a:t>
             </a:r>
             <a:r>
-              <a:rPr sz="1187" b="1" i="0" lang="zh-CN" dirty="0">
+              <a:rPr sz="1749" b="0" i="0" lang="zh-CN" dirty="0">
                 <a:solidFill>
                   <a:srgbClr val="27303A"/>
                 </a:solidFill>
@@ -12037,7 +12037,7 @@
               <a:t>局域</a:t>
             </a:r>
             <a:r>
-              <a:rPr sz="1187" b="1" i="0" lang="zh-CN" dirty="0">
+              <a:rPr sz="1749" b="0" i="0" lang="zh-CN" dirty="0">
                 <a:solidFill>
                   <a:srgbClr val="27303A"/>
                 </a:solidFill>
@@ -12048,7 +12048,7 @@
               <a:t>—</a:t>
             </a:r>
             <a:r>
-              <a:rPr sz="1187" b="1" i="0" lang="zh-CN" dirty="0">
+              <a:rPr sz="1749" b="0" i="0" lang="zh-CN" dirty="0">
                 <a:solidFill>
                   <a:srgbClr val="27303A"/>
                 </a:solidFill>
@@ -12069,12 +12069,12 @@
         </p:nvSpPr>
         <p:spPr>
           <a:xfrm>
-            <a:off x="9016999" y="6270624"/>
-            <a:ext cx="2778124" cy="1476374"/>
+            <a:off x="9048749" y="8120062"/>
+            <a:ext cx="2809874" cy="1579562"/>
           </a:xfrm>
           <a:prstGeom prst="roundRect">
             <a:avLst>
-              <a:gd name="adj" fmla="val 4838"/>
+              <a:gd name="adj" fmla="val 4522"/>
             </a:avLst>
           </a:prstGeom>
           <a:solidFill>
@@ -12117,12 +12117,12 @@
         </p:nvSpPr>
         <p:spPr>
           <a:xfrm>
-            <a:off x="9016999" y="6270624"/>
-            <a:ext cx="55562" cy="1476374"/>
+            <a:off x="9048749" y="8120062"/>
+            <a:ext cx="47624" cy="1579562"/>
           </a:xfrm>
           <a:prstGeom prst="roundRect">
             <a:avLst>
-              <a:gd name="adj" fmla="val 42857"/>
+              <a:gd name="adj" fmla="val 50000"/>
             </a:avLst>
           </a:prstGeom>
           <a:solidFill>
@@ -12163,8 +12163,8 @@
         </p:nvSpPr>
         <p:spPr>
           <a:xfrm>
-            <a:off x="9143999" y="6381749"/>
-            <a:ext cx="2524124" cy="317499"/>
+            <a:off x="9175749" y="8215312"/>
+            <a:ext cx="2603499" cy="420687"/>
           </a:xfrm>
           <a:prstGeom prst="rect">
             <a:avLst/>
@@ -12180,7 +12180,7 @@
           <a:p>
             <a:pPr algn="ctr" fontAlgn="base">
               <a:lnSpc>
-                <a:spcPts val="2187"/>
+                <a:spcPts val="2812"/>
               </a:lnSpc>
               <a:spcBef>
                 <a:spcPts val="0"/>
@@ -12188,7 +12188,7 @@
               <a:spcAft>
                 <a:spcPts val="0"/>
               </a:spcAft>
-              <a:defRPr sz="1499" b="1" i="0" lang="zh-CN" dirty="0">
+              <a:defRPr sz="1937" b="1" i="0" lang="zh-CN" dirty="0">
                 <a:solidFill>
                   <a:srgbClr val="0F4F58"/>
                 </a:solidFill>
@@ -12198,7 +12198,7 @@
               </a:defRPr>
             </a:pPr>
             <a:r>
-              <a:rPr sz="1499" b="1" i="0" lang="zh-CN" dirty="0">
+              <a:rPr sz="1937" b="1" i="0" lang="zh-CN" dirty="0">
                 <a:solidFill>
                   <a:srgbClr val="0F4F58"/>
                 </a:solidFill>
@@ -12219,12 +12219,12 @@
         </p:nvSpPr>
         <p:spPr>
           <a:xfrm>
-            <a:off x="10366374" y="6778624"/>
-            <a:ext cx="87312" cy="246062"/>
+            <a:off x="10437812" y="8715374"/>
+            <a:ext cx="79374" cy="222249"/>
           </a:xfrm>
           <a:prstGeom prst="roundRect">
             <a:avLst>
-              <a:gd name="adj" fmla="val 49090"/>
+              <a:gd name="adj" fmla="val 48000"/>
             </a:avLst>
           </a:prstGeom>
           <a:noFill/>
@@ -12265,8 +12265,8 @@
         </p:nvSpPr>
         <p:spPr>
           <a:xfrm>
-            <a:off x="10334624" y="7024687"/>
-            <a:ext cx="134937" cy="134937"/>
+            <a:off x="10413999" y="8929687"/>
+            <a:ext cx="119062" cy="119062"/>
           </a:xfrm>
           <a:prstGeom prst="ellipse">
             <a:avLst/>
@@ -12309,8 +12309,8 @@
         </p:nvCxnSpPr>
         <p:spPr>
           <a:xfrm>
-            <a:off x="10453687" y="6850062"/>
-            <a:ext cx="55562" cy="0"/>
+            <a:off x="10525124" y="8778874"/>
+            <a:ext cx="47625" cy="0"/>
           </a:xfrm>
           <a:prstGeom prst="line">
             <a:avLst/>
@@ -12345,8 +12345,8 @@
         </p:nvCxnSpPr>
         <p:spPr>
           <a:xfrm>
-            <a:off x="10453687" y="6897687"/>
-            <a:ext cx="55562" cy="0"/>
+            <a:off x="10525124" y="8818562"/>
+            <a:ext cx="47625" cy="0"/>
           </a:xfrm>
           <a:prstGeom prst="line">
             <a:avLst/>
@@ -12381,8 +12381,8 @@
         </p:nvCxnSpPr>
         <p:spPr>
           <a:xfrm>
-            <a:off x="10453687" y="6953249"/>
-            <a:ext cx="55562" cy="0"/>
+            <a:off x="10525124" y="8866187"/>
+            <a:ext cx="47625" cy="0"/>
           </a:xfrm>
           <a:prstGeom prst="line">
             <a:avLst/>
@@ -12417,12 +12417,12 @@
         </p:nvSpPr>
         <p:spPr>
           <a:xfrm>
-            <a:off x="9159874" y="7286624"/>
-            <a:ext cx="2492374" cy="349249"/>
+            <a:off x="9175749" y="9143999"/>
+            <a:ext cx="2603499" cy="444499"/>
           </a:xfrm>
           <a:prstGeom prst="roundRect">
             <a:avLst>
-              <a:gd name="adj" fmla="val 13636"/>
+              <a:gd name="adj" fmla="val 10714"/>
             </a:avLst>
           </a:prstGeom>
           <a:solidFill>
@@ -12465,8 +12465,8 @@
         </p:nvSpPr>
         <p:spPr>
           <a:xfrm>
-            <a:off x="9215437" y="7318374"/>
-            <a:ext cx="2381249" cy="285749"/>
+            <a:off x="9231312" y="9175749"/>
+            <a:ext cx="2492374" cy="380999"/>
           </a:xfrm>
           <a:prstGeom prst="rect">
             <a:avLst/>
@@ -12482,7 +12482,7 @@
           <a:p>
             <a:pPr algn="ctr" fontAlgn="base">
               <a:lnSpc>
-                <a:spcPts val="1734"/>
+                <a:spcPts val="2546"/>
               </a:lnSpc>
               <a:spcBef>
                 <a:spcPts val="0"/>
@@ -12490,7 +12490,7 @@
               <a:spcAft>
                 <a:spcPts val="0"/>
               </a:spcAft>
-              <a:defRPr sz="1187" b="1" i="0" lang="zh-CN" dirty="0">
+              <a:defRPr sz="1749" b="0" i="0" lang="zh-CN" dirty="0">
                 <a:solidFill>
                   <a:srgbClr val="27303A"/>
                 </a:solidFill>
@@ -12500,7 +12500,7 @@
               </a:defRPr>
             </a:pPr>
             <a:r>
-              <a:rPr sz="1187" b="1" i="0" lang="zh-CN" dirty="0">
+              <a:rPr sz="1749" b="0" i="0" lang="zh-CN" dirty="0">
                 <a:solidFill>
                   <a:srgbClr val="27303A"/>
                 </a:solidFill>
@@ -12511,7 +12511,7 @@
               <a:t>原位高温</a:t>
             </a:r>
             <a:r>
-              <a:rPr sz="1187" b="1" i="0" lang="zh-CN" dirty="0">
+              <a:rPr sz="1749" b="0" i="0" lang="zh-CN" dirty="0">
                 <a:solidFill>
                   <a:srgbClr val="27303A"/>
                 </a:solidFill>
@@ -12522,7 +12522,7 @@
               <a:t> ≠ </a:t>
             </a:r>
             <a:r>
-              <a:rPr sz="1187" b="1" i="0" lang="zh-CN" dirty="0">
+              <a:rPr sz="1749" b="0" i="0" lang="zh-CN" dirty="0">
                 <a:solidFill>
                   <a:srgbClr val="27303A"/>
                 </a:solidFill>
@@ -12543,8 +12543,8 @@
         </p:nvSpPr>
         <p:spPr>
           <a:xfrm>
-            <a:off x="1452562" y="3206750"/>
-            <a:ext cx="95250" cy="349250"/>
+            <a:off x="1404937" y="3619500"/>
+            <a:ext cx="95250" cy="865187"/>
           </a:xfrm>
           <a:custGeom>
             <a:avLst/>
@@ -12553,24 +12553,24 @@
             <a:cxnLst/>
             <a:rect l="l" t="t" r="r" b="b"/>
             <a:pathLst>
-              <a:path w="12000" h="44000">
+              <a:path w="12000" h="109000">
                 <a:moveTo>
                   <a:pt x="7250" y="0"/>
                 </a:moveTo>
                 <a:lnTo>
-                  <a:pt x="7250" y="29000"/>
+                  <a:pt x="7250" y="94000"/>
                 </a:lnTo>
                 <a:lnTo>
-                  <a:pt x="12000" y="29000"/>
+                  <a:pt x="12000" y="94000"/>
                 </a:lnTo>
                 <a:lnTo>
-                  <a:pt x="6000" y="44000"/>
+                  <a:pt x="6000" y="109000"/>
                 </a:lnTo>
                 <a:lnTo>
-                  <a:pt x="0" y="29000"/>
+                  <a:pt x="0" y="94000"/>
                 </a:lnTo>
                 <a:lnTo>
-                  <a:pt x="4750" y="29000"/>
+                  <a:pt x="4750" y="94000"/>
                 </a:lnTo>
                 <a:lnTo>
                   <a:pt x="4750" y="0"/>
@@ -12617,8 +12617,8 @@
         </p:nvSpPr>
         <p:spPr>
           <a:xfrm>
-            <a:off x="2127249" y="3222624"/>
-            <a:ext cx="1023937" cy="309562"/>
+            <a:off x="777874" y="3889374"/>
+            <a:ext cx="1357312" cy="404812"/>
           </a:xfrm>
           <a:prstGeom prst="roundRect">
             <a:avLst>
@@ -12665,8 +12665,8 @@
         </p:nvSpPr>
         <p:spPr>
           <a:xfrm>
-            <a:off x="2206624" y="3254374"/>
-            <a:ext cx="865187" cy="246062"/>
+            <a:off x="857249" y="3921124"/>
+            <a:ext cx="1198562" cy="341312"/>
           </a:xfrm>
           <a:prstGeom prst="rect">
             <a:avLst/>
@@ -12682,7 +12682,7 @@
           <a:p>
             <a:pPr algn="ctr" fontAlgn="base">
               <a:lnSpc>
-                <a:spcPts val="1640"/>
+                <a:spcPts val="2359"/>
               </a:lnSpc>
               <a:spcBef>
                 <a:spcPts val="0"/>
@@ -12690,7 +12690,7 @@
               <a:spcAft>
                 <a:spcPts val="0"/>
               </a:spcAft>
-              <a:defRPr sz="1124" b="1" i="0" lang="zh-CN" dirty="0">
+              <a:defRPr sz="1624" b="0" i="0" lang="zh-CN" dirty="0">
                 <a:solidFill>
                   <a:srgbClr val="27303A"/>
                 </a:solidFill>
@@ -12700,7 +12700,7 @@
               </a:defRPr>
             </a:pPr>
             <a:r>
-              <a:rPr sz="1124" b="1" i="0" lang="zh-CN" dirty="0">
+              <a:rPr sz="1624" b="0" i="0" lang="zh-CN" dirty="0">
                 <a:solidFill>
                   <a:srgbClr val="27303A"/>
                 </a:solidFill>
@@ -12711,7 +12711,7 @@
               <a:t>配比</a:t>
             </a:r>
             <a:r>
-              <a:rPr sz="1124" b="1" i="0" lang="zh-CN" dirty="0">
+              <a:rPr sz="1624" b="0" i="0" lang="zh-CN" dirty="0">
                 <a:solidFill>
                   <a:srgbClr val="27303A"/>
                 </a:solidFill>
@@ -12722,7 +12722,7 @@
               <a:t> · </a:t>
             </a:r>
             <a:r>
-              <a:rPr sz="1124" b="1" i="0" lang="zh-CN" dirty="0">
+              <a:rPr sz="1624" b="0" i="0" lang="zh-CN" dirty="0">
                 <a:solidFill>
                   <a:srgbClr val="27303A"/>
                 </a:solidFill>
@@ -12743,8 +12743,8 @@
         </p:nvSpPr>
         <p:spPr>
           <a:xfrm>
-            <a:off x="3738562" y="3206750"/>
-            <a:ext cx="95250" cy="349250"/>
+            <a:off x="3722687" y="3619500"/>
+            <a:ext cx="95250" cy="865187"/>
           </a:xfrm>
           <a:custGeom>
             <a:avLst/>
@@ -12753,24 +12753,24 @@
             <a:cxnLst/>
             <a:rect l="l" t="t" r="r" b="b"/>
             <a:pathLst>
-              <a:path w="12000" h="44000">
+              <a:path w="12000" h="109000">
                 <a:moveTo>
                   <a:pt x="7250" y="0"/>
                 </a:moveTo>
                 <a:lnTo>
-                  <a:pt x="7250" y="29000"/>
+                  <a:pt x="7250" y="94000"/>
                 </a:lnTo>
                 <a:lnTo>
-                  <a:pt x="12000" y="29000"/>
+                  <a:pt x="12000" y="94000"/>
                 </a:lnTo>
                 <a:lnTo>
-                  <a:pt x="6000" y="44000"/>
+                  <a:pt x="6000" y="109000"/>
                 </a:lnTo>
                 <a:lnTo>
-                  <a:pt x="0" y="29000"/>
+                  <a:pt x="0" y="94000"/>
                 </a:lnTo>
                 <a:lnTo>
-                  <a:pt x="4750" y="29000"/>
+                  <a:pt x="4750" y="94000"/>
                 </a:lnTo>
                 <a:lnTo>
                   <a:pt x="4750" y="0"/>
@@ -12817,8 +12817,8 @@
         </p:nvSpPr>
         <p:spPr>
           <a:xfrm>
-            <a:off x="4413249" y="3222624"/>
-            <a:ext cx="1023937" cy="309562"/>
+            <a:off x="3095624" y="3889374"/>
+            <a:ext cx="1357312" cy="404812"/>
           </a:xfrm>
           <a:prstGeom prst="roundRect">
             <a:avLst>
@@ -12865,8 +12865,8 @@
         </p:nvSpPr>
         <p:spPr>
           <a:xfrm>
-            <a:off x="4492624" y="3254374"/>
-            <a:ext cx="865187" cy="246062"/>
+            <a:off x="3174999" y="3921124"/>
+            <a:ext cx="1198562" cy="341312"/>
           </a:xfrm>
           <a:prstGeom prst="rect">
             <a:avLst/>
@@ -12882,7 +12882,7 @@
           <a:p>
             <a:pPr algn="ctr" fontAlgn="base">
               <a:lnSpc>
-                <a:spcPts val="1640"/>
+                <a:spcPts val="2359"/>
               </a:lnSpc>
               <a:spcBef>
                 <a:spcPts val="0"/>
@@ -12890,7 +12890,7 @@
               <a:spcAft>
                 <a:spcPts val="0"/>
               </a:spcAft>
-              <a:defRPr sz="1124" b="1" i="0" lang="zh-CN" dirty="0">
+              <a:defRPr sz="1624" b="0" i="0" lang="zh-CN" dirty="0">
                 <a:solidFill>
                   <a:srgbClr val="27303A"/>
                 </a:solidFill>
@@ -12900,7 +12900,7 @@
               </a:defRPr>
             </a:pPr>
             <a:r>
-              <a:rPr sz="1124" b="1" i="0" lang="zh-CN" dirty="0">
+              <a:rPr sz="1624" b="0" i="0" lang="zh-CN" dirty="0">
                 <a:solidFill>
                   <a:srgbClr val="27303A"/>
                 </a:solidFill>
@@ -12911,7 +12911,7 @@
               <a:t>熔体</a:t>
             </a:r>
             <a:r>
-              <a:rPr sz="1124" b="1" i="0" lang="zh-CN" dirty="0">
+              <a:rPr sz="1624" b="0" i="0" lang="zh-CN" dirty="0">
                 <a:solidFill>
                   <a:srgbClr val="27303A"/>
                 </a:solidFill>
@@ -12922,7 +12922,7 @@
               <a:t> · </a:t>
             </a:r>
             <a:r>
-              <a:rPr sz="1124" b="1" i="0" lang="zh-CN" dirty="0">
+              <a:rPr sz="1624" b="0" i="0" lang="zh-CN" dirty="0">
                 <a:solidFill>
                   <a:srgbClr val="27303A"/>
                 </a:solidFill>
@@ -12943,8 +12943,8 @@
         </p:nvSpPr>
         <p:spPr>
           <a:xfrm>
-            <a:off x="6024562" y="3206750"/>
-            <a:ext cx="95250" cy="349250"/>
+            <a:off x="6040437" y="3619500"/>
+            <a:ext cx="95250" cy="865187"/>
           </a:xfrm>
           <a:custGeom>
             <a:avLst/>
@@ -12953,24 +12953,24 @@
             <a:cxnLst/>
             <a:rect l="l" t="t" r="r" b="b"/>
             <a:pathLst>
-              <a:path w="12000" h="44000">
+              <a:path w="12000" h="109000">
                 <a:moveTo>
                   <a:pt x="7250" y="0"/>
                 </a:moveTo>
                 <a:lnTo>
-                  <a:pt x="7250" y="29000"/>
+                  <a:pt x="7250" y="94000"/>
                 </a:lnTo>
                 <a:lnTo>
-                  <a:pt x="12000" y="29000"/>
+                  <a:pt x="12000" y="94000"/>
                 </a:lnTo>
                 <a:lnTo>
-                  <a:pt x="6000" y="44000"/>
+                  <a:pt x="6000" y="109000"/>
                 </a:lnTo>
                 <a:lnTo>
-                  <a:pt x="0" y="29000"/>
+                  <a:pt x="0" y="94000"/>
                 </a:lnTo>
                 <a:lnTo>
-                  <a:pt x="4750" y="29000"/>
+                  <a:pt x="4750" y="94000"/>
                 </a:lnTo>
                 <a:lnTo>
                   <a:pt x="4750" y="0"/>
@@ -13017,8 +13017,8 @@
         </p:nvSpPr>
         <p:spPr>
           <a:xfrm>
-            <a:off x="6699249" y="3222624"/>
-            <a:ext cx="1023937" cy="309562"/>
+            <a:off x="5413374" y="3889374"/>
+            <a:ext cx="1357312" cy="404812"/>
           </a:xfrm>
           <a:prstGeom prst="roundRect">
             <a:avLst>
@@ -13065,8 +13065,8 @@
         </p:nvSpPr>
         <p:spPr>
           <a:xfrm>
-            <a:off x="6778624" y="3254374"/>
-            <a:ext cx="865187" cy="246062"/>
+            <a:off x="5492749" y="3921124"/>
+            <a:ext cx="1198562" cy="341312"/>
           </a:xfrm>
           <a:prstGeom prst="rect">
             <a:avLst/>
@@ -13082,7 +13082,7 @@
           <a:p>
             <a:pPr algn="ctr" fontAlgn="base">
               <a:lnSpc>
-                <a:spcPts val="1640"/>
+                <a:spcPts val="2359"/>
               </a:lnSpc>
               <a:spcBef>
                 <a:spcPts val="0"/>
@@ -13090,7 +13090,7 @@
               <a:spcAft>
                 <a:spcPts val="0"/>
               </a:spcAft>
-              <a:defRPr sz="1124" b="1" i="0" lang="zh-CN" dirty="0">
+              <a:defRPr sz="1624" b="0" i="0" lang="zh-CN" dirty="0">
                 <a:solidFill>
                   <a:srgbClr val="27303A"/>
                 </a:solidFill>
@@ -13100,7 +13100,7 @@
               </a:defRPr>
             </a:pPr>
             <a:r>
-              <a:rPr sz="1124" b="1" i="0" lang="zh-CN" dirty="0">
+              <a:rPr sz="1624" b="0" i="0" lang="zh-CN" dirty="0">
                 <a:solidFill>
                   <a:srgbClr val="27303A"/>
                 </a:solidFill>
@@ -13111,7 +13111,7 @@
               <a:t>混合</a:t>
             </a:r>
             <a:r>
-              <a:rPr sz="1124" b="1" i="0" lang="zh-CN" dirty="0">
+              <a:rPr sz="1624" b="0" i="0" lang="zh-CN" dirty="0">
                 <a:solidFill>
                   <a:srgbClr val="27303A"/>
                 </a:solidFill>
@@ -13122,7 +13122,7 @@
               <a:t> · </a:t>
             </a:r>
             <a:r>
-              <a:rPr sz="1124" b="1" i="0" lang="zh-CN" dirty="0">
+              <a:rPr sz="1624" b="0" i="0" lang="zh-CN" dirty="0">
                 <a:solidFill>
                   <a:srgbClr val="27303A"/>
                 </a:solidFill>
@@ -13143,8 +13143,8 @@
         </p:nvSpPr>
         <p:spPr>
           <a:xfrm>
-            <a:off x="8310562" y="3206750"/>
-            <a:ext cx="95250" cy="349250"/>
+            <a:off x="8358187" y="3619500"/>
+            <a:ext cx="95250" cy="865187"/>
           </a:xfrm>
           <a:custGeom>
             <a:avLst/>
@@ -13153,24 +13153,24 @@
             <a:cxnLst/>
             <a:rect l="l" t="t" r="r" b="b"/>
             <a:pathLst>
-              <a:path w="12000" h="44000">
+              <a:path w="12000" h="109000">
                 <a:moveTo>
                   <a:pt x="7250" y="0"/>
                 </a:moveTo>
                 <a:lnTo>
-                  <a:pt x="7250" y="29000"/>
+                  <a:pt x="7250" y="94000"/>
                 </a:lnTo>
                 <a:lnTo>
-                  <a:pt x="12000" y="29000"/>
+                  <a:pt x="12000" y="94000"/>
                 </a:lnTo>
                 <a:lnTo>
-                  <a:pt x="6000" y="44000"/>
+                  <a:pt x="6000" y="109000"/>
                 </a:lnTo>
                 <a:lnTo>
-                  <a:pt x="0" y="29000"/>
+                  <a:pt x="0" y="94000"/>
                 </a:lnTo>
                 <a:lnTo>
-                  <a:pt x="4750" y="29000"/>
+                  <a:pt x="4750" y="94000"/>
                 </a:lnTo>
                 <a:lnTo>
                   <a:pt x="4750" y="0"/>
@@ -13217,8 +13217,8 @@
         </p:nvSpPr>
         <p:spPr>
           <a:xfrm>
-            <a:off x="8985249" y="3222624"/>
-            <a:ext cx="1023937" cy="309562"/>
+            <a:off x="7731124" y="3889374"/>
+            <a:ext cx="1357312" cy="404812"/>
           </a:xfrm>
           <a:prstGeom prst="roundRect">
             <a:avLst>
@@ -13265,8 +13265,8 @@
         </p:nvSpPr>
         <p:spPr>
           <a:xfrm>
-            <a:off x="9064624" y="3254374"/>
-            <a:ext cx="865187" cy="246062"/>
+            <a:off x="7810499" y="3921124"/>
+            <a:ext cx="1198562" cy="341312"/>
           </a:xfrm>
           <a:prstGeom prst="rect">
             <a:avLst/>
@@ -13282,7 +13282,7 @@
           <a:p>
             <a:pPr algn="ctr" fontAlgn="base">
               <a:lnSpc>
-                <a:spcPts val="1640"/>
+                <a:spcPts val="2359"/>
               </a:lnSpc>
               <a:spcBef>
                 <a:spcPts val="0"/>
@@ -13290,7 +13290,7 @@
               <a:spcAft>
                 <a:spcPts val="0"/>
               </a:spcAft>
-              <a:defRPr sz="1124" b="1" i="0" lang="zh-CN" dirty="0">
+              <a:defRPr sz="1624" b="0" i="0" lang="zh-CN" dirty="0">
                 <a:solidFill>
                   <a:srgbClr val="27303A"/>
                 </a:solidFill>
@@ -13300,7 +13300,7 @@
               </a:defRPr>
             </a:pPr>
             <a:r>
-              <a:rPr sz="1124" b="1" i="0" lang="zh-CN" dirty="0">
+              <a:rPr sz="1624" b="0" i="0" lang="zh-CN" dirty="0">
                 <a:solidFill>
                   <a:srgbClr val="27303A"/>
                 </a:solidFill>
@@ -13311,7 +13311,7 @@
               <a:t>研磨</a:t>
             </a:r>
             <a:r>
-              <a:rPr sz="1124" b="1" i="0" lang="zh-CN" dirty="0">
+              <a:rPr sz="1624" b="0" i="0" lang="zh-CN" dirty="0">
                 <a:solidFill>
                   <a:srgbClr val="27303A"/>
                 </a:solidFill>
@@ -13322,7 +13322,7 @@
               <a:t> · </a:t>
             </a:r>
             <a:r>
-              <a:rPr sz="1124" b="1" i="0" lang="zh-CN" dirty="0">
+              <a:rPr sz="1624" b="0" i="0" lang="zh-CN" dirty="0">
                 <a:solidFill>
                   <a:srgbClr val="27303A"/>
                 </a:solidFill>
@@ -13343,8 +13343,8 @@
         </p:nvCxnSpPr>
         <p:spPr>
           <a:xfrm>
-            <a:off x="10644187" y="3206749"/>
-            <a:ext cx="0" cy="349250"/>
+            <a:off x="10723562" y="3619499"/>
+            <a:ext cx="0" cy="865188"/>
           </a:xfrm>
           <a:prstGeom prst="line">
             <a:avLst/>
@@ -13383,8 +13383,8 @@
         </p:nvSpPr>
         <p:spPr>
           <a:xfrm>
-            <a:off x="10128249" y="3222624"/>
-            <a:ext cx="1023937" cy="309562"/>
+            <a:off x="10048874" y="3889374"/>
+            <a:ext cx="1357312" cy="404812"/>
           </a:xfrm>
           <a:prstGeom prst="roundRect">
             <a:avLst>
@@ -13431,8 +13431,8 @@
         </p:nvSpPr>
         <p:spPr>
           <a:xfrm>
-            <a:off x="10207624" y="3254374"/>
-            <a:ext cx="865187" cy="246062"/>
+            <a:off x="10128249" y="3921124"/>
+            <a:ext cx="1198562" cy="341312"/>
           </a:xfrm>
           <a:prstGeom prst="rect">
             <a:avLst/>
@@ -13448,7 +13448,7 @@
           <a:p>
             <a:pPr algn="ctr" fontAlgn="base">
               <a:lnSpc>
-                <a:spcPts val="1640"/>
+                <a:spcPts val="2359"/>
               </a:lnSpc>
               <a:spcBef>
                 <a:spcPts val="0"/>
@@ -13456,7 +13456,7 @@
               <a:spcAft>
                 <a:spcPts val="0"/>
               </a:spcAft>
-              <a:defRPr sz="1124" b="1" i="0" lang="zh-CN" dirty="0">
+              <a:defRPr sz="1624" b="0" i="0" lang="zh-CN" dirty="0">
                 <a:solidFill>
                   <a:srgbClr val="27303A"/>
                 </a:solidFill>
@@ -13466,7 +13466,7 @@
               </a:defRPr>
             </a:pPr>
             <a:r>
-              <a:rPr sz="1124" b="1" i="0" lang="zh-CN" dirty="0">
+              <a:rPr sz="1624" b="0" i="0" lang="zh-CN" dirty="0">
                 <a:solidFill>
                   <a:srgbClr val="27303A"/>
                 </a:solidFill>
@@ -13477,7 +13477,7 @@
               <a:t>籽晶</a:t>
             </a:r>
             <a:r>
-              <a:rPr sz="1124" b="1" i="0" lang="zh-CN" dirty="0">
+              <a:rPr sz="1624" b="0" i="0" lang="zh-CN" dirty="0">
                 <a:solidFill>
                   <a:srgbClr val="27303A"/>
                 </a:solidFill>
@@ -13488,7 +13488,7 @@
               <a:t> · </a:t>
             </a:r>
             <a:r>
-              <a:rPr sz="1124" b="1" i="0" lang="zh-CN" dirty="0">
+              <a:rPr sz="1624" b="0" i="0" lang="zh-CN" dirty="0">
                 <a:solidFill>
                   <a:srgbClr val="27303A"/>
                 </a:solidFill>
@@ -13509,8 +13509,8 @@
         </p:nvSpPr>
         <p:spPr>
           <a:xfrm>
-            <a:off x="1738312" y="5572125"/>
-            <a:ext cx="95250" cy="174625"/>
+            <a:off x="1690687" y="6667500"/>
+            <a:ext cx="95250" cy="865187"/>
           </a:xfrm>
           <a:custGeom>
             <a:avLst/>
@@ -13519,24 +13519,24 @@
             <a:cxnLst/>
             <a:rect l="l" t="t" r="r" b="b"/>
             <a:pathLst>
-              <a:path w="12000" h="22000">
+              <a:path w="12000" h="109000">
                 <a:moveTo>
                   <a:pt x="7250" y="0"/>
                 </a:moveTo>
                 <a:lnTo>
-                  <a:pt x="7250" y="7000"/>
+                  <a:pt x="7250" y="94000"/>
                 </a:lnTo>
                 <a:lnTo>
-                  <a:pt x="12000" y="7000"/>
+                  <a:pt x="12000" y="94000"/>
                 </a:lnTo>
                 <a:lnTo>
-                  <a:pt x="6000" y="22000"/>
+                  <a:pt x="6000" y="109000"/>
                 </a:lnTo>
                 <a:lnTo>
-                  <a:pt x="0" y="7000"/>
+                  <a:pt x="0" y="94000"/>
                 </a:lnTo>
                 <a:lnTo>
-                  <a:pt x="4750" y="7000"/>
+                  <a:pt x="4750" y="94000"/>
                 </a:lnTo>
                 <a:lnTo>
                   <a:pt x="4750" y="0"/>
@@ -13583,8 +13583,8 @@
         </p:nvSpPr>
         <p:spPr>
           <a:xfrm>
-            <a:off x="2936874" y="5508624"/>
-            <a:ext cx="571499" cy="309562"/>
+            <a:off x="1389062" y="6937374"/>
+            <a:ext cx="698499" cy="404812"/>
           </a:xfrm>
           <a:prstGeom prst="roundRect">
             <a:avLst>
@@ -13631,8 +13631,8 @@
         </p:nvSpPr>
         <p:spPr>
           <a:xfrm>
-            <a:off x="3016249" y="5540374"/>
-            <a:ext cx="412749" cy="246062"/>
+            <a:off x="1468437" y="6969124"/>
+            <a:ext cx="539749" cy="341312"/>
           </a:xfrm>
           <a:prstGeom prst="rect">
             <a:avLst/>
@@ -13648,7 +13648,7 @@
           <a:p>
             <a:pPr algn="ctr" fontAlgn="base">
               <a:lnSpc>
-                <a:spcPts val="1640"/>
+                <a:spcPts val="2359"/>
               </a:lnSpc>
               <a:spcBef>
                 <a:spcPts val="0"/>
@@ -13656,7 +13656,7 @@
               <a:spcAft>
                 <a:spcPts val="0"/>
               </a:spcAft>
-              <a:defRPr sz="1124" b="1" i="0" lang="zh-CN" dirty="0">
+              <a:defRPr sz="1624" b="0" i="0" lang="zh-CN" dirty="0">
                 <a:solidFill>
                   <a:srgbClr val="27303A"/>
                 </a:solidFill>
@@ -13666,7 +13666,7 @@
               </a:defRPr>
             </a:pPr>
             <a:r>
-              <a:rPr sz="1124" b="1" i="0" lang="zh-CN" dirty="0">
+              <a:rPr sz="1624" b="0" i="0" lang="zh-CN" dirty="0">
                 <a:solidFill>
                   <a:srgbClr val="27303A"/>
                 </a:solidFill>
@@ -13687,8 +13687,8 @@
         </p:nvSpPr>
         <p:spPr>
           <a:xfrm>
-            <a:off x="4611687" y="5572125"/>
-            <a:ext cx="95250" cy="174625"/>
+            <a:off x="4595812" y="6667500"/>
+            <a:ext cx="95250" cy="865187"/>
           </a:xfrm>
           <a:custGeom>
             <a:avLst/>
@@ -13697,24 +13697,24 @@
             <a:cxnLst/>
             <a:rect l="l" t="t" r="r" b="b"/>
             <a:pathLst>
-              <a:path w="12000" h="22000">
+              <a:path w="12000" h="109000">
                 <a:moveTo>
                   <a:pt x="7250" y="0"/>
                 </a:moveTo>
                 <a:lnTo>
-                  <a:pt x="7250" y="7000"/>
+                  <a:pt x="7250" y="94000"/>
                 </a:lnTo>
                 <a:lnTo>
-                  <a:pt x="12000" y="7000"/>
+                  <a:pt x="12000" y="94000"/>
                 </a:lnTo>
                 <a:lnTo>
-                  <a:pt x="6000" y="22000"/>
+                  <a:pt x="6000" y="109000"/>
                 </a:lnTo>
                 <a:lnTo>
-                  <a:pt x="0" y="7000"/>
+                  <a:pt x="0" y="94000"/>
                 </a:lnTo>
                 <a:lnTo>
-                  <a:pt x="4750" y="7000"/>
+                  <a:pt x="4750" y="94000"/>
                 </a:lnTo>
                 <a:lnTo>
                   <a:pt x="4750" y="0"/>
@@ -13761,8 +13761,8 @@
         </p:nvSpPr>
         <p:spPr>
           <a:xfrm>
-            <a:off x="5738812" y="5508624"/>
-            <a:ext cx="714374" cy="309562"/>
+            <a:off x="4190999" y="6937374"/>
+            <a:ext cx="904874" cy="404812"/>
           </a:xfrm>
           <a:prstGeom prst="roundRect">
             <a:avLst>
@@ -13809,8 +13809,8 @@
         </p:nvSpPr>
         <p:spPr>
           <a:xfrm>
-            <a:off x="5818187" y="5540374"/>
-            <a:ext cx="555624" cy="246062"/>
+            <a:off x="4270374" y="6969124"/>
+            <a:ext cx="746124" cy="341312"/>
           </a:xfrm>
           <a:prstGeom prst="rect">
             <a:avLst/>
@@ -13826,7 +13826,7 @@
           <a:p>
             <a:pPr algn="ctr" fontAlgn="base">
               <a:lnSpc>
-                <a:spcPts val="1640"/>
+                <a:spcPts val="2359"/>
               </a:lnSpc>
               <a:spcBef>
                 <a:spcPts val="0"/>
@@ -13834,7 +13834,7 @@
               <a:spcAft>
                 <a:spcPts val="0"/>
               </a:spcAft>
-              <a:defRPr sz="1124" b="1" i="0" lang="zh-CN" dirty="0">
+              <a:defRPr sz="1624" b="0" i="0" lang="zh-CN" dirty="0">
                 <a:solidFill>
                   <a:srgbClr val="27303A"/>
                 </a:solidFill>
@@ -13844,7 +13844,7 @@
               </a:defRPr>
             </a:pPr>
             <a:r>
-              <a:rPr sz="1124" b="1" i="0" lang="zh-CN" dirty="0">
+              <a:rPr sz="1624" b="0" i="0" lang="zh-CN" dirty="0">
                 <a:solidFill>
                   <a:srgbClr val="27303A"/>
                 </a:solidFill>
@@ -13865,8 +13865,8 @@
         </p:nvSpPr>
         <p:spPr>
           <a:xfrm>
-            <a:off x="7485062" y="5572125"/>
-            <a:ext cx="95250" cy="174625"/>
+            <a:off x="7500937" y="6667500"/>
+            <a:ext cx="95250" cy="865187"/>
           </a:xfrm>
           <a:custGeom>
             <a:avLst/>
@@ -13875,24 +13875,24 @@
             <a:cxnLst/>
             <a:rect l="l" t="t" r="r" b="b"/>
             <a:pathLst>
-              <a:path w="12000" h="22000">
+              <a:path w="12000" h="109000">
                 <a:moveTo>
                   <a:pt x="7250" y="0"/>
                 </a:moveTo>
                 <a:lnTo>
-                  <a:pt x="7250" y="7000"/>
+                  <a:pt x="7250" y="94000"/>
                 </a:lnTo>
                 <a:lnTo>
-                  <a:pt x="12000" y="7000"/>
+                  <a:pt x="12000" y="94000"/>
                 </a:lnTo>
                 <a:lnTo>
-                  <a:pt x="6000" y="22000"/>
+                  <a:pt x="6000" y="109000"/>
                 </a:lnTo>
                 <a:lnTo>
-                  <a:pt x="0" y="7000"/>
+                  <a:pt x="0" y="94000"/>
                 </a:lnTo>
                 <a:lnTo>
-                  <a:pt x="4750" y="7000"/>
+                  <a:pt x="4750" y="94000"/>
                 </a:lnTo>
                 <a:lnTo>
                   <a:pt x="4750" y="0"/>
@@ -13939,8 +13939,8 @@
         </p:nvSpPr>
         <p:spPr>
           <a:xfrm>
-            <a:off x="8683624" y="5508624"/>
-            <a:ext cx="571499" cy="309562"/>
+            <a:off x="7199312" y="6937374"/>
+            <a:ext cx="698499" cy="404812"/>
           </a:xfrm>
           <a:prstGeom prst="roundRect">
             <a:avLst>
@@ -13987,8 +13987,8 @@
         </p:nvSpPr>
         <p:spPr>
           <a:xfrm>
-            <a:off x="8762999" y="5540374"/>
-            <a:ext cx="412749" cy="246062"/>
+            <a:off x="7278687" y="6969124"/>
+            <a:ext cx="539749" cy="341312"/>
           </a:xfrm>
           <a:prstGeom prst="rect">
             <a:avLst/>
@@ -14004,7 +14004,7 @@
           <a:p>
             <a:pPr algn="ctr" fontAlgn="base">
               <a:lnSpc>
-                <a:spcPts val="1640"/>
+                <a:spcPts val="2359"/>
               </a:lnSpc>
               <a:spcBef>
                 <a:spcPts val="0"/>
@@ -14012,7 +14012,7 @@
               <a:spcAft>
                 <a:spcPts val="0"/>
               </a:spcAft>
-              <a:defRPr sz="1124" b="1" i="0" lang="zh-CN" dirty="0">
+              <a:defRPr sz="1624" b="0" i="0" lang="zh-CN" dirty="0">
                 <a:solidFill>
                   <a:srgbClr val="27303A"/>
                 </a:solidFill>
@@ -14022,7 +14022,7 @@
               </a:defRPr>
             </a:pPr>
             <a:r>
-              <a:rPr sz="1124" b="1" i="0" lang="zh-CN" dirty="0">
+              <a:rPr sz="1624" b="0" i="0" lang="zh-CN" dirty="0">
                 <a:solidFill>
                   <a:srgbClr val="27303A"/>
                 </a:solidFill>
@@ -14043,8 +14043,8 @@
         </p:nvSpPr>
         <p:spPr>
           <a:xfrm>
-            <a:off x="10358437" y="5572125"/>
-            <a:ext cx="95250" cy="174625"/>
+            <a:off x="10406062" y="6667500"/>
+            <a:ext cx="95250" cy="865187"/>
           </a:xfrm>
           <a:custGeom>
             <a:avLst/>
@@ -14053,24 +14053,24 @@
             <a:cxnLst/>
             <a:rect l="l" t="t" r="r" b="b"/>
             <a:pathLst>
-              <a:path w="12000" h="22000">
+              <a:path w="12000" h="109000">
                 <a:moveTo>
                   <a:pt x="7250" y="0"/>
                 </a:moveTo>
                 <a:lnTo>
-                  <a:pt x="7250" y="7000"/>
+                  <a:pt x="7250" y="94000"/>
                 </a:lnTo>
                 <a:lnTo>
-                  <a:pt x="12000" y="7000"/>
+                  <a:pt x="12000" y="94000"/>
                 </a:lnTo>
                 <a:lnTo>
-                  <a:pt x="6000" y="22000"/>
+                  <a:pt x="6000" y="109000"/>
                 </a:lnTo>
                 <a:lnTo>
-                  <a:pt x="0" y="7000"/>
+                  <a:pt x="0" y="94000"/>
                 </a:lnTo>
                 <a:lnTo>
-                  <a:pt x="4750" y="7000"/>
+                  <a:pt x="4750" y="94000"/>
                 </a:lnTo>
                 <a:lnTo>
                   <a:pt x="4750" y="0"/>
@@ -14117,8 +14117,8 @@
         </p:nvSpPr>
         <p:spPr>
           <a:xfrm>
-            <a:off x="10120312" y="5508624"/>
-            <a:ext cx="571499" cy="309562"/>
+            <a:off x="10104437" y="6937374"/>
+            <a:ext cx="698499" cy="404812"/>
           </a:xfrm>
           <a:prstGeom prst="roundRect">
             <a:avLst>
@@ -14165,8 +14165,8 @@
         </p:nvSpPr>
         <p:spPr>
           <a:xfrm>
-            <a:off x="10199687" y="5540374"/>
-            <a:ext cx="412749" cy="246062"/>
+            <a:off x="10183812" y="6969124"/>
+            <a:ext cx="539749" cy="341312"/>
           </a:xfrm>
           <a:prstGeom prst="rect">
             <a:avLst/>
@@ -14182,7 +14182,7 @@
           <a:p>
             <a:pPr algn="ctr" fontAlgn="base">
               <a:lnSpc>
-                <a:spcPts val="1640"/>
+                <a:spcPts val="2359"/>
               </a:lnSpc>
               <a:spcBef>
                 <a:spcPts val="0"/>
@@ -14190,7 +14190,7 @@
               <a:spcAft>
                 <a:spcPts val="0"/>
               </a:spcAft>
-              <a:defRPr sz="1124" b="1" i="0" lang="zh-CN" dirty="0">
+              <a:defRPr sz="1624" b="0" i="0" lang="zh-CN" dirty="0">
                 <a:solidFill>
                   <a:srgbClr val="27303A"/>
                 </a:solidFill>
@@ -14200,7 +14200,7 @@
               </a:defRPr>
             </a:pPr>
             <a:r>
-              <a:rPr sz="1124" b="1" i="0" lang="zh-CN" dirty="0">
+              <a:rPr sz="1624" b="0" i="0" lang="zh-CN" dirty="0">
                 <a:solidFill>
                   <a:srgbClr val="27303A"/>
                 </a:solidFill>
